--- a/Computer_Vision_Presentation.pptx
+++ b/Computer_Vision_Presentation.pptx
@@ -588,7 +588,7 @@
           <a:lstStyle/>
           <a:p>
             <a:r>
-              <a:t>We only run CLIP on car crops above 80×80 px, gating the brand at 0.3 confidence. No hallucinated labels.</a:t>
+              <a:t>This is a real frame from the Stage 2b pipeline. YOLO26s detects the cars (YOLO conf=0.2); CLIP crops each car, runs it through the frozen ViT-B-32 backbone and the learned 512→20 linear probe, and overlays the top-1 brand with confidence. We only run CLIP on car crops above 80×80 px. Trucks are intentionally skipped — the probe was trained on car-only images and would miscalibrate on truck crops. Brand confidence is currently not thresholded (a known limit).</a:t>
             </a:r>
           </a:p>
         </p:txBody>
@@ -728,7 +728,7 @@
           <a:lstStyle/>
           <a:p>
             <a:r>
-              <a:t>Boxes and brands are intermediate outputs. The real product is a sentence: 'A white Toyota is stopping at a red light while pedestrians cross.' That's what a customer demo needs.</a:t>
+              <a:t>This is a real output from Stage 3. YOLO sees 'car, trafficLight' — the VLM narrates 'A red car is driving down a wet road in the rain, approaching a traffic light.' Boxes and brands are intermediate outputs. The real product is a sentence any human can read. That's what a customer demo needs.</a:t>
             </a:r>
           </a:p>
         </p:txBody>
@@ -798,7 +798,7 @@
           <a:lstStyle/>
           <a:p>
             <a:r>
-              <a:t>Qwen3-VL runs locally via Ollama. Captions fire only when the scene actually changes — no redundant narration.</a:t>
+              <a:t>Two real frames from Stage 3, showing adaptive captioning in action. The left frame triggers a 'rainy driving' caption; the right frame triggers a 'pedestrian crossing' caption — because the scene changed enough (diff ≥ 12) and the minimum 5-second interval elapsed. The VLM produces fluent sentences with colour, weather, action, and spatial relationships — not just keyword lists. This is the difference between a detector output and a human-readable story.</a:t>
             </a:r>
           </a:p>
         </p:txBody>
@@ -1008,7 +1008,7 @@
           <a:lstStyle/>
           <a:p>
             <a:r>
-              <a:t>These numbers validate each stage. Detection is production-grade. Brand recognition jumps from 55% zero-shot to 80% with the probe — a 25-point gain from a single linear layer on frozen embeddings. Segmentation leverages a pretrained SOTA model for immediate quality.</a:t>
+              <a:t>Detection: YOLOv10n (P=0.801, R=0.598, mAP@0.5=0.675, mAP@0.5:0.95=0.388) upgraded to YOLO26s (P=0.874, R=0.754, mAP@0.5=0.842, mAP@0.5:0.95=0.515) — a substantial accuracy lift across all metrics. The C2PSA backbone (9.4 M params) generalises well on 11 dashcam classes; pedestrian remains hardest due to scale and occlusion.  Enrichment: Brand recognition jumps from 55% zero-shot to 80% with the probe — a 25-point gain from a single linear layer on frozen embeddings. Segmentation leverages a pretrained SOTA model for immediate quality.</a:t>
             </a:r>
           </a:p>
         </p:txBody>
@@ -1373,7 +1373,7 @@
           <a:lstStyle/>
           <a:p>
             <a:r>
-              <a:t>We upgraded from YOLOv10n to YOLO26s, trading a little speed for greater feature capacity — we'll compare results when training finishes. The dataset covers 11 street classes including nuanced traffic-light states.</a:t>
+              <a:t>YOLOv10n baseline: P=0.801, R=0.598, mAP@0.5=0.675, mAP@0.5:0.95=0.388.  YOLO26s: P=0.874, R=0.754, mAP@0.5=0.842, mAP@0.5:0.95=0.515.  The 9.4 M parameter backbone with C2PSA blocks delivers a significant accuracy lift — especially on recall and strict mAP. Pedestrian remains the hardest class (mAP 0.692) due to scale and occlusion. The dataset covers 11 street classes including nuanced traffic-light states.</a:t>
             </a:r>
           </a:p>
         </p:txBody>
@@ -1443,7 +1443,7 @@
           <a:lstStyle/>
           <a:p>
             <a:r>
-              <a:t>Our newest stage answers the same question as YOLO, but at the pixel level: what is in this scene? Road, sidewalk, building, vegetation — scene geometry, not just boxes.</a:t>
+              <a:t>Our newest stage answers the same question as YOLO, but at the pixel level: what is in this scene? Road (purple), vegetation (green), vehicles (red), sky (blue) — scene geometry, not just boxes. SegFormer-B5 is pretrained on Cityscapes (84% mIoU) and generalises directly to our dashcam domain without any fine-tuning.</a:t>
             </a:r>
           </a:p>
         </p:txBody>
@@ -4992,182 +4992,43 @@
                 </a:solidFill>
                 <a:latin typeface="Calibri"/>
               </a:rPr>
-              <a:t>Car-only crops · confidence ≥ 0.3 · trucks excluded by design</a:t>
-            </a:r>
-          </a:p>
-        </p:txBody>
-      </p:sp>
-      <p:sp>
-        <p:nvSpPr>
-          <p:cNvPr id="6" name="Rounded Rectangle 5"/>
-          <p:cNvSpPr/>
-          <p:nvPr/>
-        </p:nvSpPr>
+              <a:t>Car-only crops · 80×80 min · trucks excluded by design</a:t>
+            </a:r>
+          </a:p>
+        </p:txBody>
+      </p:sp>
+      <p:pic>
+        <p:nvPicPr>
+          <p:cNvPr id="6" name="Picture 5" descr="clip_yolo_result_check.png"/>
+          <p:cNvPicPr>
+            <a:picLocks noChangeAspect="1"/>
+          </p:cNvPicPr>
+          <p:nvPr/>
+        </p:nvPicPr>
+        <p:blipFill>
+          <a:blip r:embed="rId2"/>
+          <a:stretch>
+            <a:fillRect/>
+          </a:stretch>
+        </p:blipFill>
         <p:spPr>
           <a:xfrm>
             <a:off x="822960" y="2011680"/>
-            <a:ext cx="7132320" cy="3657600"/>
-          </a:xfrm>
-          <a:prstGeom prst="roundRect">
-            <a:avLst/>
-          </a:prstGeom>
-          <a:solidFill>
-            <a:srgbClr val="EEF2F6"/>
-          </a:solidFill>
+            <a:ext cx="7132320" cy="4813975"/>
+          </a:xfrm>
+          <a:prstGeom prst="rect">
+            <a:avLst/>
+          </a:prstGeom>
           <a:ln w="12700">
             <a:solidFill>
               <a:srgbClr val="E2E8F0"/>
             </a:solidFill>
           </a:ln>
         </p:spPr>
-        <p:style>
-          <a:lnRef idx="1">
-            <a:schemeClr val="accent1"/>
-          </a:lnRef>
-          <a:fillRef idx="3">
-            <a:schemeClr val="accent1"/>
-          </a:fillRef>
-          <a:effectRef idx="2">
-            <a:schemeClr val="accent1"/>
-          </a:effectRef>
-          <a:fontRef idx="minor">
-            <a:schemeClr val="lt1"/>
-          </a:fontRef>
-        </p:style>
-        <p:txBody>
-          <a:bodyPr rtlCol="0" anchor="ctr"/>
-          <a:lstStyle/>
-          <a:p>
-            <a:pPr algn="ctr"/>
-          </a:p>
-        </p:txBody>
-      </p:sp>
-      <p:sp>
-        <p:nvSpPr>
-          <p:cNvPr id="7" name="Oval 6"/>
-          <p:cNvSpPr/>
-          <p:nvPr/>
-        </p:nvSpPr>
-        <p:spPr>
-          <a:xfrm>
-            <a:off x="3977640" y="3200400"/>
-            <a:ext cx="822960" cy="822960"/>
-          </a:xfrm>
-          <a:prstGeom prst="ellipse">
-            <a:avLst/>
-          </a:prstGeom>
-          <a:solidFill>
-            <a:srgbClr val="FFFFFF"/>
-          </a:solidFill>
-          <a:ln w="19050">
-            <a:solidFill>
-              <a:srgbClr val="E2E8F0"/>
-            </a:solidFill>
-          </a:ln>
-        </p:spPr>
-        <p:style>
-          <a:lnRef idx="1">
-            <a:schemeClr val="accent1"/>
-          </a:lnRef>
-          <a:fillRef idx="3">
-            <a:schemeClr val="accent1"/>
-          </a:fillRef>
-          <a:effectRef idx="2">
-            <a:schemeClr val="accent1"/>
-          </a:effectRef>
-          <a:fontRef idx="minor">
-            <a:schemeClr val="lt1"/>
-          </a:fontRef>
-        </p:style>
-        <p:txBody>
-          <a:bodyPr rtlCol="0" anchor="ctr"/>
-          <a:lstStyle/>
-          <a:p>
-            <a:pPr algn="ctr"/>
-          </a:p>
-        </p:txBody>
-      </p:sp>
-      <p:sp>
-        <p:nvSpPr>
-          <p:cNvPr id="8" name="Isosceles Triangle 7"/>
-          <p:cNvSpPr/>
-          <p:nvPr/>
-        </p:nvSpPr>
-        <p:spPr>
-          <a:xfrm rot="5400000">
-            <a:off x="4270248" y="3447288"/>
-            <a:ext cx="292608" cy="329184"/>
-          </a:xfrm>
-          <a:prstGeom prst="triangle">
-            <a:avLst/>
-          </a:prstGeom>
-          <a:solidFill>
-            <a:srgbClr val="0D9488"/>
-          </a:solidFill>
-          <a:ln>
-            <a:noFill/>
-          </a:ln>
-        </p:spPr>
-        <p:style>
-          <a:lnRef idx="1">
-            <a:schemeClr val="accent1"/>
-          </a:lnRef>
-          <a:fillRef idx="3">
-            <a:schemeClr val="accent1"/>
-          </a:fillRef>
-          <a:effectRef idx="2">
-            <a:schemeClr val="accent1"/>
-          </a:effectRef>
-          <a:fontRef idx="minor">
-            <a:schemeClr val="lt1"/>
-          </a:fontRef>
-        </p:style>
-        <p:txBody>
-          <a:bodyPr rtlCol="0" anchor="ctr"/>
-          <a:lstStyle/>
-          <a:p>
-            <a:pPr algn="ctr"/>
-          </a:p>
-        </p:txBody>
-      </p:sp>
-      <p:sp>
-        <p:nvSpPr>
-          <p:cNvPr id="9" name="TextBox 8"/>
-          <p:cNvSpPr txBox="1"/>
-          <p:nvPr/>
-        </p:nvSpPr>
-        <p:spPr>
-          <a:xfrm>
-            <a:off x="822960" y="4114800"/>
-            <a:ext cx="7132320" cy="731520"/>
-          </a:xfrm>
-          <a:prstGeom prst="rect">
-            <a:avLst/>
-          </a:prstGeom>
-          <a:noFill/>
-        </p:spPr>
-        <p:txBody>
-          <a:bodyPr wrap="square">
-            <a:spAutoFit/>
-          </a:bodyPr>
-          <a:lstStyle/>
-          <a:p>
-            <a:pPr algn="ctr"/>
-            <a:r>
-              <a:rPr sz="1300" b="0">
-                <a:solidFill>
-                  <a:srgbClr val="475569"/>
-                </a:solidFill>
-                <a:latin typeface="Calibri"/>
-              </a:rPr>
-              <a:t>Full annotated video (YOLO + CLIP) — 5-sec clip showing brand chip</a:t>
-            </a:r>
-          </a:p>
-        </p:txBody>
-      </p:sp>
-      <p:sp>
-        <p:nvSpPr>
-          <p:cNvPr id="10" name="Rounded Rectangle 9"/>
+      </p:pic>
+      <p:sp>
+        <p:nvSpPr>
+          <p:cNvPr id="7" name="Rounded Rectangle 6"/>
           <p:cNvSpPr/>
           <p:nvPr/>
         </p:nvSpPr>
@@ -5212,7 +5073,7 @@
       </p:sp>
       <p:sp>
         <p:nvSpPr>
-          <p:cNvPr id="11" name="TextBox 10"/>
+          <p:cNvPr id="8" name="TextBox 7"/>
           <p:cNvSpPr txBox="1"/>
           <p:nvPr/>
         </p:nvSpPr>
@@ -5247,7 +5108,7 @@
       </p:sp>
       <p:sp>
         <p:nvSpPr>
-          <p:cNvPr id="12" name="Rounded Rectangle 11"/>
+          <p:cNvPr id="9" name="Rounded Rectangle 8"/>
           <p:cNvSpPr/>
           <p:nvPr/>
         </p:nvSpPr>
@@ -5292,7 +5153,7 @@
       </p:sp>
       <p:sp>
         <p:nvSpPr>
-          <p:cNvPr id="13" name="TextBox 12"/>
+          <p:cNvPr id="10" name="TextBox 9"/>
           <p:cNvSpPr txBox="1"/>
           <p:nvPr/>
         </p:nvSpPr>
@@ -5327,7 +5188,7 @@
       </p:sp>
       <p:sp>
         <p:nvSpPr>
-          <p:cNvPr id="14" name="Rounded Rectangle 13"/>
+          <p:cNvPr id="11" name="Rounded Rectangle 10"/>
           <p:cNvSpPr/>
           <p:nvPr/>
         </p:nvSpPr>
@@ -5372,7 +5233,7 @@
       </p:sp>
       <p:sp>
         <p:nvSpPr>
-          <p:cNvPr id="15" name="TextBox 14"/>
+          <p:cNvPr id="12" name="TextBox 11"/>
           <p:cNvSpPr txBox="1"/>
           <p:nvPr/>
         </p:nvSpPr>
@@ -5407,7 +5268,7 @@
       </p:sp>
       <p:sp>
         <p:nvSpPr>
-          <p:cNvPr id="16" name="Rounded Rectangle 15"/>
+          <p:cNvPr id="13" name="Rounded Rectangle 12"/>
           <p:cNvSpPr/>
           <p:nvPr/>
         </p:nvSpPr>
@@ -5452,7 +5313,7 @@
       </p:sp>
       <p:sp>
         <p:nvSpPr>
-          <p:cNvPr id="17" name="TextBox 16"/>
+          <p:cNvPr id="14" name="TextBox 13"/>
           <p:cNvSpPr txBox="1"/>
           <p:nvPr/>
         </p:nvSpPr>
@@ -5487,7 +5348,7 @@
       </p:sp>
       <p:sp>
         <p:nvSpPr>
-          <p:cNvPr id="18" name="Rounded Rectangle 17"/>
+          <p:cNvPr id="15" name="Rounded Rectangle 14"/>
           <p:cNvSpPr/>
           <p:nvPr/>
         </p:nvSpPr>
@@ -5532,7 +5393,7 @@
       </p:sp>
       <p:sp>
         <p:nvSpPr>
-          <p:cNvPr id="19" name="TextBox 18"/>
+          <p:cNvPr id="16" name="TextBox 15"/>
           <p:cNvSpPr txBox="1"/>
           <p:nvPr/>
         </p:nvSpPr>
@@ -5567,7 +5428,7 @@
       </p:sp>
       <p:sp>
         <p:nvSpPr>
-          <p:cNvPr id="20" name="TextBox 19"/>
+          <p:cNvPr id="17" name="TextBox 16"/>
           <p:cNvSpPr txBox="1"/>
           <p:nvPr/>
         </p:nvSpPr>
@@ -5595,7 +5456,7 @@
                 </a:solidFill>
                 <a:latin typeface="Calibri"/>
               </a:rPr>
-              <a:t>Trucks are out-of-distribution for the probe; drawing a brand on them would be misleading.</a:t>
+              <a:t>Real output: YOLO26s boxes + CLIP brand chips (BMW, Peugeot …). Trucks excluded by design — car-only probe.</a:t>
             </a:r>
           </a:p>
         </p:txBody>
@@ -5999,149 +5860,45 @@
           </a:p>
         </p:txBody>
       </p:sp>
-      <p:sp>
-        <p:nvSpPr>
-          <p:cNvPr id="5" name="Rounded Rectangle 4"/>
-          <p:cNvSpPr/>
-          <p:nvPr/>
-        </p:nvSpPr>
-        <p:spPr>
-          <a:xfrm>
-            <a:off x="1463040" y="1828800"/>
-            <a:ext cx="9235440" cy="3657600"/>
-          </a:xfrm>
-          <a:prstGeom prst="roundRect">
-            <a:avLst/>
-          </a:prstGeom>
-          <a:solidFill>
-            <a:srgbClr val="EEF2F6"/>
-          </a:solidFill>
+      <p:pic>
+        <p:nvPicPr>
+          <p:cNvPr id="5" name="Picture 4" descr="vlm_caption_red_car_rain.png"/>
+          <p:cNvPicPr>
+            <a:picLocks noChangeAspect="1"/>
+          </p:cNvPicPr>
+          <p:nvPr/>
+        </p:nvPicPr>
+        <p:blipFill>
+          <a:blip r:embed="rId2"/>
+          <a:stretch>
+            <a:fillRect/>
+          </a:stretch>
+        </p:blipFill>
+        <p:spPr>
+          <a:xfrm>
+            <a:off x="1828800" y="1828800"/>
+            <a:ext cx="8503920" cy="2113644"/>
+          </a:xfrm>
+          <a:prstGeom prst="rect">
+            <a:avLst/>
+          </a:prstGeom>
           <a:ln w="12700">
             <a:solidFill>
               <a:srgbClr val="E2E8F0"/>
             </a:solidFill>
           </a:ln>
         </p:spPr>
-        <p:style>
-          <a:lnRef idx="1">
-            <a:schemeClr val="accent1"/>
-          </a:lnRef>
-          <a:fillRef idx="3">
-            <a:schemeClr val="accent1"/>
-          </a:fillRef>
-          <a:effectRef idx="2">
-            <a:schemeClr val="accent1"/>
-          </a:effectRef>
-          <a:fontRef idx="minor">
-            <a:schemeClr val="lt1"/>
-          </a:fontRef>
-        </p:style>
-        <p:txBody>
-          <a:bodyPr rtlCol="0" anchor="ctr"/>
-          <a:lstStyle/>
-          <a:p>
-            <a:pPr algn="ctr"/>
-          </a:p>
-        </p:txBody>
-      </p:sp>
-      <p:sp>
-        <p:nvSpPr>
-          <p:cNvPr id="6" name="Oval 5"/>
-          <p:cNvSpPr/>
-          <p:nvPr/>
-        </p:nvSpPr>
-        <p:spPr>
-          <a:xfrm>
-            <a:off x="5669280" y="3017520"/>
-            <a:ext cx="822960" cy="822960"/>
-          </a:xfrm>
-          <a:prstGeom prst="ellipse">
-            <a:avLst/>
-          </a:prstGeom>
-          <a:solidFill>
-            <a:srgbClr val="FFFFFF"/>
-          </a:solidFill>
-          <a:ln w="19050">
-            <a:solidFill>
-              <a:srgbClr val="E2E8F0"/>
-            </a:solidFill>
-          </a:ln>
-        </p:spPr>
-        <p:style>
-          <a:lnRef idx="1">
-            <a:schemeClr val="accent1"/>
-          </a:lnRef>
-          <a:fillRef idx="3">
-            <a:schemeClr val="accent1"/>
-          </a:fillRef>
-          <a:effectRef idx="2">
-            <a:schemeClr val="accent1"/>
-          </a:effectRef>
-          <a:fontRef idx="minor">
-            <a:schemeClr val="lt1"/>
-          </a:fontRef>
-        </p:style>
-        <p:txBody>
-          <a:bodyPr rtlCol="0" anchor="ctr"/>
-          <a:lstStyle/>
-          <a:p>
-            <a:pPr algn="ctr"/>
-          </a:p>
-        </p:txBody>
-      </p:sp>
-      <p:sp>
-        <p:nvSpPr>
-          <p:cNvPr id="7" name="Isosceles Triangle 6"/>
-          <p:cNvSpPr/>
-          <p:nvPr/>
-        </p:nvSpPr>
-        <p:spPr>
-          <a:xfrm rot="5400000">
-            <a:off x="5961888" y="3264408"/>
-            <a:ext cx="292608" cy="329184"/>
-          </a:xfrm>
-          <a:prstGeom prst="triangle">
-            <a:avLst/>
-          </a:prstGeom>
-          <a:solidFill>
-            <a:srgbClr val="0D9488"/>
-          </a:solidFill>
-          <a:ln>
-            <a:noFill/>
-          </a:ln>
-        </p:spPr>
-        <p:style>
-          <a:lnRef idx="1">
-            <a:schemeClr val="accent1"/>
-          </a:lnRef>
-          <a:fillRef idx="3">
-            <a:schemeClr val="accent1"/>
-          </a:fillRef>
-          <a:effectRef idx="2">
-            <a:schemeClr val="accent1"/>
-          </a:effectRef>
-          <a:fontRef idx="minor">
-            <a:schemeClr val="lt1"/>
-          </a:fontRef>
-        </p:style>
-        <p:txBody>
-          <a:bodyPr rtlCol="0" anchor="ctr"/>
-          <a:lstStyle/>
-          <a:p>
-            <a:pPr algn="ctr"/>
-          </a:p>
-        </p:txBody>
-      </p:sp>
-      <p:sp>
-        <p:nvSpPr>
-          <p:cNvPr id="8" name="TextBox 7"/>
+      </p:pic>
+      <p:sp>
+        <p:nvSpPr>
+          <p:cNvPr id="6" name="TextBox 5"/>
           <p:cNvSpPr txBox="1"/>
           <p:nvPr/>
         </p:nvSpPr>
         <p:spPr>
           <a:xfrm>
-            <a:off x="1463040" y="3931920"/>
-            <a:ext cx="9235440" cy="731520"/>
+            <a:off x="1828800" y="5623560"/>
+            <a:ext cx="8503920" cy="457200"/>
           </a:xfrm>
           <a:prstGeom prst="rect">
             <a:avLst/>
@@ -6156,20 +5913,20 @@
           <a:p>
             <a:pPr algn="ctr"/>
             <a:r>
-              <a:rPr sz="1300" b="0">
+              <a:rPr sz="1400" b="0">
                 <a:solidFill>
-                  <a:srgbClr val="475569"/>
+                  <a:srgbClr val="6366F1"/>
                 </a:solidFill>
                 <a:latin typeface="Calibri"/>
               </a:rPr>
-              <a:t>VLM captioned video — caption banner appearing dynamically (5-sec clip)</a:t>
-            </a:r>
-          </a:p>
-        </p:txBody>
-      </p:sp>
-      <p:sp>
-        <p:nvSpPr>
-          <p:cNvPr id="9" name="TextBox 8"/>
+              <a:t>"A red car is driving down a wet road in the rain, approaching a traffic light."</a:t>
+            </a:r>
+          </a:p>
+        </p:txBody>
+      </p:sp>
+      <p:sp>
+        <p:nvSpPr>
+          <p:cNvPr id="7" name="TextBox 6"/>
           <p:cNvSpPr txBox="1"/>
           <p:nvPr/>
         </p:nvSpPr>
@@ -6384,149 +6141,45 @@
           </a:p>
         </p:txBody>
       </p:sp>
-      <p:sp>
-        <p:nvSpPr>
-          <p:cNvPr id="6" name="Rounded Rectangle 5"/>
-          <p:cNvSpPr/>
-          <p:nvPr/>
-        </p:nvSpPr>
+      <p:pic>
+        <p:nvPicPr>
+          <p:cNvPr id="6" name="Picture 5" descr="vlm_caption_red_car_rain.png"/>
+          <p:cNvPicPr>
+            <a:picLocks noChangeAspect="1"/>
+          </p:cNvPicPr>
+          <p:nvPr/>
+        </p:nvPicPr>
+        <p:blipFill>
+          <a:blip r:embed="rId2"/>
+          <a:stretch>
+            <a:fillRect/>
+          </a:stretch>
+        </p:blipFill>
         <p:spPr>
           <a:xfrm>
             <a:off x="822960" y="2011680"/>
-            <a:ext cx="5120640" cy="3657600"/>
-          </a:xfrm>
-          <a:prstGeom prst="roundRect">
-            <a:avLst/>
-          </a:prstGeom>
-          <a:solidFill>
-            <a:srgbClr val="EEF2F6"/>
-          </a:solidFill>
+            <a:ext cx="5120640" cy="1272732"/>
+          </a:xfrm>
+          <a:prstGeom prst="rect">
+            <a:avLst/>
+          </a:prstGeom>
           <a:ln w="12700">
             <a:solidFill>
               <a:srgbClr val="E2E8F0"/>
             </a:solidFill>
           </a:ln>
         </p:spPr>
-        <p:style>
-          <a:lnRef idx="1">
-            <a:schemeClr val="accent1"/>
-          </a:lnRef>
-          <a:fillRef idx="3">
-            <a:schemeClr val="accent1"/>
-          </a:fillRef>
-          <a:effectRef idx="2">
-            <a:schemeClr val="accent1"/>
-          </a:effectRef>
-          <a:fontRef idx="minor">
-            <a:schemeClr val="lt1"/>
-          </a:fontRef>
-        </p:style>
-        <p:txBody>
-          <a:bodyPr rtlCol="0" anchor="ctr"/>
-          <a:lstStyle/>
-          <a:p>
-            <a:pPr algn="ctr"/>
-          </a:p>
-        </p:txBody>
-      </p:sp>
-      <p:sp>
-        <p:nvSpPr>
-          <p:cNvPr id="7" name="Oval 6"/>
-          <p:cNvSpPr/>
-          <p:nvPr/>
-        </p:nvSpPr>
-        <p:spPr>
-          <a:xfrm>
-            <a:off x="2971800" y="3200400"/>
-            <a:ext cx="822960" cy="822960"/>
-          </a:xfrm>
-          <a:prstGeom prst="ellipse">
-            <a:avLst/>
-          </a:prstGeom>
-          <a:solidFill>
-            <a:srgbClr val="FFFFFF"/>
-          </a:solidFill>
-          <a:ln w="19050">
-            <a:solidFill>
-              <a:srgbClr val="E2E8F0"/>
-            </a:solidFill>
-          </a:ln>
-        </p:spPr>
-        <p:style>
-          <a:lnRef idx="1">
-            <a:schemeClr val="accent1"/>
-          </a:lnRef>
-          <a:fillRef idx="3">
-            <a:schemeClr val="accent1"/>
-          </a:fillRef>
-          <a:effectRef idx="2">
-            <a:schemeClr val="accent1"/>
-          </a:effectRef>
-          <a:fontRef idx="minor">
-            <a:schemeClr val="lt1"/>
-          </a:fontRef>
-        </p:style>
-        <p:txBody>
-          <a:bodyPr rtlCol="0" anchor="ctr"/>
-          <a:lstStyle/>
-          <a:p>
-            <a:pPr algn="ctr"/>
-          </a:p>
-        </p:txBody>
-      </p:sp>
-      <p:sp>
-        <p:nvSpPr>
-          <p:cNvPr id="8" name="Isosceles Triangle 7"/>
-          <p:cNvSpPr/>
-          <p:nvPr/>
-        </p:nvSpPr>
-        <p:spPr>
-          <a:xfrm rot="5400000">
-            <a:off x="3264408" y="3447288"/>
-            <a:ext cx="292608" cy="329184"/>
-          </a:xfrm>
-          <a:prstGeom prst="triangle">
-            <a:avLst/>
-          </a:prstGeom>
-          <a:solidFill>
-            <a:srgbClr val="0D9488"/>
-          </a:solidFill>
-          <a:ln>
-            <a:noFill/>
-          </a:ln>
-        </p:spPr>
-        <p:style>
-          <a:lnRef idx="1">
-            <a:schemeClr val="accent1"/>
-          </a:lnRef>
-          <a:fillRef idx="3">
-            <a:schemeClr val="accent1"/>
-          </a:fillRef>
-          <a:effectRef idx="2">
-            <a:schemeClr val="accent1"/>
-          </a:effectRef>
-          <a:fontRef idx="minor">
-            <a:schemeClr val="lt1"/>
-          </a:fontRef>
-        </p:style>
-        <p:txBody>
-          <a:bodyPr rtlCol="0" anchor="ctr"/>
-          <a:lstStyle/>
-          <a:p>
-            <a:pPr algn="ctr"/>
-          </a:p>
-        </p:txBody>
-      </p:sp>
-      <p:sp>
-        <p:nvSpPr>
-          <p:cNvPr id="9" name="TextBox 8"/>
+      </p:pic>
+      <p:sp>
+        <p:nvSpPr>
+          <p:cNvPr id="7" name="TextBox 6"/>
           <p:cNvSpPr txBox="1"/>
           <p:nvPr/>
         </p:nvSpPr>
         <p:spPr>
           <a:xfrm>
-            <a:off x="822960" y="4114800"/>
-            <a:ext cx="5120640" cy="731520"/>
+            <a:off x="822960" y="5623560"/>
+            <a:ext cx="5120640" cy="457200"/>
           </a:xfrm>
           <a:prstGeom prst="rect">
             <a:avLst/>
@@ -6541,160 +6194,56 @@
           <a:p>
             <a:pPr algn="ctr"/>
             <a:r>
-              <a:rPr sz="1300" b="0">
+              <a:rPr sz="1200" b="0">
                 <a:solidFill>
-                  <a:srgbClr val="475569"/>
+                  <a:srgbClr val="6366F1"/>
                 </a:solidFill>
                 <a:latin typeface="Calibri"/>
               </a:rPr>
-              <a:t>Static caption</a:t>
-            </a:r>
-          </a:p>
-        </p:txBody>
-      </p:sp>
-      <p:sp>
-        <p:nvSpPr>
-          <p:cNvPr id="10" name="Rounded Rectangle 9"/>
-          <p:cNvSpPr/>
-          <p:nvPr/>
-        </p:nvSpPr>
+              <a:t>"A red car is driving down a wet road in the rain, approaching a traffic light."</a:t>
+            </a:r>
+          </a:p>
+        </p:txBody>
+      </p:sp>
+      <p:pic>
+        <p:nvPicPr>
+          <p:cNvPr id="8" name="Picture 7" descr="vlm_caption_truck_pedestrian.png"/>
+          <p:cNvPicPr>
+            <a:picLocks noChangeAspect="1"/>
+          </p:cNvPicPr>
+          <p:nvPr/>
+        </p:nvPicPr>
+        <p:blipFill>
+          <a:blip r:embed="rId3"/>
+          <a:stretch>
+            <a:fillRect/>
+          </a:stretch>
+        </p:blipFill>
         <p:spPr>
           <a:xfrm>
             <a:off x="6245352" y="2011680"/>
-            <a:ext cx="5120640" cy="3657600"/>
-          </a:xfrm>
-          <a:prstGeom prst="roundRect">
-            <a:avLst/>
-          </a:prstGeom>
-          <a:solidFill>
-            <a:srgbClr val="EEF2F6"/>
-          </a:solidFill>
+            <a:ext cx="5120640" cy="1381681"/>
+          </a:xfrm>
+          <a:prstGeom prst="rect">
+            <a:avLst/>
+          </a:prstGeom>
           <a:ln w="12700">
             <a:solidFill>
               <a:srgbClr val="E2E8F0"/>
             </a:solidFill>
           </a:ln>
         </p:spPr>
-        <p:style>
-          <a:lnRef idx="1">
-            <a:schemeClr val="accent1"/>
-          </a:lnRef>
-          <a:fillRef idx="3">
-            <a:schemeClr val="accent1"/>
-          </a:fillRef>
-          <a:effectRef idx="2">
-            <a:schemeClr val="accent1"/>
-          </a:effectRef>
-          <a:fontRef idx="minor">
-            <a:schemeClr val="lt1"/>
-          </a:fontRef>
-        </p:style>
-        <p:txBody>
-          <a:bodyPr rtlCol="0" anchor="ctr"/>
-          <a:lstStyle/>
-          <a:p>
-            <a:pPr algn="ctr"/>
-          </a:p>
-        </p:txBody>
-      </p:sp>
-      <p:sp>
-        <p:nvSpPr>
-          <p:cNvPr id="11" name="Oval 10"/>
-          <p:cNvSpPr/>
-          <p:nvPr/>
-        </p:nvSpPr>
-        <p:spPr>
-          <a:xfrm>
-            <a:off x="8394192" y="3200400"/>
-            <a:ext cx="822960" cy="822960"/>
-          </a:xfrm>
-          <a:prstGeom prst="ellipse">
-            <a:avLst/>
-          </a:prstGeom>
-          <a:solidFill>
-            <a:srgbClr val="FFFFFF"/>
-          </a:solidFill>
-          <a:ln w="19050">
-            <a:solidFill>
-              <a:srgbClr val="E2E8F0"/>
-            </a:solidFill>
-          </a:ln>
-        </p:spPr>
-        <p:style>
-          <a:lnRef idx="1">
-            <a:schemeClr val="accent1"/>
-          </a:lnRef>
-          <a:fillRef idx="3">
-            <a:schemeClr val="accent1"/>
-          </a:fillRef>
-          <a:effectRef idx="2">
-            <a:schemeClr val="accent1"/>
-          </a:effectRef>
-          <a:fontRef idx="minor">
-            <a:schemeClr val="lt1"/>
-          </a:fontRef>
-        </p:style>
-        <p:txBody>
-          <a:bodyPr rtlCol="0" anchor="ctr"/>
-          <a:lstStyle/>
-          <a:p>
-            <a:pPr algn="ctr"/>
-          </a:p>
-        </p:txBody>
-      </p:sp>
-      <p:sp>
-        <p:nvSpPr>
-          <p:cNvPr id="12" name="Isosceles Triangle 11"/>
-          <p:cNvSpPr/>
-          <p:nvPr/>
-        </p:nvSpPr>
-        <p:spPr>
-          <a:xfrm rot="5400000">
-            <a:off x="8686800" y="3447288"/>
-            <a:ext cx="292608" cy="329184"/>
-          </a:xfrm>
-          <a:prstGeom prst="triangle">
-            <a:avLst/>
-          </a:prstGeom>
-          <a:solidFill>
-            <a:srgbClr val="0D9488"/>
-          </a:solidFill>
-          <a:ln>
-            <a:noFill/>
-          </a:ln>
-        </p:spPr>
-        <p:style>
-          <a:lnRef idx="1">
-            <a:schemeClr val="accent1"/>
-          </a:lnRef>
-          <a:fillRef idx="3">
-            <a:schemeClr val="accent1"/>
-          </a:fillRef>
-          <a:effectRef idx="2">
-            <a:schemeClr val="accent1"/>
-          </a:effectRef>
-          <a:fontRef idx="minor">
-            <a:schemeClr val="lt1"/>
-          </a:fontRef>
-        </p:style>
-        <p:txBody>
-          <a:bodyPr rtlCol="0" anchor="ctr"/>
-          <a:lstStyle/>
-          <a:p>
-            <a:pPr algn="ctr"/>
-          </a:p>
-        </p:txBody>
-      </p:sp>
-      <p:sp>
-        <p:nvSpPr>
-          <p:cNvPr id="13" name="TextBox 12"/>
+      </p:pic>
+      <p:sp>
+        <p:nvSpPr>
+          <p:cNvPr id="9" name="TextBox 8"/>
           <p:cNvSpPr txBox="1"/>
           <p:nvPr/>
         </p:nvSpPr>
         <p:spPr>
           <a:xfrm>
-            <a:off x="6245352" y="4114800"/>
-            <a:ext cx="5120640" cy="731520"/>
+            <a:off x="6245352" y="5623560"/>
+            <a:ext cx="5120640" cy="457200"/>
           </a:xfrm>
           <a:prstGeom prst="rect">
             <a:avLst/>
@@ -6709,20 +6258,20 @@
           <a:p>
             <a:pPr algn="ctr"/>
             <a:r>
-              <a:rPr sz="1300" b="0">
+              <a:rPr sz="1200" b="0">
                 <a:solidFill>
-                  <a:srgbClr val="475569"/>
+                  <a:srgbClr val="6366F1"/>
                 </a:solidFill>
                 <a:latin typeface="Calibri"/>
               </a:rPr>
-              <a:t>Adaptive caption (scene change)</a:t>
-            </a:r>
-          </a:p>
-        </p:txBody>
-      </p:sp>
-      <p:sp>
-        <p:nvSpPr>
-          <p:cNvPr id="14" name="TextBox 13"/>
+              <a:t>"A white truck and a pedestrian are crossing the road at a pedestrian crossing..."</a:t>
+            </a:r>
+          </a:p>
+        </p:txBody>
+      </p:sp>
+      <p:sp>
+        <p:nvSpPr>
+          <p:cNvPr id="10" name="TextBox 9"/>
           <p:cNvSpPr txBox="1"/>
           <p:nvPr/>
         </p:nvSpPr>
@@ -8608,7 +8157,7 @@
                 </a:solidFill>
                 <a:latin typeface="Calibri"/>
               </a:rPr>
-              <a:t>mAP@0.5 ≈ _._</a:t>
+              <a:t>P = 0.874</a:t>
             </a:r>
           </a:p>
           <a:p>
@@ -8620,7 +8169,31 @@
                 </a:solidFill>
                 <a:latin typeface="Calibri"/>
               </a:rPr>
-              <a:t>mAP@0.5:0.95 ≈ _._</a:t>
+              <a:t>R = 0.754</a:t>
+            </a:r>
+          </a:p>
+          <a:p>
+            <a:pPr algn="ctr"/>
+            <a:r>
+              <a:rPr sz="1300" b="0">
+                <a:solidFill>
+                  <a:srgbClr val="475569"/>
+                </a:solidFill>
+                <a:latin typeface="Calibri"/>
+              </a:rPr>
+              <a:t>mAP@0.5 = 0.842</a:t>
+            </a:r>
+          </a:p>
+          <a:p>
+            <a:pPr algn="ctr"/>
+            <a:r>
+              <a:rPr sz="1300" b="0">
+                <a:solidFill>
+                  <a:srgbClr val="475569"/>
+                </a:solidFill>
+                <a:latin typeface="Calibri"/>
+              </a:rPr>
+              <a:t>mAP@0.5:0.95 = 0.515</a:t>
             </a:r>
           </a:p>
         </p:txBody>
@@ -8778,7 +8351,7 @@
                 </a:solidFill>
                 <a:latin typeface="Calibri"/>
               </a:rPr>
-              <a:t>Probe accuracy ≈ _._ %</a:t>
+              <a:t>Probe accuracy ≈ 80 %</a:t>
             </a:r>
           </a:p>
           <a:p>
@@ -8791,6 +8364,18 @@
                 <a:latin typeface="Calibri"/>
               </a:rPr>
               <a:t>20 brands</a:t>
+            </a:r>
+          </a:p>
+          <a:p>
+            <a:pPr algn="ctr"/>
+            <a:r>
+              <a:rPr sz="1300" b="0">
+                <a:solidFill>
+                  <a:srgbClr val="475569"/>
+                </a:solidFill>
+                <a:latin typeface="Calibri"/>
+              </a:rPr>
+              <a:t>(79.8 % on test split)</a:t>
             </a:r>
           </a:p>
         </p:txBody>
@@ -9143,7 +8728,7 @@
         </p:nvSpPr>
         <p:spPr>
           <a:xfrm>
-            <a:off x="822960" y="4572000"/>
+            <a:off x="822960" y="5029200"/>
             <a:ext cx="10545775" cy="457200"/>
           </a:xfrm>
           <a:prstGeom prst="rect">
@@ -9165,42 +8750,7 @@
                 </a:solidFill>
                 <a:latin typeface="Calibri"/>
               </a:rPr>
-              <a:t>Note: 0.68 was the old YOLOv10n baseline; insert new YOLO26s values.</a:t>
-            </a:r>
-          </a:p>
-        </p:txBody>
-      </p:sp>
-      <p:sp>
-        <p:nvSpPr>
-          <p:cNvPr id="21" name="TextBox 20"/>
-          <p:cNvSpPr txBox="1"/>
-          <p:nvPr/>
-        </p:nvSpPr>
-        <p:spPr>
-          <a:xfrm>
-            <a:off x="822960" y="4983480"/>
-            <a:ext cx="10545775" cy="457200"/>
-          </a:xfrm>
-          <a:prstGeom prst="rect">
-            <a:avLst/>
-          </a:prstGeom>
-          <a:noFill/>
-        </p:spPr>
-        <p:txBody>
-          <a:bodyPr wrap="square">
-            <a:spAutoFit/>
-          </a:bodyPr>
-          <a:lstStyle/>
-          <a:p>
-            <a:pPr algn="l"/>
-            <a:r>
-              <a:rPr sz="1300" b="0">
-                <a:solidFill>
-                  <a:srgbClr val="94A3B8"/>
-                </a:solidFill>
-                <a:latin typeface="Calibri"/>
-              </a:rPr>
-              <a:t>Leave blank spaces for the actual results.png and confusion-matrix screenshots.</a:t>
+              <a:t>YOLOv10n baseline → YOLO26s:  +24.7% mAP@0.5,  +32.7% mAP@0.5:0.95,  +26.1% recall.  Hardest class: pedestrian (mAP 0.692).</a:t>
             </a:r>
           </a:p>
         </p:txBody>
@@ -10450,7 +10000,7 @@
         </p:nvSpPr>
         <p:spPr>
           <a:xfrm>
-            <a:off x="868680" y="1691640"/>
+            <a:off x="822960" y="1691640"/>
             <a:ext cx="4663440" cy="3931920"/>
           </a:xfrm>
           <a:prstGeom prst="roundRect">
@@ -10495,7 +10045,7 @@
         </p:nvSpPr>
         <p:spPr>
           <a:xfrm>
-            <a:off x="2788920" y="3017520"/>
+            <a:off x="2743200" y="3017520"/>
             <a:ext cx="822960" cy="822960"/>
           </a:xfrm>
           <a:prstGeom prst="ellipse">
@@ -10540,7 +10090,7 @@
         </p:nvSpPr>
         <p:spPr>
           <a:xfrm rot="5400000">
-            <a:off x="3081528" y="3264408"/>
+            <a:off x="3035808" y="3264408"/>
             <a:ext cx="292608" cy="329184"/>
           </a:xfrm>
           <a:prstGeom prst="triangle">
@@ -10583,7 +10133,7 @@
         </p:nvSpPr>
         <p:spPr>
           <a:xfrm>
-            <a:off x="868680" y="3931920"/>
+            <a:off x="822960" y="3931920"/>
             <a:ext cx="4663440" cy="731520"/>
           </a:xfrm>
           <a:prstGeom prst="rect">
@@ -10998,7 +10548,7 @@
                 </a:solidFill>
                 <a:latin typeface="Calibri"/>
               </a:rPr>
-              <a:t>11 classes · 512 px · 30 epochs · mAP@0.5 ≈ _._ (fill after rerun)</a:t>
+              <a:t>11 classes · 512 px · 30 epochs · mAP@0.5 = 0.842  ·  mAP@0.5:0.95 = 0.515</a:t>
             </a:r>
           </a:p>
         </p:txBody>
@@ -11675,7 +11225,7 @@
                 </a:solidFill>
                 <a:latin typeface="Calibri"/>
               </a:rPr>
-              <a:t>Backbone upgraded from YOLOv10n to YOLO26s for better feature capacity; trained on Self-Driving-Car-3.</a:t>
+              <a:t>Upgraded from YOLOv10n → YOLO26s:  +24.7% mAP@0.5,  +32.7% mAP@0.5:0.95,  +26.1% recall  (11-class Self-Driving-Car-3, 30 epochs).</a:t>
             </a:r>
           </a:p>
         </p:txBody>
@@ -11862,149 +11412,45 @@
           </a:p>
         </p:txBody>
       </p:sp>
-      <p:sp>
-        <p:nvSpPr>
-          <p:cNvPr id="6" name="Rounded Rectangle 5"/>
-          <p:cNvSpPr/>
-          <p:nvPr/>
-        </p:nvSpPr>
+      <p:pic>
+        <p:nvPicPr>
+          <p:cNvPr id="6" name="Picture 5" descr="segformer_original.png"/>
+          <p:cNvPicPr>
+            <a:picLocks noChangeAspect="1"/>
+          </p:cNvPicPr>
+          <p:nvPr/>
+        </p:nvPicPr>
+        <p:blipFill>
+          <a:blip r:embed="rId2"/>
+          <a:stretch>
+            <a:fillRect/>
+          </a:stretch>
+        </p:blipFill>
         <p:spPr>
           <a:xfrm>
             <a:off x="822960" y="2011680"/>
-            <a:ext cx="3383280" cy="3657600"/>
-          </a:xfrm>
-          <a:prstGeom prst="roundRect">
-            <a:avLst/>
-          </a:prstGeom>
-          <a:solidFill>
-            <a:srgbClr val="EEF2F6"/>
-          </a:solidFill>
+            <a:ext cx="3383280" cy="2413164"/>
+          </a:xfrm>
+          <a:prstGeom prst="rect">
+            <a:avLst/>
+          </a:prstGeom>
           <a:ln w="12700">
             <a:solidFill>
               <a:srgbClr val="E2E8F0"/>
             </a:solidFill>
           </a:ln>
         </p:spPr>
-        <p:style>
-          <a:lnRef idx="1">
-            <a:schemeClr val="accent1"/>
-          </a:lnRef>
-          <a:fillRef idx="3">
-            <a:schemeClr val="accent1"/>
-          </a:fillRef>
-          <a:effectRef idx="2">
-            <a:schemeClr val="accent1"/>
-          </a:effectRef>
-          <a:fontRef idx="minor">
-            <a:schemeClr val="lt1"/>
-          </a:fontRef>
-        </p:style>
-        <p:txBody>
-          <a:bodyPr rtlCol="0" anchor="ctr"/>
-          <a:lstStyle/>
-          <a:p>
-            <a:pPr algn="ctr"/>
-          </a:p>
-        </p:txBody>
-      </p:sp>
-      <p:sp>
-        <p:nvSpPr>
-          <p:cNvPr id="7" name="Oval 6"/>
-          <p:cNvSpPr/>
-          <p:nvPr/>
-        </p:nvSpPr>
-        <p:spPr>
-          <a:xfrm>
-            <a:off x="2103120" y="3200400"/>
-            <a:ext cx="822960" cy="822960"/>
-          </a:xfrm>
-          <a:prstGeom prst="ellipse">
-            <a:avLst/>
-          </a:prstGeom>
-          <a:solidFill>
-            <a:srgbClr val="FFFFFF"/>
-          </a:solidFill>
-          <a:ln w="19050">
-            <a:solidFill>
-              <a:srgbClr val="E2E8F0"/>
-            </a:solidFill>
-          </a:ln>
-        </p:spPr>
-        <p:style>
-          <a:lnRef idx="1">
-            <a:schemeClr val="accent1"/>
-          </a:lnRef>
-          <a:fillRef idx="3">
-            <a:schemeClr val="accent1"/>
-          </a:fillRef>
-          <a:effectRef idx="2">
-            <a:schemeClr val="accent1"/>
-          </a:effectRef>
-          <a:fontRef idx="minor">
-            <a:schemeClr val="lt1"/>
-          </a:fontRef>
-        </p:style>
-        <p:txBody>
-          <a:bodyPr rtlCol="0" anchor="ctr"/>
-          <a:lstStyle/>
-          <a:p>
-            <a:pPr algn="ctr"/>
-          </a:p>
-        </p:txBody>
-      </p:sp>
-      <p:sp>
-        <p:nvSpPr>
-          <p:cNvPr id="8" name="Isosceles Triangle 7"/>
-          <p:cNvSpPr/>
-          <p:nvPr/>
-        </p:nvSpPr>
-        <p:spPr>
-          <a:xfrm rot="5400000">
-            <a:off x="2395728" y="3447288"/>
-            <a:ext cx="292608" cy="329184"/>
-          </a:xfrm>
-          <a:prstGeom prst="triangle">
-            <a:avLst/>
-          </a:prstGeom>
-          <a:solidFill>
-            <a:srgbClr val="0D9488"/>
-          </a:solidFill>
-          <a:ln>
-            <a:noFill/>
-          </a:ln>
-        </p:spPr>
-        <p:style>
-          <a:lnRef idx="1">
-            <a:schemeClr val="accent1"/>
-          </a:lnRef>
-          <a:fillRef idx="3">
-            <a:schemeClr val="accent1"/>
-          </a:fillRef>
-          <a:effectRef idx="2">
-            <a:schemeClr val="accent1"/>
-          </a:effectRef>
-          <a:fontRef idx="minor">
-            <a:schemeClr val="lt1"/>
-          </a:fontRef>
-        </p:style>
-        <p:txBody>
-          <a:bodyPr rtlCol="0" anchor="ctr"/>
-          <a:lstStyle/>
-          <a:p>
-            <a:pPr algn="ctr"/>
-          </a:p>
-        </p:txBody>
-      </p:sp>
-      <p:sp>
-        <p:nvSpPr>
-          <p:cNvPr id="9" name="TextBox 8"/>
+      </p:pic>
+      <p:sp>
+        <p:nvSpPr>
+          <p:cNvPr id="7" name="TextBox 6"/>
           <p:cNvSpPr txBox="1"/>
           <p:nvPr/>
         </p:nvSpPr>
         <p:spPr>
           <a:xfrm>
-            <a:off x="822960" y="4114800"/>
-            <a:ext cx="3383280" cy="731520"/>
+            <a:off x="822960" y="5623560"/>
+            <a:ext cx="3383280" cy="457200"/>
           </a:xfrm>
           <a:prstGeom prst="rect">
             <a:avLst/>
@@ -12019,9 +11465,9 @@
           <a:p>
             <a:pPr algn="ctr"/>
             <a:r>
-              <a:rPr sz="1300" b="0">
+              <a:rPr sz="1200" b="1">
                 <a:solidFill>
-                  <a:srgbClr val="475569"/>
+                  <a:srgbClr val="0D9488"/>
                 </a:solidFill>
                 <a:latin typeface="Calibri"/>
               </a:rPr>
@@ -12030,149 +11476,45 @@
           </a:p>
         </p:txBody>
       </p:sp>
-      <p:sp>
-        <p:nvSpPr>
-          <p:cNvPr id="10" name="Rounded Rectangle 9"/>
-          <p:cNvSpPr/>
-          <p:nvPr/>
-        </p:nvSpPr>
+      <p:pic>
+        <p:nvPicPr>
+          <p:cNvPr id="8" name="Picture 7" descr="segformer_mask.png"/>
+          <p:cNvPicPr>
+            <a:picLocks noChangeAspect="1"/>
+          </p:cNvPicPr>
+          <p:nvPr/>
+        </p:nvPicPr>
+        <p:blipFill>
+          <a:blip r:embed="rId3"/>
+          <a:stretch>
+            <a:fillRect/>
+          </a:stretch>
+        </p:blipFill>
         <p:spPr>
           <a:xfrm>
             <a:off x="4407408" y="2011680"/>
-            <a:ext cx="3383280" cy="3657600"/>
-          </a:xfrm>
-          <a:prstGeom prst="roundRect">
-            <a:avLst/>
-          </a:prstGeom>
-          <a:solidFill>
-            <a:srgbClr val="EEF2F6"/>
-          </a:solidFill>
+            <a:ext cx="3383280" cy="2158508"/>
+          </a:xfrm>
+          <a:prstGeom prst="rect">
+            <a:avLst/>
+          </a:prstGeom>
           <a:ln w="12700">
             <a:solidFill>
               <a:srgbClr val="E2E8F0"/>
             </a:solidFill>
           </a:ln>
         </p:spPr>
-        <p:style>
-          <a:lnRef idx="1">
-            <a:schemeClr val="accent1"/>
-          </a:lnRef>
-          <a:fillRef idx="3">
-            <a:schemeClr val="accent1"/>
-          </a:fillRef>
-          <a:effectRef idx="2">
-            <a:schemeClr val="accent1"/>
-          </a:effectRef>
-          <a:fontRef idx="minor">
-            <a:schemeClr val="lt1"/>
-          </a:fontRef>
-        </p:style>
-        <p:txBody>
-          <a:bodyPr rtlCol="0" anchor="ctr"/>
-          <a:lstStyle/>
-          <a:p>
-            <a:pPr algn="ctr"/>
-          </a:p>
-        </p:txBody>
-      </p:sp>
-      <p:sp>
-        <p:nvSpPr>
-          <p:cNvPr id="11" name="Oval 10"/>
-          <p:cNvSpPr/>
-          <p:nvPr/>
-        </p:nvSpPr>
-        <p:spPr>
-          <a:xfrm>
-            <a:off x="5687568" y="3200400"/>
-            <a:ext cx="822960" cy="822960"/>
-          </a:xfrm>
-          <a:prstGeom prst="ellipse">
-            <a:avLst/>
-          </a:prstGeom>
-          <a:solidFill>
-            <a:srgbClr val="FFFFFF"/>
-          </a:solidFill>
-          <a:ln w="19050">
-            <a:solidFill>
-              <a:srgbClr val="E2E8F0"/>
-            </a:solidFill>
-          </a:ln>
-        </p:spPr>
-        <p:style>
-          <a:lnRef idx="1">
-            <a:schemeClr val="accent1"/>
-          </a:lnRef>
-          <a:fillRef idx="3">
-            <a:schemeClr val="accent1"/>
-          </a:fillRef>
-          <a:effectRef idx="2">
-            <a:schemeClr val="accent1"/>
-          </a:effectRef>
-          <a:fontRef idx="minor">
-            <a:schemeClr val="lt1"/>
-          </a:fontRef>
-        </p:style>
-        <p:txBody>
-          <a:bodyPr rtlCol="0" anchor="ctr"/>
-          <a:lstStyle/>
-          <a:p>
-            <a:pPr algn="ctr"/>
-          </a:p>
-        </p:txBody>
-      </p:sp>
-      <p:sp>
-        <p:nvSpPr>
-          <p:cNvPr id="12" name="Isosceles Triangle 11"/>
-          <p:cNvSpPr/>
-          <p:nvPr/>
-        </p:nvSpPr>
-        <p:spPr>
-          <a:xfrm rot="5400000">
-            <a:off x="5980176" y="3447288"/>
-            <a:ext cx="292608" cy="329184"/>
-          </a:xfrm>
-          <a:prstGeom prst="triangle">
-            <a:avLst/>
-          </a:prstGeom>
-          <a:solidFill>
-            <a:srgbClr val="0D9488"/>
-          </a:solidFill>
-          <a:ln>
-            <a:noFill/>
-          </a:ln>
-        </p:spPr>
-        <p:style>
-          <a:lnRef idx="1">
-            <a:schemeClr val="accent1"/>
-          </a:lnRef>
-          <a:fillRef idx="3">
-            <a:schemeClr val="accent1"/>
-          </a:fillRef>
-          <a:effectRef idx="2">
-            <a:schemeClr val="accent1"/>
-          </a:effectRef>
-          <a:fontRef idx="minor">
-            <a:schemeClr val="lt1"/>
-          </a:fontRef>
-        </p:style>
-        <p:txBody>
-          <a:bodyPr rtlCol="0" anchor="ctr"/>
-          <a:lstStyle/>
-          <a:p>
-            <a:pPr algn="ctr"/>
-          </a:p>
-        </p:txBody>
-      </p:sp>
-      <p:sp>
-        <p:nvSpPr>
-          <p:cNvPr id="13" name="TextBox 12"/>
+      </p:pic>
+      <p:sp>
+        <p:nvSpPr>
+          <p:cNvPr id="9" name="TextBox 8"/>
           <p:cNvSpPr txBox="1"/>
           <p:nvPr/>
         </p:nvSpPr>
         <p:spPr>
           <a:xfrm>
-            <a:off x="4407408" y="4114800"/>
-            <a:ext cx="3383280" cy="731520"/>
+            <a:off x="4407408" y="5623560"/>
+            <a:ext cx="3383280" cy="457200"/>
           </a:xfrm>
           <a:prstGeom prst="rect">
             <a:avLst/>
@@ -12187,160 +11529,56 @@
           <a:p>
             <a:pPr algn="ctr"/>
             <a:r>
-              <a:rPr sz="1300" b="0">
+              <a:rPr sz="1200" b="1">
                 <a:solidFill>
-                  <a:srgbClr val="475569"/>
+                  <a:srgbClr val="0D9488"/>
                 </a:solidFill>
                 <a:latin typeface="Calibri"/>
               </a:rPr>
-              <a:t>Segmentation Mask</a:t>
-            </a:r>
-          </a:p>
-        </p:txBody>
-      </p:sp>
-      <p:sp>
-        <p:nvSpPr>
-          <p:cNvPr id="14" name="Rounded Rectangle 13"/>
-          <p:cNvSpPr/>
-          <p:nvPr/>
-        </p:nvSpPr>
+              <a:t>Mask</a:t>
+            </a:r>
+          </a:p>
+        </p:txBody>
+      </p:sp>
+      <p:pic>
+        <p:nvPicPr>
+          <p:cNvPr id="10" name="Picture 9" descr="segformer_blended.png"/>
+          <p:cNvPicPr>
+            <a:picLocks noChangeAspect="1"/>
+          </p:cNvPicPr>
+          <p:nvPr/>
+        </p:nvPicPr>
+        <p:blipFill>
+          <a:blip r:embed="rId4"/>
+          <a:stretch>
+            <a:fillRect/>
+          </a:stretch>
+        </p:blipFill>
         <p:spPr>
           <a:xfrm>
             <a:off x="7991856" y="2011680"/>
-            <a:ext cx="3383280" cy="3657600"/>
-          </a:xfrm>
-          <a:prstGeom prst="roundRect">
-            <a:avLst/>
-          </a:prstGeom>
-          <a:solidFill>
-            <a:srgbClr val="EEF2F6"/>
-          </a:solidFill>
+            <a:ext cx="3383280" cy="2263298"/>
+          </a:xfrm>
+          <a:prstGeom prst="rect">
+            <a:avLst/>
+          </a:prstGeom>
           <a:ln w="12700">
             <a:solidFill>
               <a:srgbClr val="E2E8F0"/>
             </a:solidFill>
           </a:ln>
         </p:spPr>
-        <p:style>
-          <a:lnRef idx="1">
-            <a:schemeClr val="accent1"/>
-          </a:lnRef>
-          <a:fillRef idx="3">
-            <a:schemeClr val="accent1"/>
-          </a:fillRef>
-          <a:effectRef idx="2">
-            <a:schemeClr val="accent1"/>
-          </a:effectRef>
-          <a:fontRef idx="minor">
-            <a:schemeClr val="lt1"/>
-          </a:fontRef>
-        </p:style>
-        <p:txBody>
-          <a:bodyPr rtlCol="0" anchor="ctr"/>
-          <a:lstStyle/>
-          <a:p>
-            <a:pPr algn="ctr"/>
-          </a:p>
-        </p:txBody>
-      </p:sp>
-      <p:sp>
-        <p:nvSpPr>
-          <p:cNvPr id="15" name="Oval 14"/>
-          <p:cNvSpPr/>
-          <p:nvPr/>
-        </p:nvSpPr>
-        <p:spPr>
-          <a:xfrm>
-            <a:off x="9272016" y="3200400"/>
-            <a:ext cx="822960" cy="822960"/>
-          </a:xfrm>
-          <a:prstGeom prst="ellipse">
-            <a:avLst/>
-          </a:prstGeom>
-          <a:solidFill>
-            <a:srgbClr val="FFFFFF"/>
-          </a:solidFill>
-          <a:ln w="19050">
-            <a:solidFill>
-              <a:srgbClr val="E2E8F0"/>
-            </a:solidFill>
-          </a:ln>
-        </p:spPr>
-        <p:style>
-          <a:lnRef idx="1">
-            <a:schemeClr val="accent1"/>
-          </a:lnRef>
-          <a:fillRef idx="3">
-            <a:schemeClr val="accent1"/>
-          </a:fillRef>
-          <a:effectRef idx="2">
-            <a:schemeClr val="accent1"/>
-          </a:effectRef>
-          <a:fontRef idx="minor">
-            <a:schemeClr val="lt1"/>
-          </a:fontRef>
-        </p:style>
-        <p:txBody>
-          <a:bodyPr rtlCol="0" anchor="ctr"/>
-          <a:lstStyle/>
-          <a:p>
-            <a:pPr algn="ctr"/>
-          </a:p>
-        </p:txBody>
-      </p:sp>
-      <p:sp>
-        <p:nvSpPr>
-          <p:cNvPr id="16" name="Isosceles Triangle 15"/>
-          <p:cNvSpPr/>
-          <p:nvPr/>
-        </p:nvSpPr>
-        <p:spPr>
-          <a:xfrm rot="5400000">
-            <a:off x="9564624" y="3447288"/>
-            <a:ext cx="292608" cy="329184"/>
-          </a:xfrm>
-          <a:prstGeom prst="triangle">
-            <a:avLst/>
-          </a:prstGeom>
-          <a:solidFill>
-            <a:srgbClr val="0D9488"/>
-          </a:solidFill>
-          <a:ln>
-            <a:noFill/>
-          </a:ln>
-        </p:spPr>
-        <p:style>
-          <a:lnRef idx="1">
-            <a:schemeClr val="accent1"/>
-          </a:lnRef>
-          <a:fillRef idx="3">
-            <a:schemeClr val="accent1"/>
-          </a:fillRef>
-          <a:effectRef idx="2">
-            <a:schemeClr val="accent1"/>
-          </a:effectRef>
-          <a:fontRef idx="minor">
-            <a:schemeClr val="lt1"/>
-          </a:fontRef>
-        </p:style>
-        <p:txBody>
-          <a:bodyPr rtlCol="0" anchor="ctr"/>
-          <a:lstStyle/>
-          <a:p>
-            <a:pPr algn="ctr"/>
-          </a:p>
-        </p:txBody>
-      </p:sp>
-      <p:sp>
-        <p:nvSpPr>
-          <p:cNvPr id="17" name="TextBox 16"/>
+      </p:pic>
+      <p:sp>
+        <p:nvSpPr>
+          <p:cNvPr id="11" name="TextBox 10"/>
           <p:cNvSpPr txBox="1"/>
           <p:nvPr/>
         </p:nvSpPr>
         <p:spPr>
           <a:xfrm>
-            <a:off x="7991856" y="4114800"/>
-            <a:ext cx="3383280" cy="731520"/>
+            <a:off x="7991856" y="5623560"/>
+            <a:ext cx="3383280" cy="457200"/>
           </a:xfrm>
           <a:prstGeom prst="rect">
             <a:avLst/>
@@ -12355,20 +11593,20 @@
           <a:p>
             <a:pPr algn="ctr"/>
             <a:r>
-              <a:rPr sz="1300" b="0">
+              <a:rPr sz="1200" b="1">
                 <a:solidFill>
-                  <a:srgbClr val="475569"/>
+                  <a:srgbClr val="0D9488"/>
                 </a:solidFill>
                 <a:latin typeface="Calibri"/>
               </a:rPr>
-              <a:t>Overlay</a:t>
-            </a:r>
-          </a:p>
-        </p:txBody>
-      </p:sp>
-      <p:sp>
-        <p:nvSpPr>
-          <p:cNvPr id="18" name="TextBox 17"/>
+              <a:t>Overlay (α=0.5)</a:t>
+            </a:r>
+          </a:p>
+        </p:txBody>
+      </p:sp>
+      <p:sp>
+        <p:nvSpPr>
+          <p:cNvPr id="12" name="TextBox 11"/>
           <p:cNvSpPr txBox="1"/>
           <p:nvPr/>
         </p:nvSpPr>
@@ -12396,7 +11634,7 @@
                 </a:solidFill>
                 <a:latin typeface="Calibri"/>
               </a:rPr>
-              <a:t>Nearest-neighbor upsampling preserves boundaries; not real-time by design — a quality demonstration.</a:t>
+              <a:t>Nearest-neighbor upsampling preserves boundaries; 2,516 frames at ~5 it/s (~8 min) — quality demo, not real-time.</a:t>
             </a:r>
           </a:p>
         </p:txBody>

--- a/Computer_Vision_Presentation.pptx
+++ b/Computer_Vision_Presentation.pptx
@@ -21,7 +21,6 @@
     <p:sldId id="269" r:id="rId21"/>
     <p:sldId id="270" r:id="rId22"/>
     <p:sldId id="271" r:id="rId23"/>
-    <p:sldId id="272" r:id="rId24"/>
   </p:sldIdLst>
   <p:sldSz cx="12191695" cy="6858000" type="screen4x3"/>
   <p:notesSz cx="6858000" cy="9144000"/>
@@ -588,7 +587,7 @@
           <a:lstStyle/>
           <a:p>
             <a:r>
-              <a:t>This is a real frame from the Stage 2b pipeline. YOLO26s detects the cars (YOLO conf=0.2); CLIP crops each car, runs it through the frozen ViT-B-32 backbone and the learned 512→20 linear probe, and overlays the top-1 brand with confidence. We only run CLIP on car crops above 80×80 px. Trucks are intentionally skipped — the probe was trained on car-only images and would miscalibrate on truck crops. Brand confidence is currently not thresholded (a known limit).</a:t>
+              <a:t>Two real outputs from Stage 2b. Left: a single-frame validation check. Right: a frame extracted from the actual annotated video output. In both, YOLO26s detects the cars (YOLO conf=0.2); CLIP crops each car, runs it through the frozen ViT-B-32 backbone and the learned 512→20 linear probe, and overlays the top-1 brand with confidence. We only run CLIP on car crops above 80×80 px. Trucks are intentionally skipped — the probe was trained on car-only images and would miscalibrate on truck crops. Brand confidence is currently not thresholded (a known limit).</a:t>
             </a:r>
           </a:p>
         </p:txBody>
@@ -728,7 +727,7 @@
           <a:lstStyle/>
           <a:p>
             <a:r>
-              <a:t>This is a real output from Stage 3. YOLO sees 'car, trafficLight' — the VLM narrates 'A red car is driving down a wet road in the rain, approaching a traffic light.' Boxes and brands are intermediate outputs. The real product is a sentence any human can read. That's what a customer demo needs.</a:t>
+              <a:t>This is the Explain stage in action. Two real frames from Stage 3 showing adaptive captioning: the left triggers a 'rainy driving' caption; the right triggers a 'pedestrian crossing' caption — because the scene changed enough (diff ≥ 12) and the minimum 5-second interval elapsed. YOLO sees 'car, trafficLight' — the VLM narrates 'A red car is driving down a wet road in the rain...' Boxes and brands are intermediate outputs. The real product is a sentence any human can read. That's what a customer demo needs.</a:t>
             </a:r>
           </a:p>
         </p:txBody>
@@ -798,7 +797,7 @@
           <a:lstStyle/>
           <a:p>
             <a:r>
-              <a:t>Two real frames from Stage 3, showing adaptive captioning in action. The left frame triggers a 'rainy driving' caption; the right frame triggers a 'pedestrian crossing' caption — because the scene changed enough (diff ≥ 12) and the minimum 5-second interval elapsed. The VLM produces fluent sentences with colour, weather, action, and spatial relationships — not just keyword lists. This is the difference between a detector output and a human-readable story.</a:t>
+              <a:t>This is a real Q&amp;A output from Stage 3. The user paused a frame and asked a question about the scene; the VLM (Qwen3-VL:4b) responds with a direct answer grounded in what it sees. No pre-scripted responses — every answer is generated on-the-fly for that specific frame. This is the difference between a detection system and an explainable one.</a:t>
             </a:r>
           </a:p>
         </p:txBody>
@@ -868,7 +867,7 @@
           <a:lstStyle/>
           <a:p>
             <a:r>
-              <a:t>Pause any frame and ask: 'Why did the model flag this?' Turns a black-box detector into an explainable system.</a:t>
+              <a:t>This is the full stack. Detect gives us structure. Enrich adds identity. Explain produces the narrative. SegFormer shares the same input video but runs on its own — it's a quality demo, not part of the live pipeline. Three sections, four stages, one demo video.</a:t>
             </a:r>
           </a:p>
         </p:txBody>
@@ -938,7 +937,7 @@
           <a:lstStyle/>
           <a:p>
             <a:r>
-              <a:t>This is the full stack. Detect gives us structure. Enrich adds identity. Explain produces the narrative. SegFormer shares the same input video but runs on its own — it's a quality demo, not part of the live pipeline. Three sections, four stages, one demo video.</a:t>
+              <a:t>Detection: YOLOv10n (P=0.801, R=0.598, mAP@0.5=0.675, mAP@0.5:0.95=0.388) upgraded to YOLO26s (P=0.874, R=0.754, mAP@0.5=0.842, mAP@0.5:0.95=0.515) — a substantial accuracy lift across all metrics. The C2PSA backbone (9.4 M params) generalises well on 11 dashcam classes; pedestrian remains hardest due to scale and occlusion.  Enrichment: Brand recognition jumps from 55% zero-shot to 80% with the probe — a 25-point gain from a single linear layer on frozen embeddings. Segmentation leverages a pretrained SOTA model for immediate quality.</a:t>
             </a:r>
           </a:p>
         </p:txBody>
@@ -1008,76 +1007,6 @@
           <a:lstStyle/>
           <a:p>
             <a:r>
-              <a:t>Detection: YOLOv10n (P=0.801, R=0.598, mAP@0.5=0.675, mAP@0.5:0.95=0.388) upgraded to YOLO26s (P=0.874, R=0.754, mAP@0.5=0.842, mAP@0.5:0.95=0.515) — a substantial accuracy lift across all metrics. The C2PSA backbone (9.4 M params) generalises well on 11 dashcam classes; pedestrian remains hardest due to scale and occlusion.  Enrichment: Brand recognition jumps from 55% zero-shot to 80% with the probe — a 25-point gain from a single linear layer on frozen embeddings. Segmentation leverages a pretrained SOTA model for immediate quality.</a:t>
-            </a:r>
-          </a:p>
-        </p:txBody>
-      </p:sp>
-      <p:sp>
-        <p:nvSpPr>
-          <p:cNvPr id="4" name="Slide Number Placeholder 3"/>
-          <p:cNvSpPr>
-            <a:spLocks noGrp="1"/>
-          </p:cNvSpPr>
-          <p:nvPr>
-            <p:ph type="sldNum" idx="5" sz="quarter"/>
-          </p:nvPr>
-        </p:nvSpPr>
-        <p:spPr/>
-      </p:sp>
-    </p:spTree>
-  </p:cSld>
-  <p:clrMapOvr>
-    <a:masterClrMapping/>
-  </p:clrMapOvr>
-</p:notes>
-</file>
-
-<file path=ppt/notesSlides/notesSlide17.xml><?xml version="1.0" encoding="utf-8"?>
-<p:notes xmlns:a="http://schemas.openxmlformats.org/drawingml/2006/main" xmlns:p="http://schemas.openxmlformats.org/presentationml/2006/main" xmlns:r="http://schemas.openxmlformats.org/officeDocument/2006/relationships">
-  <p:cSld>
-    <p:spTree>
-      <p:nvGrpSpPr>
-        <p:cNvPr id="1" name=""/>
-        <p:cNvGrpSpPr/>
-        <p:nvPr/>
-      </p:nvGrpSpPr>
-      <p:grpSpPr>
-        <a:xfrm>
-          <a:off x="0" y="0"/>
-          <a:ext cx="0" cy="0"/>
-          <a:chOff x="0" y="0"/>
-          <a:chExt cx="0" cy="0"/>
-        </a:xfrm>
-      </p:grpSpPr>
-      <p:sp>
-        <p:nvSpPr>
-          <p:cNvPr id="2" name="Slide Image Placeholder 1"/>
-          <p:cNvSpPr>
-            <a:spLocks noGrp="1"/>
-          </p:cNvSpPr>
-          <p:nvPr>
-            <p:ph type="sldImg" idx="2"/>
-          </p:nvPr>
-        </p:nvSpPr>
-        <p:spPr/>
-      </p:sp>
-      <p:sp>
-        <p:nvSpPr>
-          <p:cNvPr id="3" name="Notes Placeholder 2"/>
-          <p:cNvSpPr>
-            <a:spLocks noGrp="1"/>
-          </p:cNvSpPr>
-          <p:nvPr>
-            <p:ph type="body" idx="3" sz="quarter"/>
-          </p:nvPr>
-        </p:nvSpPr>
-        <p:spPr/>
-        <p:txBody>
-          <a:bodyPr/>
-          <a:lstStyle/>
-          <a:p>
-            <a:r>
               <a:t>The pipeline works end-to-end on a local GPU. The next step is shrinking it: TensorRT, ONNX, and temporal smoothing so it runs on an embedded dashcam unit. Thank you — we're happy to take questions.</a:t>
             </a:r>
           </a:p>
@@ -1303,7 +1232,7 @@
           <a:lstStyle/>
           <a:p>
             <a:r>
-              <a:t>YOLO gives us boxes, but a car has a brand. The scene is not just objects — it is road, sidewalk, sky. We need two detection layers.</a:t>
+              <a:t>Left: original dashcam video (original_videos/dashcam.mp4). Right: YOLO26s detection overlay (other_document/video archive/output video/10.05.2026/annotated_video_yolo.mp4). YOLO gives us boxes, but a car has a brand. The scene is not just objects — it is road, sidewalk, sky. We need two detection layers.</a:t>
             </a:r>
           </a:p>
         </p:txBody>
@@ -5014,7 +4943,7 @@
         <p:spPr>
           <a:xfrm>
             <a:off x="822960" y="2011680"/>
-            <a:ext cx="7132320" cy="4813975"/>
+            <a:ext cx="4064288" cy="2743200"/>
           </a:xfrm>
           <a:prstGeom prst="rect">
             <a:avLst/>
@@ -5028,14 +4957,113 @@
       </p:pic>
       <p:sp>
         <p:nvSpPr>
-          <p:cNvPr id="7" name="Rounded Rectangle 6"/>
+          <p:cNvPr id="7" name="TextBox 6"/>
+          <p:cNvSpPr txBox="1"/>
+          <p:nvPr/>
+        </p:nvSpPr>
+        <p:spPr>
+          <a:xfrm>
+            <a:off x="822960" y="4892040"/>
+            <a:ext cx="4882896" cy="365760"/>
+          </a:xfrm>
+          <a:prstGeom prst="rect">
+            <a:avLst/>
+          </a:prstGeom>
+          <a:noFill/>
+        </p:spPr>
+        <p:txBody>
+          <a:bodyPr wrap="square">
+            <a:spAutoFit/>
+          </a:bodyPr>
+          <a:lstStyle/>
+          <a:p>
+            <a:pPr algn="ctr"/>
+            <a:r>
+              <a:rPr sz="1200" b="1">
+                <a:solidFill>
+                  <a:srgbClr val="D97706"/>
+                </a:solidFill>
+                <a:latin typeface="Calibri"/>
+              </a:rPr>
+              <a:t>Single-frame check</a:t>
+            </a:r>
+          </a:p>
+        </p:txBody>
+      </p:sp>
+      <p:pic>
+        <p:nvPicPr>
+          <p:cNvPr id="8" name="Picture 7" descr="clip linear probe video.png"/>
+          <p:cNvPicPr>
+            <a:picLocks noChangeAspect="1"/>
+          </p:cNvPicPr>
+          <p:nvPr/>
+        </p:nvPicPr>
+        <p:blipFill>
+          <a:blip r:embed="rId3"/>
+          <a:stretch>
+            <a:fillRect/>
+          </a:stretch>
+        </p:blipFill>
+        <p:spPr>
+          <a:xfrm>
+            <a:off x="6071616" y="2011680"/>
+            <a:ext cx="5302405" cy="2743200"/>
+          </a:xfrm>
+          <a:prstGeom prst="rect">
+            <a:avLst/>
+          </a:prstGeom>
+          <a:ln w="12700">
+            <a:solidFill>
+              <a:srgbClr val="E2E8F0"/>
+            </a:solidFill>
+          </a:ln>
+        </p:spPr>
+      </p:pic>
+      <p:sp>
+        <p:nvSpPr>
+          <p:cNvPr id="9" name="TextBox 8"/>
+          <p:cNvSpPr txBox="1"/>
+          <p:nvPr/>
+        </p:nvSpPr>
+        <p:spPr>
+          <a:xfrm>
+            <a:off x="6071616" y="4892040"/>
+            <a:ext cx="5294376" cy="365760"/>
+          </a:xfrm>
+          <a:prstGeom prst="rect">
+            <a:avLst/>
+          </a:prstGeom>
+          <a:noFill/>
+        </p:spPr>
+        <p:txBody>
+          <a:bodyPr wrap="square">
+            <a:spAutoFit/>
+          </a:bodyPr>
+          <a:lstStyle/>
+          <a:p>
+            <a:pPr algn="ctr"/>
+            <a:r>
+              <a:rPr sz="1200" b="1">
+                <a:solidFill>
+                  <a:srgbClr val="D97706"/>
+                </a:solidFill>
+                <a:latin typeface="Calibri"/>
+              </a:rPr>
+              <a:t>Video frame output</a:t>
+            </a:r>
+          </a:p>
+        </p:txBody>
+      </p:sp>
+      <p:sp>
+        <p:nvSpPr>
+          <p:cNvPr id="10" name="Rounded Rectangle 9"/>
           <p:cNvSpPr/>
           <p:nvPr/>
         </p:nvSpPr>
         <p:spPr>
           <a:xfrm>
-            <a:off x="8275320" y="2057400"/>
-            <a:ext cx="3063240" cy="530352"/>
+            <a:off x="952350" y="5349240"/>
+            <a:ext cx="1874519" cy="457200"/>
           </a:xfrm>
           <a:prstGeom prst="roundRect">
             <a:avLst/>
@@ -5073,14 +5101,14 @@
       </p:sp>
       <p:sp>
         <p:nvSpPr>
-          <p:cNvPr id="8" name="TextBox 7"/>
+          <p:cNvPr id="11" name="TextBox 10"/>
           <p:cNvSpPr txBox="1"/>
           <p:nvPr/>
         </p:nvSpPr>
         <p:spPr>
           <a:xfrm>
-            <a:off x="8275320" y="2093976"/>
-            <a:ext cx="3063240" cy="530352"/>
+            <a:off x="952350" y="5385816"/>
+            <a:ext cx="1874519" cy="457200"/>
           </a:xfrm>
           <a:prstGeom prst="rect">
             <a:avLst/>
@@ -5108,14 +5136,14 @@
       </p:sp>
       <p:sp>
         <p:nvSpPr>
-          <p:cNvPr id="9" name="Rounded Rectangle 8"/>
+          <p:cNvPr id="12" name="Rounded Rectangle 11"/>
           <p:cNvSpPr/>
           <p:nvPr/>
         </p:nvSpPr>
         <p:spPr>
           <a:xfrm>
-            <a:off x="8275320" y="2770632"/>
-            <a:ext cx="3063240" cy="530352"/>
+            <a:off x="3055469" y="5349240"/>
+            <a:ext cx="1874519" cy="457200"/>
           </a:xfrm>
           <a:prstGeom prst="roundRect">
             <a:avLst/>
@@ -5153,14 +5181,14 @@
       </p:sp>
       <p:sp>
         <p:nvSpPr>
-          <p:cNvPr id="10" name="TextBox 9"/>
+          <p:cNvPr id="13" name="TextBox 12"/>
           <p:cNvSpPr txBox="1"/>
           <p:nvPr/>
         </p:nvSpPr>
         <p:spPr>
           <a:xfrm>
-            <a:off x="8275320" y="2807208"/>
-            <a:ext cx="3063240" cy="530352"/>
+            <a:off x="3055469" y="5385816"/>
+            <a:ext cx="1874519" cy="457200"/>
           </a:xfrm>
           <a:prstGeom prst="rect">
             <a:avLst/>
@@ -5188,14 +5216,14 @@
       </p:sp>
       <p:sp>
         <p:nvSpPr>
-          <p:cNvPr id="11" name="Rounded Rectangle 10"/>
+          <p:cNvPr id="14" name="Rounded Rectangle 13"/>
           <p:cNvSpPr/>
           <p:nvPr/>
         </p:nvSpPr>
         <p:spPr>
           <a:xfrm>
-            <a:off x="8275320" y="3483864"/>
-            <a:ext cx="3063240" cy="530352"/>
+            <a:off x="5158588" y="5349240"/>
+            <a:ext cx="1874519" cy="457200"/>
           </a:xfrm>
           <a:prstGeom prst="roundRect">
             <a:avLst/>
@@ -5233,14 +5261,14 @@
       </p:sp>
       <p:sp>
         <p:nvSpPr>
-          <p:cNvPr id="12" name="TextBox 11"/>
+          <p:cNvPr id="15" name="TextBox 14"/>
           <p:cNvSpPr txBox="1"/>
           <p:nvPr/>
         </p:nvSpPr>
         <p:spPr>
           <a:xfrm>
-            <a:off x="8275320" y="3520440"/>
-            <a:ext cx="3063240" cy="530352"/>
+            <a:off x="5158588" y="5385816"/>
+            <a:ext cx="1874519" cy="457200"/>
           </a:xfrm>
           <a:prstGeom prst="rect">
             <a:avLst/>
@@ -5268,14 +5296,14 @@
       </p:sp>
       <p:sp>
         <p:nvSpPr>
-          <p:cNvPr id="13" name="Rounded Rectangle 12"/>
+          <p:cNvPr id="16" name="Rounded Rectangle 15"/>
           <p:cNvSpPr/>
           <p:nvPr/>
         </p:nvSpPr>
         <p:spPr>
           <a:xfrm>
-            <a:off x="8275320" y="4197096"/>
-            <a:ext cx="3063240" cy="530352"/>
+            <a:off x="7261707" y="5349240"/>
+            <a:ext cx="1874519" cy="457200"/>
           </a:xfrm>
           <a:prstGeom prst="roundRect">
             <a:avLst/>
@@ -5313,14 +5341,14 @@
       </p:sp>
       <p:sp>
         <p:nvSpPr>
-          <p:cNvPr id="14" name="TextBox 13"/>
+          <p:cNvPr id="17" name="TextBox 16"/>
           <p:cNvSpPr txBox="1"/>
           <p:nvPr/>
         </p:nvSpPr>
         <p:spPr>
           <a:xfrm>
-            <a:off x="8275320" y="4233672"/>
-            <a:ext cx="3063240" cy="530352"/>
+            <a:off x="7261707" y="5385816"/>
+            <a:ext cx="1874519" cy="457200"/>
           </a:xfrm>
           <a:prstGeom prst="rect">
             <a:avLst/>
@@ -5348,14 +5376,14 @@
       </p:sp>
       <p:sp>
         <p:nvSpPr>
-          <p:cNvPr id="15" name="Rounded Rectangle 14"/>
+          <p:cNvPr id="18" name="Rounded Rectangle 17"/>
           <p:cNvSpPr/>
           <p:nvPr/>
         </p:nvSpPr>
         <p:spPr>
           <a:xfrm>
-            <a:off x="8275320" y="4910328"/>
-            <a:ext cx="3063240" cy="530352"/>
+            <a:off x="9364826" y="5349240"/>
+            <a:ext cx="1874519" cy="457200"/>
           </a:xfrm>
           <a:prstGeom prst="roundRect">
             <a:avLst/>
@@ -5393,14 +5421,14 @@
       </p:sp>
       <p:sp>
         <p:nvSpPr>
-          <p:cNvPr id="16" name="TextBox 15"/>
+          <p:cNvPr id="19" name="TextBox 18"/>
           <p:cNvSpPr txBox="1"/>
           <p:nvPr/>
         </p:nvSpPr>
         <p:spPr>
           <a:xfrm>
-            <a:off x="8275320" y="4946904"/>
-            <a:ext cx="3063240" cy="530352"/>
+            <a:off x="9364826" y="5385816"/>
+            <a:ext cx="1874519" cy="457200"/>
           </a:xfrm>
           <a:prstGeom prst="rect">
             <a:avLst/>
@@ -5428,7 +5456,7 @@
       </p:sp>
       <p:sp>
         <p:nvSpPr>
-          <p:cNvPr id="17" name="TextBox 16"/>
+          <p:cNvPr id="20" name="TextBox 19"/>
           <p:cNvSpPr txBox="1"/>
           <p:nvPr/>
         </p:nvSpPr>
@@ -5456,7 +5484,7 @@
                 </a:solidFill>
                 <a:latin typeface="Calibri"/>
               </a:rPr>
-              <a:t>Real output: YOLO26s boxes + CLIP brand chips (BMW, Peugeot …). Trucks excluded by design — car-only probe.</a:t>
+              <a:t>Real output: YOLO26s boxes + CLIP brand chips (BMW, Peugeot …) on both static checks and running video. Trucks excluded by design — car-only probe.</a:t>
             </a:r>
           </a:p>
         </p:txBody>
@@ -5812,7 +5840,7 @@
                 </a:solidFill>
                 <a:latin typeface="Calibri"/>
               </a:rPr>
-              <a:t>The ultimate interface is plain language.</a:t>
+              <a:t>The ultimate interface is plain language — adaptive and audience-ready</a:t>
             </a:r>
           </a:p>
         </p:txBody>
@@ -5860,9 +5888,44 @@
           </a:p>
         </p:txBody>
       </p:sp>
+      <p:sp>
+        <p:nvSpPr>
+          <p:cNvPr id="5" name="TextBox 4"/>
+          <p:cNvSpPr txBox="1"/>
+          <p:nvPr/>
+        </p:nvSpPr>
+        <p:spPr>
+          <a:xfrm>
+            <a:off x="822960" y="1417320"/>
+            <a:ext cx="10545775" cy="457200"/>
+          </a:xfrm>
+          <a:prstGeom prst="rect">
+            <a:avLst/>
+          </a:prstGeom>
+          <a:noFill/>
+        </p:spPr>
+        <p:txBody>
+          <a:bodyPr wrap="square">
+            <a:spAutoFit/>
+          </a:bodyPr>
+          <a:lstStyle/>
+          <a:p>
+            <a:pPr algn="l"/>
+            <a:r>
+              <a:rPr sz="1800" b="0">
+                <a:solidFill>
+                  <a:srgbClr val="475569"/>
+                </a:solidFill>
+                <a:latin typeface="Calibri"/>
+              </a:rPr>
+              <a:t>Qwen3-VL:4b via Ollama · adaptive gating · diff ≥ 12 · min interval 5 s</a:t>
+            </a:r>
+          </a:p>
+        </p:txBody>
+      </p:sp>
       <p:pic>
         <p:nvPicPr>
-          <p:cNvPr id="5" name="Picture 4" descr="vlm_caption_red_car_rain.png"/>
+          <p:cNvPr id="6" name="Picture 5" descr="vlm_caption_red_car_rain.png"/>
           <p:cNvPicPr>
             <a:picLocks noChangeAspect="1"/>
           </p:cNvPicPr>
@@ -5876,8 +5939,8 @@
         </p:blipFill>
         <p:spPr>
           <a:xfrm>
-            <a:off x="1828800" y="1828800"/>
-            <a:ext cx="8503920" cy="2113644"/>
+            <a:off x="822960" y="2011680"/>
+            <a:ext cx="5120640" cy="1272732"/>
           </a:xfrm>
           <a:prstGeom prst="rect">
             <a:avLst/>
@@ -5891,14 +5954,14 @@
       </p:pic>
       <p:sp>
         <p:nvSpPr>
-          <p:cNvPr id="6" name="TextBox 5"/>
+          <p:cNvPr id="7" name="TextBox 6"/>
           <p:cNvSpPr txBox="1"/>
           <p:nvPr/>
         </p:nvSpPr>
         <p:spPr>
           <a:xfrm>
-            <a:off x="1828800" y="5623560"/>
-            <a:ext cx="8503920" cy="457200"/>
+            <a:off x="822960" y="5623560"/>
+            <a:ext cx="5120640" cy="457200"/>
           </a:xfrm>
           <a:prstGeom prst="rect">
             <a:avLst/>
@@ -5913,7 +5976,7 @@
           <a:p>
             <a:pPr algn="ctr"/>
             <a:r>
-              <a:rPr sz="1400" b="0">
+              <a:rPr sz="1200" b="0">
                 <a:solidFill>
                   <a:srgbClr val="6366F1"/>
                 </a:solidFill>
@@ -5924,16 +5987,45 @@
           </a:p>
         </p:txBody>
       </p:sp>
-      <p:sp>
-        <p:nvSpPr>
-          <p:cNvPr id="7" name="TextBox 6"/>
+      <p:pic>
+        <p:nvPicPr>
+          <p:cNvPr id="8" name="Picture 7" descr="vlm_caption_truck_pedestrian.png"/>
+          <p:cNvPicPr>
+            <a:picLocks noChangeAspect="1"/>
+          </p:cNvPicPr>
+          <p:nvPr/>
+        </p:nvPicPr>
+        <p:blipFill>
+          <a:blip r:embed="rId3"/>
+          <a:stretch>
+            <a:fillRect/>
+          </a:stretch>
+        </p:blipFill>
+        <p:spPr>
+          <a:xfrm>
+            <a:off x="6245352" y="2011680"/>
+            <a:ext cx="5120640" cy="1381681"/>
+          </a:xfrm>
+          <a:prstGeom prst="rect">
+            <a:avLst/>
+          </a:prstGeom>
+          <a:ln w="12700">
+            <a:solidFill>
+              <a:srgbClr val="E2E8F0"/>
+            </a:solidFill>
+          </a:ln>
+        </p:spPr>
+      </p:pic>
+      <p:sp>
+        <p:nvSpPr>
+          <p:cNvPr id="9" name="TextBox 8"/>
           <p:cNvSpPr txBox="1"/>
           <p:nvPr/>
         </p:nvSpPr>
         <p:spPr>
           <a:xfrm>
-            <a:off x="822960" y="5989320"/>
-            <a:ext cx="10545775" cy="457200"/>
+            <a:off x="6245352" y="5623560"/>
+            <a:ext cx="5120640" cy="457200"/>
           </a:xfrm>
           <a:prstGeom prst="rect">
             <a:avLst/>
@@ -5946,15 +6038,50 @@
           </a:bodyPr>
           <a:lstStyle/>
           <a:p>
-            <a:pPr algn="l"/>
-            <a:r>
-              <a:rPr sz="1300" b="0">
-                <a:solidFill>
-                  <a:srgbClr val="94A3B8"/>
+            <a:pPr algn="ctr"/>
+            <a:r>
+              <a:rPr sz="1200" b="0">
+                <a:solidFill>
+                  <a:srgbClr val="6366F1"/>
                 </a:solidFill>
                 <a:latin typeface="Calibri"/>
               </a:rPr>
-              <a:t>Scene captioning + frame-based Q&amp;A so any viewer — not just an engineer — can follow the story.</a:t>
+              <a:t>"A white truck and a pedestrian are crossing the road at a pedestrian crossing..."</a:t>
+            </a:r>
+          </a:p>
+        </p:txBody>
+      </p:sp>
+      <p:sp>
+        <p:nvSpPr>
+          <p:cNvPr id="10" name="TextBox 9"/>
+          <p:cNvSpPr txBox="1"/>
+          <p:nvPr/>
+        </p:nvSpPr>
+        <p:spPr>
+          <a:xfrm>
+            <a:off x="822960" y="5989320"/>
+            <a:ext cx="10545775" cy="457200"/>
+          </a:xfrm>
+          <a:prstGeom prst="rect">
+            <a:avLst/>
+          </a:prstGeom>
+          <a:noFill/>
+        </p:spPr>
+        <p:txBody>
+          <a:bodyPr wrap="square">
+            <a:spAutoFit/>
+          </a:bodyPr>
+          <a:lstStyle/>
+          <a:p>
+            <a:pPr algn="l"/>
+            <a:r>
+              <a:rPr sz="1300" b="0">
+                <a:solidFill>
+                  <a:srgbClr val="94A3B8"/>
+                </a:solidFill>
+                <a:latin typeface="Calibri"/>
+              </a:rPr>
+              <a:t>Captions fire only when the scene actually changes — no redundant narration. Any viewer can follow what the car sees.</a:t>
             </a:r>
           </a:p>
         </p:txBody>
@@ -6058,7 +6185,7 @@
                 </a:solidFill>
                 <a:latin typeface="Calibri"/>
               </a:rPr>
-              <a:t>Adaptive captioning — only when the scene changes</a:t>
+              <a:t>Frame-based Q&amp;A — ask what you see</a:t>
             </a:r>
           </a:p>
         </p:txBody>
@@ -6106,44 +6233,9 @@
           </a:p>
         </p:txBody>
       </p:sp>
-      <p:sp>
-        <p:nvSpPr>
-          <p:cNvPr id="5" name="TextBox 4"/>
-          <p:cNvSpPr txBox="1"/>
-          <p:nvPr/>
-        </p:nvSpPr>
-        <p:spPr>
-          <a:xfrm>
-            <a:off x="822960" y="1417320"/>
-            <a:ext cx="10545775" cy="457200"/>
-          </a:xfrm>
-          <a:prstGeom prst="rect">
-            <a:avLst/>
-          </a:prstGeom>
-          <a:noFill/>
-        </p:spPr>
-        <p:txBody>
-          <a:bodyPr wrap="square">
-            <a:spAutoFit/>
-          </a:bodyPr>
-          <a:lstStyle/>
-          <a:p>
-            <a:pPr algn="l"/>
-            <a:r>
-              <a:rPr sz="1800" b="0">
-                <a:solidFill>
-                  <a:srgbClr val="475569"/>
-                </a:solidFill>
-                <a:latin typeface="Calibri"/>
-              </a:rPr>
-              <a:t>Qwen3-VL:4b via Ollama · adaptive gating · diff ≥ 12 · min interval 5 s</a:t>
-            </a:r>
-          </a:p>
-        </p:txBody>
-      </p:sp>
       <p:pic>
         <p:nvPicPr>
-          <p:cNvPr id="6" name="Picture 5" descr="vlm_caption_red_car_rain.png"/>
+          <p:cNvPr id="5" name="Picture 4" descr="vlm_qna_interface.png"/>
           <p:cNvPicPr>
             <a:picLocks noChangeAspect="1"/>
           </p:cNvPicPr>
@@ -6157,8 +6249,8 @@
         </p:blipFill>
         <p:spPr>
           <a:xfrm>
-            <a:off x="822960" y="2011680"/>
-            <a:ext cx="5120640" cy="1272732"/>
+            <a:off x="2743200" y="1737360"/>
+            <a:ext cx="6768960" cy="4023360"/>
           </a:xfrm>
           <a:prstGeom prst="rect">
             <a:avLst/>
@@ -6172,14 +6264,14 @@
       </p:pic>
       <p:sp>
         <p:nvSpPr>
-          <p:cNvPr id="7" name="TextBox 6"/>
+          <p:cNvPr id="6" name="TextBox 5"/>
           <p:cNvSpPr txBox="1"/>
           <p:nvPr/>
         </p:nvSpPr>
         <p:spPr>
           <a:xfrm>
-            <a:off x="822960" y="5623560"/>
-            <a:ext cx="5120640" cy="457200"/>
+            <a:off x="822960" y="5989320"/>
+            <a:ext cx="10545775" cy="457200"/>
           </a:xfrm>
           <a:prstGeom prst="rect">
             <a:avLst/>
@@ -6192,114 +6284,15 @@
           </a:bodyPr>
           <a:lstStyle/>
           <a:p>
-            <a:pPr algn="ctr"/>
-            <a:r>
-              <a:rPr sz="1200" b="0">
-                <a:solidFill>
-                  <a:srgbClr val="6366F1"/>
+            <a:pPr algn="l"/>
+            <a:r>
+              <a:rPr sz="1300" b="0">
+                <a:solidFill>
+                  <a:srgbClr val="94A3B8"/>
                 </a:solidFill>
                 <a:latin typeface="Calibri"/>
               </a:rPr>
-              <a:t>"A red car is driving down a wet road in the rain, approaching a traffic light."</a:t>
-            </a:r>
-          </a:p>
-        </p:txBody>
-      </p:sp>
-      <p:pic>
-        <p:nvPicPr>
-          <p:cNvPr id="8" name="Picture 7" descr="vlm_caption_truck_pedestrian.png"/>
-          <p:cNvPicPr>
-            <a:picLocks noChangeAspect="1"/>
-          </p:cNvPicPr>
-          <p:nvPr/>
-        </p:nvPicPr>
-        <p:blipFill>
-          <a:blip r:embed="rId3"/>
-          <a:stretch>
-            <a:fillRect/>
-          </a:stretch>
-        </p:blipFill>
-        <p:spPr>
-          <a:xfrm>
-            <a:off x="6245352" y="2011680"/>
-            <a:ext cx="5120640" cy="1381681"/>
-          </a:xfrm>
-          <a:prstGeom prst="rect">
-            <a:avLst/>
-          </a:prstGeom>
-          <a:ln w="12700">
-            <a:solidFill>
-              <a:srgbClr val="E2E8F0"/>
-            </a:solidFill>
-          </a:ln>
-        </p:spPr>
-      </p:pic>
-      <p:sp>
-        <p:nvSpPr>
-          <p:cNvPr id="9" name="TextBox 8"/>
-          <p:cNvSpPr txBox="1"/>
-          <p:nvPr/>
-        </p:nvSpPr>
-        <p:spPr>
-          <a:xfrm>
-            <a:off x="6245352" y="5623560"/>
-            <a:ext cx="5120640" cy="457200"/>
-          </a:xfrm>
-          <a:prstGeom prst="rect">
-            <a:avLst/>
-          </a:prstGeom>
-          <a:noFill/>
-        </p:spPr>
-        <p:txBody>
-          <a:bodyPr wrap="square">
-            <a:spAutoFit/>
-          </a:bodyPr>
-          <a:lstStyle/>
-          <a:p>
-            <a:pPr algn="ctr"/>
-            <a:r>
-              <a:rPr sz="1200" b="0">
-                <a:solidFill>
-                  <a:srgbClr val="6366F1"/>
-                </a:solidFill>
-                <a:latin typeface="Calibri"/>
-              </a:rPr>
-              <a:t>"A white truck and a pedestrian are crossing the road at a pedestrian crossing..."</a:t>
-            </a:r>
-          </a:p>
-        </p:txBody>
-      </p:sp>
-      <p:sp>
-        <p:nvSpPr>
-          <p:cNvPr id="10" name="TextBox 9"/>
-          <p:cNvSpPr txBox="1"/>
-          <p:nvPr/>
-        </p:nvSpPr>
-        <p:spPr>
-          <a:xfrm>
-            <a:off x="822960" y="5989320"/>
-            <a:ext cx="10545775" cy="457200"/>
-          </a:xfrm>
-          <a:prstGeom prst="rect">
-            <a:avLst/>
-          </a:prstGeom>
-          <a:noFill/>
-        </p:spPr>
-        <p:txBody>
-          <a:bodyPr wrap="square">
-            <a:spAutoFit/>
-          </a:bodyPr>
-          <a:lstStyle/>
-          <a:p>
-            <a:pPr algn="l"/>
-            <a:r>
-              <a:rPr sz="1300" b="0">
-                <a:solidFill>
-                  <a:srgbClr val="94A3B8"/>
-                </a:solidFill>
-                <a:latin typeface="Calibri"/>
-              </a:rPr>
-              <a:t>Captions fire only when the scene actually changes — no redundant narration.</a:t>
+              <a:t>Pause any frame, type a question, and the VLM answers with evidence — turning a black-box detector into an explainable system.</a:t>
             </a:r>
           </a:p>
         </p:txBody>
@@ -6332,14 +6325,706 @@
       <p:grpSpPr/>
       <p:sp>
         <p:nvSpPr>
-          <p:cNvPr id="2" name="Rectangle 1"/>
+          <p:cNvPr id="2" name="TextBox 1"/>
+          <p:cNvSpPr txBox="1"/>
+          <p:nvPr/>
+        </p:nvSpPr>
+        <p:spPr>
+          <a:xfrm>
+            <a:off x="822960" y="502920"/>
+            <a:ext cx="10545775" cy="731520"/>
+          </a:xfrm>
+          <a:prstGeom prst="rect">
+            <a:avLst/>
+          </a:prstGeom>
+          <a:noFill/>
+        </p:spPr>
+        <p:txBody>
+          <a:bodyPr wrap="square">
+            <a:spAutoFit/>
+          </a:bodyPr>
+          <a:lstStyle/>
+          <a:p>
+            <a:pPr algn="l"/>
+            <a:r>
+              <a:rPr sz="3000" b="1">
+                <a:solidFill>
+                  <a:srgbClr val="1E293B"/>
+                </a:solidFill>
+                <a:latin typeface="Calibri"/>
+              </a:rPr>
+              <a:t>Four stages · one coherent story</a:t>
+            </a:r>
+          </a:p>
+        </p:txBody>
+      </p:sp>
+      <p:sp>
+        <p:nvSpPr>
+          <p:cNvPr id="3" name="Rectangle 2"/>
           <p:cNvSpPr/>
           <p:nvPr/>
         </p:nvSpPr>
         <p:spPr>
           <a:xfrm>
-            <a:off x="0" y="0"/>
-            <a:ext cx="128016" cy="6858000"/>
+            <a:off x="822960" y="1234440"/>
+            <a:ext cx="1280160" cy="38100"/>
+          </a:xfrm>
+          <a:prstGeom prst="rect">
+            <a:avLst/>
+          </a:prstGeom>
+          <a:solidFill>
+            <a:srgbClr val="0D9488"/>
+          </a:solidFill>
+          <a:ln>
+            <a:noFill/>
+          </a:ln>
+        </p:spPr>
+        <p:style>
+          <a:lnRef idx="1">
+            <a:schemeClr val="accent1"/>
+          </a:lnRef>
+          <a:fillRef idx="3">
+            <a:schemeClr val="accent1"/>
+          </a:fillRef>
+          <a:effectRef idx="2">
+            <a:schemeClr val="accent1"/>
+          </a:effectRef>
+          <a:fontRef idx="minor">
+            <a:schemeClr val="lt1"/>
+          </a:fontRef>
+        </p:style>
+        <p:txBody>
+          <a:bodyPr rtlCol="0" anchor="ctr"/>
+          <a:lstStyle/>
+          <a:p>
+            <a:pPr algn="ctr"/>
+          </a:p>
+        </p:txBody>
+      </p:sp>
+      <p:sp>
+        <p:nvSpPr>
+          <p:cNvPr id="4" name="TextBox 3"/>
+          <p:cNvSpPr txBox="1"/>
+          <p:nvPr/>
+        </p:nvSpPr>
+        <p:spPr>
+          <a:xfrm>
+            <a:off x="822960" y="1417320"/>
+            <a:ext cx="10545775" cy="457200"/>
+          </a:xfrm>
+          <a:prstGeom prst="rect">
+            <a:avLst/>
+          </a:prstGeom>
+          <a:noFill/>
+        </p:spPr>
+        <p:txBody>
+          <a:bodyPr wrap="square">
+            <a:spAutoFit/>
+          </a:bodyPr>
+          <a:lstStyle/>
+          <a:p>
+            <a:pPr algn="l"/>
+            <a:r>
+              <a:rPr sz="1800" b="0">
+                <a:solidFill>
+                  <a:srgbClr val="475569"/>
+                </a:solidFill>
+                <a:latin typeface="Calibri"/>
+              </a:rPr>
+              <a:t>The main pipeline runs end-to-end; SegFormer runs alongside, independently.</a:t>
+            </a:r>
+          </a:p>
+        </p:txBody>
+      </p:sp>
+      <p:sp>
+        <p:nvSpPr>
+          <p:cNvPr id="5" name="Rounded Rectangle 4"/>
+          <p:cNvSpPr/>
+          <p:nvPr/>
+        </p:nvSpPr>
+        <p:spPr>
+          <a:xfrm>
+            <a:off x="641454" y="2240280"/>
+            <a:ext cx="1874519" cy="1371600"/>
+          </a:xfrm>
+          <a:prstGeom prst="roundRect">
+            <a:avLst/>
+          </a:prstGeom>
+          <a:solidFill>
+            <a:srgbClr val="FFFFFF"/>
+          </a:solidFill>
+          <a:ln w="12700">
+            <a:solidFill>
+              <a:srgbClr val="E2E8F0"/>
+            </a:solidFill>
+          </a:ln>
+        </p:spPr>
+        <p:style>
+          <a:lnRef idx="1">
+            <a:schemeClr val="accent1"/>
+          </a:lnRef>
+          <a:fillRef idx="3">
+            <a:schemeClr val="accent1"/>
+          </a:fillRef>
+          <a:effectRef idx="2">
+            <a:schemeClr val="accent1"/>
+          </a:effectRef>
+          <a:fontRef idx="minor">
+            <a:schemeClr val="lt1"/>
+          </a:fontRef>
+        </p:style>
+        <p:txBody>
+          <a:bodyPr rtlCol="0" anchor="ctr"/>
+          <a:lstStyle/>
+          <a:p>
+            <a:pPr algn="ctr"/>
+          </a:p>
+        </p:txBody>
+      </p:sp>
+      <p:sp>
+        <p:nvSpPr>
+          <p:cNvPr id="6" name="Rectangle 5"/>
+          <p:cNvSpPr/>
+          <p:nvPr/>
+        </p:nvSpPr>
+        <p:spPr>
+          <a:xfrm>
+            <a:off x="641454" y="2240280"/>
+            <a:ext cx="1874519" cy="50800"/>
+          </a:xfrm>
+          <a:prstGeom prst="rect">
+            <a:avLst/>
+          </a:prstGeom>
+          <a:solidFill>
+            <a:srgbClr val="94A3B8"/>
+          </a:solidFill>
+          <a:ln>
+            <a:noFill/>
+          </a:ln>
+        </p:spPr>
+        <p:style>
+          <a:lnRef idx="1">
+            <a:schemeClr val="accent1"/>
+          </a:lnRef>
+          <a:fillRef idx="3">
+            <a:schemeClr val="accent1"/>
+          </a:fillRef>
+          <a:effectRef idx="2">
+            <a:schemeClr val="accent1"/>
+          </a:effectRef>
+          <a:fontRef idx="minor">
+            <a:schemeClr val="lt1"/>
+          </a:fontRef>
+        </p:style>
+        <p:txBody>
+          <a:bodyPr rtlCol="0" anchor="ctr"/>
+          <a:lstStyle/>
+          <a:p>
+            <a:pPr algn="ctr"/>
+          </a:p>
+        </p:txBody>
+      </p:sp>
+      <p:sp>
+        <p:nvSpPr>
+          <p:cNvPr id="7" name="TextBox 6"/>
+          <p:cNvSpPr txBox="1"/>
+          <p:nvPr/>
+        </p:nvSpPr>
+        <p:spPr>
+          <a:xfrm>
+            <a:off x="641454" y="2331720"/>
+            <a:ext cx="1874519" cy="1280160"/>
+          </a:xfrm>
+          <a:prstGeom prst="rect">
+            <a:avLst/>
+          </a:prstGeom>
+          <a:noFill/>
+        </p:spPr>
+        <p:txBody>
+          <a:bodyPr wrap="square" anchor="ctr">
+            <a:spAutoFit/>
+          </a:bodyPr>
+          <a:lstStyle/>
+          <a:p>
+            <a:pPr algn="ctr"/>
+            <a:r>
+              <a:rPr sz="1300" b="1">
+                <a:solidFill>
+                  <a:srgbClr val="1E293B"/>
+                </a:solidFill>
+                <a:latin typeface="Calibri"/>
+              </a:rPr>
+              <a:t>Raw</a:t>
+            </a:r>
+          </a:p>
+          <a:p>
+            <a:pPr algn="ctr"/>
+            <a:r>
+              <a:rPr sz="1300" b="1">
+                <a:solidFill>
+                  <a:srgbClr val="1E293B"/>
+                </a:solidFill>
+                <a:latin typeface="Calibri"/>
+              </a:rPr>
+              <a:t>Video</a:t>
+            </a:r>
+          </a:p>
+        </p:txBody>
+      </p:sp>
+      <p:sp>
+        <p:nvSpPr>
+          <p:cNvPr id="8" name="Right Arrow 7"/>
+          <p:cNvSpPr/>
+          <p:nvPr/>
+        </p:nvSpPr>
+        <p:spPr>
+          <a:xfrm>
+            <a:off x="2570837" y="2807208"/>
+            <a:ext cx="274320" cy="237744"/>
+          </a:xfrm>
+          <a:prstGeom prst="rightArrow">
+            <a:avLst/>
+          </a:prstGeom>
+          <a:solidFill>
+            <a:srgbClr val="0D9488"/>
+          </a:solidFill>
+          <a:ln>
+            <a:noFill/>
+          </a:ln>
+        </p:spPr>
+        <p:style>
+          <a:lnRef idx="1">
+            <a:schemeClr val="accent1"/>
+          </a:lnRef>
+          <a:fillRef idx="3">
+            <a:schemeClr val="accent1"/>
+          </a:fillRef>
+          <a:effectRef idx="2">
+            <a:schemeClr val="accent1"/>
+          </a:effectRef>
+          <a:fontRef idx="minor">
+            <a:schemeClr val="lt1"/>
+          </a:fontRef>
+        </p:style>
+        <p:txBody>
+          <a:bodyPr rtlCol="0" anchor="ctr"/>
+          <a:lstStyle/>
+          <a:p>
+            <a:pPr algn="ctr"/>
+          </a:p>
+        </p:txBody>
+      </p:sp>
+      <p:sp>
+        <p:nvSpPr>
+          <p:cNvPr id="9" name="Rounded Rectangle 8"/>
+          <p:cNvSpPr/>
+          <p:nvPr/>
+        </p:nvSpPr>
+        <p:spPr>
+          <a:xfrm>
+            <a:off x="2900021" y="2240280"/>
+            <a:ext cx="1874519" cy="1371600"/>
+          </a:xfrm>
+          <a:prstGeom prst="roundRect">
+            <a:avLst/>
+          </a:prstGeom>
+          <a:solidFill>
+            <a:srgbClr val="FFFFFF"/>
+          </a:solidFill>
+          <a:ln w="12700">
+            <a:solidFill>
+              <a:srgbClr val="E2E8F0"/>
+            </a:solidFill>
+          </a:ln>
+        </p:spPr>
+        <p:style>
+          <a:lnRef idx="1">
+            <a:schemeClr val="accent1"/>
+          </a:lnRef>
+          <a:fillRef idx="3">
+            <a:schemeClr val="accent1"/>
+          </a:fillRef>
+          <a:effectRef idx="2">
+            <a:schemeClr val="accent1"/>
+          </a:effectRef>
+          <a:fontRef idx="minor">
+            <a:schemeClr val="lt1"/>
+          </a:fontRef>
+        </p:style>
+        <p:txBody>
+          <a:bodyPr rtlCol="0" anchor="ctr"/>
+          <a:lstStyle/>
+          <a:p>
+            <a:pPr algn="ctr"/>
+          </a:p>
+        </p:txBody>
+      </p:sp>
+      <p:sp>
+        <p:nvSpPr>
+          <p:cNvPr id="10" name="Rectangle 9"/>
+          <p:cNvSpPr/>
+          <p:nvPr/>
+        </p:nvSpPr>
+        <p:spPr>
+          <a:xfrm>
+            <a:off x="2900021" y="2240280"/>
+            <a:ext cx="1874519" cy="50800"/>
+          </a:xfrm>
+          <a:prstGeom prst="rect">
+            <a:avLst/>
+          </a:prstGeom>
+          <a:solidFill>
+            <a:srgbClr val="0D9488"/>
+          </a:solidFill>
+          <a:ln>
+            <a:noFill/>
+          </a:ln>
+        </p:spPr>
+        <p:style>
+          <a:lnRef idx="1">
+            <a:schemeClr val="accent1"/>
+          </a:lnRef>
+          <a:fillRef idx="3">
+            <a:schemeClr val="accent1"/>
+          </a:fillRef>
+          <a:effectRef idx="2">
+            <a:schemeClr val="accent1"/>
+          </a:effectRef>
+          <a:fontRef idx="minor">
+            <a:schemeClr val="lt1"/>
+          </a:fontRef>
+        </p:style>
+        <p:txBody>
+          <a:bodyPr rtlCol="0" anchor="ctr"/>
+          <a:lstStyle/>
+          <a:p>
+            <a:pPr algn="ctr"/>
+          </a:p>
+        </p:txBody>
+      </p:sp>
+      <p:sp>
+        <p:nvSpPr>
+          <p:cNvPr id="11" name="TextBox 10"/>
+          <p:cNvSpPr txBox="1"/>
+          <p:nvPr/>
+        </p:nvSpPr>
+        <p:spPr>
+          <a:xfrm>
+            <a:off x="2900021" y="2331720"/>
+            <a:ext cx="1874519" cy="1280160"/>
+          </a:xfrm>
+          <a:prstGeom prst="rect">
+            <a:avLst/>
+          </a:prstGeom>
+          <a:noFill/>
+        </p:spPr>
+        <p:txBody>
+          <a:bodyPr wrap="square" anchor="ctr">
+            <a:spAutoFit/>
+          </a:bodyPr>
+          <a:lstStyle/>
+          <a:p>
+            <a:pPr algn="ctr"/>
+            <a:r>
+              <a:rPr sz="1300" b="1">
+                <a:solidFill>
+                  <a:srgbClr val="1E293B"/>
+                </a:solidFill>
+                <a:latin typeface="Calibri"/>
+              </a:rPr>
+              <a:t>YOLO26s</a:t>
+            </a:r>
+          </a:p>
+          <a:p>
+            <a:pPr algn="ctr"/>
+            <a:r>
+              <a:rPr sz="1300" b="1">
+                <a:solidFill>
+                  <a:srgbClr val="1E293B"/>
+                </a:solidFill>
+                <a:latin typeface="Calibri"/>
+              </a:rPr>
+              <a:t>Detection</a:t>
+            </a:r>
+          </a:p>
+        </p:txBody>
+      </p:sp>
+      <p:sp>
+        <p:nvSpPr>
+          <p:cNvPr id="12" name="Right Arrow 11"/>
+          <p:cNvSpPr/>
+          <p:nvPr/>
+        </p:nvSpPr>
+        <p:spPr>
+          <a:xfrm>
+            <a:off x="4829404" y="2807208"/>
+            <a:ext cx="274320" cy="237744"/>
+          </a:xfrm>
+          <a:prstGeom prst="rightArrow">
+            <a:avLst/>
+          </a:prstGeom>
+          <a:solidFill>
+            <a:srgbClr val="0D9488"/>
+          </a:solidFill>
+          <a:ln>
+            <a:noFill/>
+          </a:ln>
+        </p:spPr>
+        <p:style>
+          <a:lnRef idx="1">
+            <a:schemeClr val="accent1"/>
+          </a:lnRef>
+          <a:fillRef idx="3">
+            <a:schemeClr val="accent1"/>
+          </a:fillRef>
+          <a:effectRef idx="2">
+            <a:schemeClr val="accent1"/>
+          </a:effectRef>
+          <a:fontRef idx="minor">
+            <a:schemeClr val="lt1"/>
+          </a:fontRef>
+        </p:style>
+        <p:txBody>
+          <a:bodyPr rtlCol="0" anchor="ctr"/>
+          <a:lstStyle/>
+          <a:p>
+            <a:pPr algn="ctr"/>
+          </a:p>
+        </p:txBody>
+      </p:sp>
+      <p:sp>
+        <p:nvSpPr>
+          <p:cNvPr id="13" name="Rounded Rectangle 12"/>
+          <p:cNvSpPr/>
+          <p:nvPr/>
+        </p:nvSpPr>
+        <p:spPr>
+          <a:xfrm>
+            <a:off x="5158588" y="2240280"/>
+            <a:ext cx="1874519" cy="1371600"/>
+          </a:xfrm>
+          <a:prstGeom prst="roundRect">
+            <a:avLst/>
+          </a:prstGeom>
+          <a:solidFill>
+            <a:srgbClr val="FFFFFF"/>
+          </a:solidFill>
+          <a:ln w="12700">
+            <a:solidFill>
+              <a:srgbClr val="E2E8F0"/>
+            </a:solidFill>
+          </a:ln>
+        </p:spPr>
+        <p:style>
+          <a:lnRef idx="1">
+            <a:schemeClr val="accent1"/>
+          </a:lnRef>
+          <a:fillRef idx="3">
+            <a:schemeClr val="accent1"/>
+          </a:fillRef>
+          <a:effectRef idx="2">
+            <a:schemeClr val="accent1"/>
+          </a:effectRef>
+          <a:fontRef idx="minor">
+            <a:schemeClr val="lt1"/>
+          </a:fontRef>
+        </p:style>
+        <p:txBody>
+          <a:bodyPr rtlCol="0" anchor="ctr"/>
+          <a:lstStyle/>
+          <a:p>
+            <a:pPr algn="ctr"/>
+          </a:p>
+        </p:txBody>
+      </p:sp>
+      <p:sp>
+        <p:nvSpPr>
+          <p:cNvPr id="14" name="Rectangle 13"/>
+          <p:cNvSpPr/>
+          <p:nvPr/>
+        </p:nvSpPr>
+        <p:spPr>
+          <a:xfrm>
+            <a:off x="5158588" y="2240280"/>
+            <a:ext cx="1874519" cy="50800"/>
+          </a:xfrm>
+          <a:prstGeom prst="rect">
+            <a:avLst/>
+          </a:prstGeom>
+          <a:solidFill>
+            <a:srgbClr val="D97706"/>
+          </a:solidFill>
+          <a:ln>
+            <a:noFill/>
+          </a:ln>
+        </p:spPr>
+        <p:style>
+          <a:lnRef idx="1">
+            <a:schemeClr val="accent1"/>
+          </a:lnRef>
+          <a:fillRef idx="3">
+            <a:schemeClr val="accent1"/>
+          </a:fillRef>
+          <a:effectRef idx="2">
+            <a:schemeClr val="accent1"/>
+          </a:effectRef>
+          <a:fontRef idx="minor">
+            <a:schemeClr val="lt1"/>
+          </a:fontRef>
+        </p:style>
+        <p:txBody>
+          <a:bodyPr rtlCol="0" anchor="ctr"/>
+          <a:lstStyle/>
+          <a:p>
+            <a:pPr algn="ctr"/>
+          </a:p>
+        </p:txBody>
+      </p:sp>
+      <p:sp>
+        <p:nvSpPr>
+          <p:cNvPr id="15" name="TextBox 14"/>
+          <p:cNvSpPr txBox="1"/>
+          <p:nvPr/>
+        </p:nvSpPr>
+        <p:spPr>
+          <a:xfrm>
+            <a:off x="5158588" y="2331720"/>
+            <a:ext cx="1874519" cy="1280160"/>
+          </a:xfrm>
+          <a:prstGeom prst="rect">
+            <a:avLst/>
+          </a:prstGeom>
+          <a:noFill/>
+        </p:spPr>
+        <p:txBody>
+          <a:bodyPr wrap="square" anchor="ctr">
+            <a:spAutoFit/>
+          </a:bodyPr>
+          <a:lstStyle/>
+          <a:p>
+            <a:pPr algn="ctr"/>
+            <a:r>
+              <a:rPr sz="1300" b="1">
+                <a:solidFill>
+                  <a:srgbClr val="1E293B"/>
+                </a:solidFill>
+                <a:latin typeface="Calibri"/>
+              </a:rPr>
+              <a:t>CLIP Brand</a:t>
+            </a:r>
+          </a:p>
+          <a:p>
+            <a:pPr algn="ctr"/>
+            <a:r>
+              <a:rPr sz="1300" b="1">
+                <a:solidFill>
+                  <a:srgbClr val="1E293B"/>
+                </a:solidFill>
+                <a:latin typeface="Calibri"/>
+              </a:rPr>
+              <a:t>Probe</a:t>
+            </a:r>
+          </a:p>
+        </p:txBody>
+      </p:sp>
+      <p:sp>
+        <p:nvSpPr>
+          <p:cNvPr id="16" name="Right Arrow 15"/>
+          <p:cNvSpPr/>
+          <p:nvPr/>
+        </p:nvSpPr>
+        <p:spPr>
+          <a:xfrm>
+            <a:off x="7087971" y="2807208"/>
+            <a:ext cx="274320" cy="237744"/>
+          </a:xfrm>
+          <a:prstGeom prst="rightArrow">
+            <a:avLst/>
+          </a:prstGeom>
+          <a:solidFill>
+            <a:srgbClr val="0D9488"/>
+          </a:solidFill>
+          <a:ln>
+            <a:noFill/>
+          </a:ln>
+        </p:spPr>
+        <p:style>
+          <a:lnRef idx="1">
+            <a:schemeClr val="accent1"/>
+          </a:lnRef>
+          <a:fillRef idx="3">
+            <a:schemeClr val="accent1"/>
+          </a:fillRef>
+          <a:effectRef idx="2">
+            <a:schemeClr val="accent1"/>
+          </a:effectRef>
+          <a:fontRef idx="minor">
+            <a:schemeClr val="lt1"/>
+          </a:fontRef>
+        </p:style>
+        <p:txBody>
+          <a:bodyPr rtlCol="0" anchor="ctr"/>
+          <a:lstStyle/>
+          <a:p>
+            <a:pPr algn="ctr"/>
+          </a:p>
+        </p:txBody>
+      </p:sp>
+      <p:sp>
+        <p:nvSpPr>
+          <p:cNvPr id="17" name="Rounded Rectangle 16"/>
+          <p:cNvSpPr/>
+          <p:nvPr/>
+        </p:nvSpPr>
+        <p:spPr>
+          <a:xfrm>
+            <a:off x="7417155" y="2240280"/>
+            <a:ext cx="1874519" cy="1371600"/>
+          </a:xfrm>
+          <a:prstGeom prst="roundRect">
+            <a:avLst/>
+          </a:prstGeom>
+          <a:solidFill>
+            <a:srgbClr val="FFFFFF"/>
+          </a:solidFill>
+          <a:ln w="12700">
+            <a:solidFill>
+              <a:srgbClr val="E2E8F0"/>
+            </a:solidFill>
+          </a:ln>
+        </p:spPr>
+        <p:style>
+          <a:lnRef idx="1">
+            <a:schemeClr val="accent1"/>
+          </a:lnRef>
+          <a:fillRef idx="3">
+            <a:schemeClr val="accent1"/>
+          </a:fillRef>
+          <a:effectRef idx="2">
+            <a:schemeClr val="accent1"/>
+          </a:effectRef>
+          <a:fontRef idx="minor">
+            <a:schemeClr val="lt1"/>
+          </a:fontRef>
+        </p:style>
+        <p:txBody>
+          <a:bodyPr rtlCol="0" anchor="ctr"/>
+          <a:lstStyle/>
+          <a:p>
+            <a:pPr algn="ctr"/>
+          </a:p>
+        </p:txBody>
+      </p:sp>
+      <p:sp>
+        <p:nvSpPr>
+          <p:cNvPr id="18" name="Rectangle 17"/>
+          <p:cNvSpPr/>
+          <p:nvPr/>
+        </p:nvSpPr>
+        <p:spPr>
+          <a:xfrm>
+            <a:off x="7417155" y="2240280"/>
+            <a:ext cx="1874519" cy="50800"/>
           </a:xfrm>
           <a:prstGeom prst="rect">
             <a:avLst/>
@@ -6375,14 +7060,14 @@
       </p:sp>
       <p:sp>
         <p:nvSpPr>
-          <p:cNvPr id="3" name="TextBox 2"/>
+          <p:cNvPr id="19" name="TextBox 18"/>
           <p:cNvSpPr txBox="1"/>
           <p:nvPr/>
         </p:nvSpPr>
         <p:spPr>
           <a:xfrm>
-            <a:off x="822960" y="502920"/>
-            <a:ext cx="10545775" cy="731520"/>
+            <a:off x="7417155" y="2331720"/>
+            <a:ext cx="1874519" cy="1280160"/>
           </a:xfrm>
           <a:prstGeom prst="rect">
             <a:avLst/>
@@ -6390,40 +7075,52 @@
           <a:noFill/>
         </p:spPr>
         <p:txBody>
-          <a:bodyPr wrap="square">
+          <a:bodyPr wrap="square" anchor="ctr">
             <a:spAutoFit/>
           </a:bodyPr>
           <a:lstStyle/>
           <a:p>
-            <a:pPr algn="l"/>
-            <a:r>
-              <a:rPr sz="3000" b="1">
+            <a:pPr algn="ctr"/>
+            <a:r>
+              <a:rPr sz="1300" b="1">
                 <a:solidFill>
                   <a:srgbClr val="1E293B"/>
                 </a:solidFill>
                 <a:latin typeface="Calibri"/>
               </a:rPr>
-              <a:t>Frame-based Q&amp;A — ask what you see</a:t>
-            </a:r>
-          </a:p>
-        </p:txBody>
-      </p:sp>
-      <p:sp>
-        <p:nvSpPr>
-          <p:cNvPr id="4" name="Rectangle 3"/>
+              <a:t>VLM Caption</a:t>
+            </a:r>
+          </a:p>
+          <a:p>
+            <a:pPr algn="ctr"/>
+            <a:r>
+              <a:rPr sz="1300" b="1">
+                <a:solidFill>
+                  <a:srgbClr val="1E293B"/>
+                </a:solidFill>
+                <a:latin typeface="Calibri"/>
+              </a:rPr>
+              <a:t>&amp; Q&amp;A</a:t>
+            </a:r>
+          </a:p>
+        </p:txBody>
+      </p:sp>
+      <p:sp>
+        <p:nvSpPr>
+          <p:cNvPr id="20" name="Right Arrow 19"/>
           <p:cNvSpPr/>
           <p:nvPr/>
         </p:nvSpPr>
         <p:spPr>
           <a:xfrm>
-            <a:off x="822960" y="1234440"/>
-            <a:ext cx="1280160" cy="38100"/>
-          </a:xfrm>
-          <a:prstGeom prst="rect">
+            <a:off x="9346538" y="2807208"/>
+            <a:ext cx="274320" cy="237744"/>
+          </a:xfrm>
+          <a:prstGeom prst="rightArrow">
             <a:avLst/>
           </a:prstGeom>
           <a:solidFill>
-            <a:srgbClr val="6366F1"/>
+            <a:srgbClr val="0D9488"/>
           </a:solidFill>
           <a:ln>
             <a:noFill/>
@@ -6453,20 +7150,20 @@
       </p:sp>
       <p:sp>
         <p:nvSpPr>
-          <p:cNvPr id="5" name="Rounded Rectangle 4"/>
+          <p:cNvPr id="21" name="Rounded Rectangle 20"/>
           <p:cNvSpPr/>
           <p:nvPr/>
         </p:nvSpPr>
         <p:spPr>
           <a:xfrm>
-            <a:off x="1463040" y="1737360"/>
-            <a:ext cx="9235440" cy="3840480"/>
+            <a:off x="9675722" y="2240280"/>
+            <a:ext cx="1874519" cy="1371600"/>
           </a:xfrm>
           <a:prstGeom prst="roundRect">
             <a:avLst/>
           </a:prstGeom>
           <a:solidFill>
-            <a:srgbClr val="EEF2F6"/>
+            <a:srgbClr val="FFFFFF"/>
           </a:solidFill>
           <a:ln w="12700">
             <a:solidFill>
@@ -6498,25 +7195,23 @@
       </p:sp>
       <p:sp>
         <p:nvSpPr>
-          <p:cNvPr id="6" name="Oval 5"/>
+          <p:cNvPr id="22" name="Rectangle 21"/>
           <p:cNvSpPr/>
           <p:nvPr/>
         </p:nvSpPr>
         <p:spPr>
           <a:xfrm>
-            <a:off x="5669280" y="3017520"/>
-            <a:ext cx="822960" cy="822960"/>
-          </a:xfrm>
-          <a:prstGeom prst="ellipse">
+            <a:off x="9675722" y="2240280"/>
+            <a:ext cx="1874519" cy="50800"/>
+          </a:xfrm>
+          <a:prstGeom prst="rect">
             <a:avLst/>
           </a:prstGeom>
           <a:solidFill>
-            <a:srgbClr val="FFFFFF"/>
+            <a:srgbClr val="1E293B"/>
           </a:solidFill>
-          <a:ln w="19050">
-            <a:solidFill>
-              <a:srgbClr val="E2E8F0"/>
-            </a:solidFill>
+          <a:ln>
+            <a:noFill/>
           </a:ln>
         </p:spPr>
         <p:style>
@@ -6543,16 +7238,108 @@
       </p:sp>
       <p:sp>
         <p:nvSpPr>
-          <p:cNvPr id="7" name="Isosceles Triangle 6"/>
+          <p:cNvPr id="23" name="TextBox 22"/>
+          <p:cNvSpPr txBox="1"/>
+          <p:nvPr/>
+        </p:nvSpPr>
+        <p:spPr>
+          <a:xfrm>
+            <a:off x="9675722" y="2331720"/>
+            <a:ext cx="1874519" cy="1280160"/>
+          </a:xfrm>
+          <a:prstGeom prst="rect">
+            <a:avLst/>
+          </a:prstGeom>
+          <a:noFill/>
+        </p:spPr>
+        <p:txBody>
+          <a:bodyPr wrap="square" anchor="ctr">
+            <a:spAutoFit/>
+          </a:bodyPr>
+          <a:lstStyle/>
+          <a:p>
+            <a:pPr algn="ctr"/>
+            <a:r>
+              <a:rPr sz="1300" b="1">
+                <a:solidFill>
+                  <a:srgbClr val="1E293B"/>
+                </a:solidFill>
+                <a:latin typeface="Calibri"/>
+              </a:rPr>
+              <a:t>Structured</a:t>
+            </a:r>
+          </a:p>
+          <a:p>
+            <a:pPr algn="ctr"/>
+            <a:r>
+              <a:rPr sz="1300" b="1">
+                <a:solidFill>
+                  <a:srgbClr val="1E293B"/>
+                </a:solidFill>
+                <a:latin typeface="Calibri"/>
+              </a:rPr>
+              <a:t>Understanding</a:t>
+            </a:r>
+          </a:p>
+        </p:txBody>
+      </p:sp>
+      <p:sp>
+        <p:nvSpPr>
+          <p:cNvPr id="24" name="Rounded Rectangle 23"/>
           <p:cNvSpPr/>
           <p:nvPr/>
         </p:nvSpPr>
         <p:spPr>
-          <a:xfrm rot="5400000">
-            <a:off x="5961888" y="3264408"/>
-            <a:ext cx="292608" cy="329184"/>
-          </a:xfrm>
-          <a:prstGeom prst="triangle">
+          <a:xfrm>
+            <a:off x="641454" y="4343400"/>
+            <a:ext cx="1874519" cy="1371600"/>
+          </a:xfrm>
+          <a:prstGeom prst="roundRect">
+            <a:avLst/>
+          </a:prstGeom>
+          <a:solidFill>
+            <a:srgbClr val="FFFFFF"/>
+          </a:solidFill>
+          <a:ln w="12700">
+            <a:solidFill>
+              <a:srgbClr val="E2E8F0"/>
+            </a:solidFill>
+          </a:ln>
+        </p:spPr>
+        <p:style>
+          <a:lnRef idx="1">
+            <a:schemeClr val="accent1"/>
+          </a:lnRef>
+          <a:fillRef idx="3">
+            <a:schemeClr val="accent1"/>
+          </a:fillRef>
+          <a:effectRef idx="2">
+            <a:schemeClr val="accent1"/>
+          </a:effectRef>
+          <a:fontRef idx="minor">
+            <a:schemeClr val="lt1"/>
+          </a:fontRef>
+        </p:style>
+        <p:txBody>
+          <a:bodyPr rtlCol="0" anchor="ctr"/>
+          <a:lstStyle/>
+          <a:p>
+            <a:pPr algn="ctr"/>
+          </a:p>
+        </p:txBody>
+      </p:sp>
+      <p:sp>
+        <p:nvSpPr>
+          <p:cNvPr id="25" name="Rectangle 24"/>
+          <p:cNvSpPr/>
+          <p:nvPr/>
+        </p:nvSpPr>
+        <p:spPr>
+          <a:xfrm>
+            <a:off x="641454" y="4343400"/>
+            <a:ext cx="1874519" cy="50800"/>
+          </a:xfrm>
+          <a:prstGeom prst="rect">
             <a:avLst/>
           </a:prstGeom>
           <a:solidFill>
@@ -6586,14 +7373,151 @@
       </p:sp>
       <p:sp>
         <p:nvSpPr>
-          <p:cNvPr id="8" name="TextBox 7"/>
+          <p:cNvPr id="26" name="TextBox 25"/>
           <p:cNvSpPr txBox="1"/>
           <p:nvPr/>
         </p:nvSpPr>
         <p:spPr>
           <a:xfrm>
-            <a:off x="1463040" y="3931920"/>
-            <a:ext cx="9235440" cy="731520"/>
+            <a:off x="641454" y="4434840"/>
+            <a:ext cx="1874519" cy="1280160"/>
+          </a:xfrm>
+          <a:prstGeom prst="rect">
+            <a:avLst/>
+          </a:prstGeom>
+          <a:noFill/>
+        </p:spPr>
+        <p:txBody>
+          <a:bodyPr wrap="square" anchor="ctr">
+            <a:spAutoFit/>
+          </a:bodyPr>
+          <a:lstStyle/>
+          <a:p>
+            <a:pPr algn="ctr"/>
+            <a:r>
+              <a:rPr sz="1300" b="1">
+                <a:solidFill>
+                  <a:srgbClr val="1E293B"/>
+                </a:solidFill>
+                <a:latin typeface="Calibri"/>
+              </a:rPr>
+              <a:t>SegFormer</a:t>
+            </a:r>
+          </a:p>
+          <a:p>
+            <a:pPr algn="ctr"/>
+            <a:r>
+              <a:rPr sz="1300" b="1">
+                <a:solidFill>
+                  <a:srgbClr val="1E293B"/>
+                </a:solidFill>
+                <a:latin typeface="Calibri"/>
+              </a:rPr>
+              <a:t>Segmentation</a:t>
+            </a:r>
+          </a:p>
+        </p:txBody>
+      </p:sp>
+      <p:sp>
+        <p:nvSpPr>
+          <p:cNvPr id="27" name="Rectangle 26"/>
+          <p:cNvSpPr/>
+          <p:nvPr/>
+        </p:nvSpPr>
+        <p:spPr>
+          <a:xfrm>
+            <a:off x="1569569" y="3611880"/>
+            <a:ext cx="22860" cy="731520"/>
+          </a:xfrm>
+          <a:prstGeom prst="rect">
+            <a:avLst/>
+          </a:prstGeom>
+          <a:solidFill>
+            <a:srgbClr val="E2E8F0"/>
+          </a:solidFill>
+          <a:ln>
+            <a:noFill/>
+          </a:ln>
+        </p:spPr>
+        <p:style>
+          <a:lnRef idx="1">
+            <a:schemeClr val="accent1"/>
+          </a:lnRef>
+          <a:fillRef idx="3">
+            <a:schemeClr val="accent1"/>
+          </a:fillRef>
+          <a:effectRef idx="2">
+            <a:schemeClr val="accent1"/>
+          </a:effectRef>
+          <a:fontRef idx="minor">
+            <a:schemeClr val="lt1"/>
+          </a:fontRef>
+        </p:style>
+        <p:txBody>
+          <a:bodyPr rtlCol="0" anchor="ctr"/>
+          <a:lstStyle/>
+          <a:p>
+            <a:pPr algn="ctr"/>
+          </a:p>
+        </p:txBody>
+      </p:sp>
+      <p:sp>
+        <p:nvSpPr>
+          <p:cNvPr id="28" name="TextBox 27"/>
+          <p:cNvSpPr txBox="1"/>
+          <p:nvPr/>
+        </p:nvSpPr>
+        <p:spPr>
+          <a:xfrm>
+            <a:off x="2881733" y="4572000"/>
+            <a:ext cx="5943600" cy="914400"/>
+          </a:xfrm>
+          <a:prstGeom prst="rect">
+            <a:avLst/>
+          </a:prstGeom>
+          <a:noFill/>
+        </p:spPr>
+        <p:txBody>
+          <a:bodyPr wrap="square" anchor="ctr">
+            <a:spAutoFit/>
+          </a:bodyPr>
+          <a:lstStyle/>
+          <a:p>
+            <a:pPr algn="l"/>
+            <a:r>
+              <a:rPr sz="1600" b="0">
+                <a:solidFill>
+                  <a:srgbClr val="475569"/>
+                </a:solidFill>
+                <a:latin typeface="Calibri"/>
+              </a:rPr>
+              <a:t>Standalone quality demo — shares the input video,</a:t>
+            </a:r>
+          </a:p>
+          <a:p>
+            <a:pPr algn="l"/>
+            <a:r>
+              <a:rPr sz="1600" b="0">
+                <a:solidFill>
+                  <a:srgbClr val="475569"/>
+                </a:solidFill>
+                <a:latin typeface="Calibri"/>
+              </a:rPr>
+              <a:t>but feeds no downstream stage.</a:t>
+            </a:r>
+          </a:p>
+        </p:txBody>
+      </p:sp>
+      <p:sp>
+        <p:nvSpPr>
+          <p:cNvPr id="29" name="TextBox 28"/>
+          <p:cNvSpPr txBox="1"/>
+          <p:nvPr/>
+        </p:nvSpPr>
+        <p:spPr>
+          <a:xfrm>
+            <a:off x="822960" y="6080760"/>
+            <a:ext cx="10545775" cy="457200"/>
           </a:xfrm>
           <a:prstGeom prst="rect">
             <a:avLst/>
@@ -6606,50 +7530,15 @@
           </a:bodyPr>
           <a:lstStyle/>
           <a:p>
-            <a:pPr algn="ctr"/>
+            <a:pPr algn="l"/>
             <a:r>
               <a:rPr sz="1300" b="0">
                 <a:solidFill>
-                  <a:srgbClr val="475569"/>
+                  <a:srgbClr val="94A3B8"/>
                 </a:solidFill>
                 <a:latin typeface="Calibri"/>
               </a:rPr>
-              <a:t>VLM Q&amp;A interface — user typing a question, answer appearing (5-sec clip)</a:t>
-            </a:r>
-          </a:p>
-        </p:txBody>
-      </p:sp>
-      <p:sp>
-        <p:nvSpPr>
-          <p:cNvPr id="9" name="TextBox 8"/>
-          <p:cNvSpPr txBox="1"/>
-          <p:nvPr/>
-        </p:nvSpPr>
-        <p:spPr>
-          <a:xfrm>
-            <a:off x="822960" y="5989320"/>
-            <a:ext cx="10545775" cy="457200"/>
-          </a:xfrm>
-          <a:prstGeom prst="rect">
-            <a:avLst/>
-          </a:prstGeom>
-          <a:noFill/>
-        </p:spPr>
-        <p:txBody>
-          <a:bodyPr wrap="square">
-            <a:spAutoFit/>
-          </a:bodyPr>
-          <a:lstStyle/>
-          <a:p>
-            <a:pPr algn="l"/>
-            <a:r>
-              <a:rPr sz="1300" b="0">
-                <a:solidFill>
-                  <a:srgbClr val="94A3B8"/>
-                </a:solidFill>
-                <a:latin typeface="Calibri"/>
-              </a:rPr>
-              <a:t>Useful for accident reconstruction, driver training, or live demo interaction.</a:t>
+              <a:t>Speed: YOLO is fast · CLIP is moderate (one crop at a time) · SegFormer &amp; VLM are slow, selective, or offline-only.</a:t>
             </a:r>
           </a:p>
         </p:txBody>
@@ -6710,7 +7599,7 @@
                 </a:solidFill>
                 <a:latin typeface="Calibri"/>
               </a:rPr>
-              <a:t>Four stages · one coherent story</a:t>
+              <a:t>Results &amp; Key Metrics</a:t>
             </a:r>
           </a:p>
         </p:txBody>
@@ -6760,49 +7649,14 @@
       </p:sp>
       <p:sp>
         <p:nvSpPr>
-          <p:cNvPr id="4" name="TextBox 3"/>
-          <p:cNvSpPr txBox="1"/>
-          <p:nvPr/>
-        </p:nvSpPr>
-        <p:spPr>
-          <a:xfrm>
-            <a:off x="822960" y="1417320"/>
-            <a:ext cx="10545775" cy="457200"/>
-          </a:xfrm>
-          <a:prstGeom prst="rect">
-            <a:avLst/>
-          </a:prstGeom>
-          <a:noFill/>
-        </p:spPr>
-        <p:txBody>
-          <a:bodyPr wrap="square">
-            <a:spAutoFit/>
-          </a:bodyPr>
-          <a:lstStyle/>
-          <a:p>
-            <a:pPr algn="l"/>
-            <a:r>
-              <a:rPr sz="1800" b="0">
-                <a:solidFill>
-                  <a:srgbClr val="475569"/>
-                </a:solidFill>
-                <a:latin typeface="Calibri"/>
-              </a:rPr>
-              <a:t>The main pipeline runs end-to-end; SegFormer runs alongside, independently.</a:t>
-            </a:r>
-          </a:p>
-        </p:txBody>
-      </p:sp>
-      <p:sp>
-        <p:nvSpPr>
-          <p:cNvPr id="5" name="Rounded Rectangle 4"/>
+          <p:cNvPr id="4" name="Rounded Rectangle 3"/>
           <p:cNvSpPr/>
           <p:nvPr/>
         </p:nvSpPr>
         <p:spPr>
           <a:xfrm>
-            <a:off x="641454" y="2240280"/>
-            <a:ext cx="1874519" cy="1371600"/>
+            <a:off x="719175" y="2011680"/>
+            <a:ext cx="2468880" cy="2103120"/>
           </a:xfrm>
           <a:prstGeom prst="roundRect">
             <a:avLst/>
@@ -6840,106 +7694,16 @@
       </p:sp>
       <p:sp>
         <p:nvSpPr>
-          <p:cNvPr id="6" name="Rectangle 5"/>
+          <p:cNvPr id="5" name="Rectangle 4"/>
           <p:cNvSpPr/>
           <p:nvPr/>
         </p:nvSpPr>
         <p:spPr>
           <a:xfrm>
-            <a:off x="641454" y="2240280"/>
-            <a:ext cx="1874519" cy="50800"/>
-          </a:xfrm>
-          <a:prstGeom prst="rect">
-            <a:avLst/>
-          </a:prstGeom>
-          <a:solidFill>
-            <a:srgbClr val="94A3B8"/>
-          </a:solidFill>
-          <a:ln>
-            <a:noFill/>
-          </a:ln>
-        </p:spPr>
-        <p:style>
-          <a:lnRef idx="1">
-            <a:schemeClr val="accent1"/>
-          </a:lnRef>
-          <a:fillRef idx="3">
-            <a:schemeClr val="accent1"/>
-          </a:fillRef>
-          <a:effectRef idx="2">
-            <a:schemeClr val="accent1"/>
-          </a:effectRef>
-          <a:fontRef idx="minor">
-            <a:schemeClr val="lt1"/>
-          </a:fontRef>
-        </p:style>
-        <p:txBody>
-          <a:bodyPr rtlCol="0" anchor="ctr"/>
-          <a:lstStyle/>
-          <a:p>
-            <a:pPr algn="ctr"/>
-          </a:p>
-        </p:txBody>
-      </p:sp>
-      <p:sp>
-        <p:nvSpPr>
-          <p:cNvPr id="7" name="TextBox 6"/>
-          <p:cNvSpPr txBox="1"/>
-          <p:nvPr/>
-        </p:nvSpPr>
-        <p:spPr>
-          <a:xfrm>
-            <a:off x="641454" y="2331720"/>
-            <a:ext cx="1874519" cy="1280160"/>
-          </a:xfrm>
-          <a:prstGeom prst="rect">
-            <a:avLst/>
-          </a:prstGeom>
-          <a:noFill/>
-        </p:spPr>
-        <p:txBody>
-          <a:bodyPr wrap="square" anchor="ctr">
-            <a:spAutoFit/>
-          </a:bodyPr>
-          <a:lstStyle/>
-          <a:p>
-            <a:pPr algn="ctr"/>
-            <a:r>
-              <a:rPr sz="1300" b="1">
-                <a:solidFill>
-                  <a:srgbClr val="1E293B"/>
-                </a:solidFill>
-                <a:latin typeface="Calibri"/>
-              </a:rPr>
-              <a:t>Raw</a:t>
-            </a:r>
-          </a:p>
-          <a:p>
-            <a:pPr algn="ctr"/>
-            <a:r>
-              <a:rPr sz="1300" b="1">
-                <a:solidFill>
-                  <a:srgbClr val="1E293B"/>
-                </a:solidFill>
-                <a:latin typeface="Calibri"/>
-              </a:rPr>
-              <a:t>Video</a:t>
-            </a:r>
-          </a:p>
-        </p:txBody>
-      </p:sp>
-      <p:sp>
-        <p:nvSpPr>
-          <p:cNvPr id="8" name="Right Arrow 7"/>
-          <p:cNvSpPr/>
-          <p:nvPr/>
-        </p:nvSpPr>
-        <p:spPr>
-          <a:xfrm>
-            <a:off x="2570837" y="2807208"/>
-            <a:ext cx="274320" cy="237744"/>
-          </a:xfrm>
-          <a:prstGeom prst="rightArrow">
+            <a:off x="719175" y="2011680"/>
+            <a:ext cx="2468880" cy="63500"/>
+          </a:xfrm>
+          <a:prstGeom prst="rect">
             <a:avLst/>
           </a:prstGeom>
           <a:solidFill>
@@ -6973,14 +7737,120 @@
       </p:sp>
       <p:sp>
         <p:nvSpPr>
-          <p:cNvPr id="9" name="Rounded Rectangle 8"/>
+          <p:cNvPr id="6" name="TextBox 5"/>
+          <p:cNvSpPr txBox="1"/>
+          <p:nvPr/>
+        </p:nvSpPr>
+        <p:spPr>
+          <a:xfrm>
+            <a:off x="719175" y="2240280"/>
+            <a:ext cx="2468880" cy="457200"/>
+          </a:xfrm>
+          <a:prstGeom prst="rect">
+            <a:avLst/>
+          </a:prstGeom>
+          <a:noFill/>
+        </p:spPr>
+        <p:txBody>
+          <a:bodyPr wrap="square">
+            <a:spAutoFit/>
+          </a:bodyPr>
+          <a:lstStyle/>
+          <a:p>
+            <a:pPr algn="ctr"/>
+            <a:r>
+              <a:rPr sz="1800" b="1">
+                <a:solidFill>
+                  <a:srgbClr val="0D9488"/>
+                </a:solidFill>
+                <a:latin typeface="Calibri"/>
+              </a:rPr>
+              <a:t>Detection</a:t>
+            </a:r>
+          </a:p>
+        </p:txBody>
+      </p:sp>
+      <p:sp>
+        <p:nvSpPr>
+          <p:cNvPr id="7" name="TextBox 6"/>
+          <p:cNvSpPr txBox="1"/>
+          <p:nvPr/>
+        </p:nvSpPr>
+        <p:spPr>
+          <a:xfrm>
+            <a:off x="856335" y="2788920"/>
+            <a:ext cx="2194560" cy="1097280"/>
+          </a:xfrm>
+          <a:prstGeom prst="rect">
+            <a:avLst/>
+          </a:prstGeom>
+          <a:noFill/>
+        </p:spPr>
+        <p:txBody>
+          <a:bodyPr wrap="square">
+            <a:spAutoFit/>
+          </a:bodyPr>
+          <a:lstStyle/>
+          <a:p>
+            <a:pPr algn="ctr"/>
+            <a:r>
+              <a:rPr sz="1300" b="0">
+                <a:solidFill>
+                  <a:srgbClr val="475569"/>
+                </a:solidFill>
+                <a:latin typeface="Calibri"/>
+              </a:rPr>
+              <a:t>P = 0.874</a:t>
+            </a:r>
+          </a:p>
+          <a:p>
+            <a:pPr algn="ctr"/>
+            <a:r>
+              <a:rPr sz="1300" b="0">
+                <a:solidFill>
+                  <a:srgbClr val="475569"/>
+                </a:solidFill>
+                <a:latin typeface="Calibri"/>
+              </a:rPr>
+              <a:t>R = 0.754</a:t>
+            </a:r>
+          </a:p>
+          <a:p>
+            <a:pPr algn="ctr"/>
+            <a:r>
+              <a:rPr sz="1300" b="0">
+                <a:solidFill>
+                  <a:srgbClr val="475569"/>
+                </a:solidFill>
+                <a:latin typeface="Calibri"/>
+              </a:rPr>
+              <a:t>mAP@0.5 = 0.842</a:t>
+            </a:r>
+          </a:p>
+          <a:p>
+            <a:pPr algn="ctr"/>
+            <a:r>
+              <a:rPr sz="1300" b="0">
+                <a:solidFill>
+                  <a:srgbClr val="475569"/>
+                </a:solidFill>
+                <a:latin typeface="Calibri"/>
+              </a:rPr>
+              <a:t>mAP@0.5:0.95 = 0.515</a:t>
+            </a:r>
+          </a:p>
+        </p:txBody>
+      </p:sp>
+      <p:sp>
+        <p:nvSpPr>
+          <p:cNvPr id="8" name="Rounded Rectangle 7"/>
           <p:cNvSpPr/>
           <p:nvPr/>
         </p:nvSpPr>
         <p:spPr>
           <a:xfrm>
-            <a:off x="2900021" y="2240280"/>
-            <a:ext cx="1874519" cy="1371600"/>
+            <a:off x="3480663" y="2011680"/>
+            <a:ext cx="2468880" cy="2103120"/>
           </a:xfrm>
           <a:prstGeom prst="roundRect">
             <a:avLst/>
@@ -7018,20 +7888,20 @@
       </p:sp>
       <p:sp>
         <p:nvSpPr>
-          <p:cNvPr id="10" name="Rectangle 9"/>
+          <p:cNvPr id="9" name="Rectangle 8"/>
           <p:cNvSpPr/>
           <p:nvPr/>
         </p:nvSpPr>
         <p:spPr>
           <a:xfrm>
-            <a:off x="2900021" y="2240280"/>
-            <a:ext cx="1874519" cy="50800"/>
+            <a:off x="3480663" y="2011680"/>
+            <a:ext cx="2468880" cy="63500"/>
           </a:xfrm>
           <a:prstGeom prst="rect">
             <a:avLst/>
           </a:prstGeom>
           <a:solidFill>
-            <a:srgbClr val="0D9488"/>
+            <a:srgbClr val="D97706"/>
           </a:solidFill>
           <a:ln>
             <a:noFill/>
@@ -7061,14 +7931,49 @@
       </p:sp>
       <p:sp>
         <p:nvSpPr>
+          <p:cNvPr id="10" name="TextBox 9"/>
+          <p:cNvSpPr txBox="1"/>
+          <p:nvPr/>
+        </p:nvSpPr>
+        <p:spPr>
+          <a:xfrm>
+            <a:off x="3480663" y="2240280"/>
+            <a:ext cx="2468880" cy="457200"/>
+          </a:xfrm>
+          <a:prstGeom prst="rect">
+            <a:avLst/>
+          </a:prstGeom>
+          <a:noFill/>
+        </p:spPr>
+        <p:txBody>
+          <a:bodyPr wrap="square">
+            <a:spAutoFit/>
+          </a:bodyPr>
+          <a:lstStyle/>
+          <a:p>
+            <a:pPr algn="ctr"/>
+            <a:r>
+              <a:rPr sz="1800" b="1">
+                <a:solidFill>
+                  <a:srgbClr val="D97706"/>
+                </a:solidFill>
+                <a:latin typeface="Calibri"/>
+              </a:rPr>
+              <a:t>Enrichment</a:t>
+            </a:r>
+          </a:p>
+        </p:txBody>
+      </p:sp>
+      <p:sp>
+        <p:nvSpPr>
           <p:cNvPr id="11" name="TextBox 10"/>
           <p:cNvSpPr txBox="1"/>
           <p:nvPr/>
         </p:nvSpPr>
         <p:spPr>
           <a:xfrm>
-            <a:off x="2900021" y="2331720"/>
-            <a:ext cx="1874519" cy="1280160"/>
+            <a:off x="3617823" y="2788920"/>
+            <a:ext cx="2194560" cy="1097280"/>
           </a:xfrm>
           <a:prstGeom prst="rect">
             <a:avLst/>
@@ -7076,89 +7981,58 @@
           <a:noFill/>
         </p:spPr>
         <p:txBody>
-          <a:bodyPr wrap="square" anchor="ctr">
+          <a:bodyPr wrap="square">
             <a:spAutoFit/>
           </a:bodyPr>
           <a:lstStyle/>
           <a:p>
             <a:pPr algn="ctr"/>
             <a:r>
-              <a:rPr sz="1300" b="1">
-                <a:solidFill>
-                  <a:srgbClr val="1E293B"/>
+              <a:rPr sz="1300" b="0">
+                <a:solidFill>
+                  <a:srgbClr val="475569"/>
                 </a:solidFill>
                 <a:latin typeface="Calibri"/>
               </a:rPr>
-              <a:t>YOLO26s</a:t>
-            </a:r>
-          </a:p>
-          <a:p>
-            <a:pPr algn="ctr"/>
-            <a:r>
-              <a:rPr sz="1300" b="1">
-                <a:solidFill>
-                  <a:srgbClr val="1E293B"/>
+              <a:t>Probe accuracy ≈ 80 %</a:t>
+            </a:r>
+          </a:p>
+          <a:p>
+            <a:pPr algn="ctr"/>
+            <a:r>
+              <a:rPr sz="1300" b="0">
+                <a:solidFill>
+                  <a:srgbClr val="475569"/>
                 </a:solidFill>
                 <a:latin typeface="Calibri"/>
               </a:rPr>
-              <a:t>Detection</a:t>
-            </a:r>
-          </a:p>
-        </p:txBody>
-      </p:sp>
-      <p:sp>
-        <p:nvSpPr>
-          <p:cNvPr id="12" name="Right Arrow 11"/>
+              <a:t>20 brands</a:t>
+            </a:r>
+          </a:p>
+          <a:p>
+            <a:pPr algn="ctr"/>
+            <a:r>
+              <a:rPr sz="1300" b="0">
+                <a:solidFill>
+                  <a:srgbClr val="475569"/>
+                </a:solidFill>
+                <a:latin typeface="Calibri"/>
+              </a:rPr>
+              <a:t>(79.8 % on test split)</a:t>
+            </a:r>
+          </a:p>
+        </p:txBody>
+      </p:sp>
+      <p:sp>
+        <p:nvSpPr>
+          <p:cNvPr id="12" name="Rounded Rectangle 11"/>
           <p:cNvSpPr/>
           <p:nvPr/>
         </p:nvSpPr>
         <p:spPr>
           <a:xfrm>
-            <a:off x="4829404" y="2807208"/>
-            <a:ext cx="274320" cy="237744"/>
-          </a:xfrm>
-          <a:prstGeom prst="rightArrow">
-            <a:avLst/>
-          </a:prstGeom>
-          <a:solidFill>
-            <a:srgbClr val="0D9488"/>
-          </a:solidFill>
-          <a:ln>
-            <a:noFill/>
-          </a:ln>
-        </p:spPr>
-        <p:style>
-          <a:lnRef idx="1">
-            <a:schemeClr val="accent1"/>
-          </a:lnRef>
-          <a:fillRef idx="3">
-            <a:schemeClr val="accent1"/>
-          </a:fillRef>
-          <a:effectRef idx="2">
-            <a:schemeClr val="accent1"/>
-          </a:effectRef>
-          <a:fontRef idx="minor">
-            <a:schemeClr val="lt1"/>
-          </a:fontRef>
-        </p:style>
-        <p:txBody>
-          <a:bodyPr rtlCol="0" anchor="ctr"/>
-          <a:lstStyle/>
-          <a:p>
-            <a:pPr algn="ctr"/>
-          </a:p>
-        </p:txBody>
-      </p:sp>
-      <p:sp>
-        <p:nvSpPr>
-          <p:cNvPr id="13" name="Rounded Rectangle 12"/>
-          <p:cNvSpPr/>
-          <p:nvPr/>
-        </p:nvSpPr>
-        <p:spPr>
-          <a:xfrm>
-            <a:off x="5158588" y="2240280"/>
-            <a:ext cx="1874519" cy="1371600"/>
+            <a:off x="6242151" y="2011680"/>
+            <a:ext cx="2468880" cy="2103120"/>
           </a:xfrm>
           <a:prstGeom prst="roundRect">
             <a:avLst/>
@@ -7196,106 +8070,16 @@
       </p:sp>
       <p:sp>
         <p:nvSpPr>
-          <p:cNvPr id="14" name="Rectangle 13"/>
+          <p:cNvPr id="13" name="Rectangle 12"/>
           <p:cNvSpPr/>
           <p:nvPr/>
         </p:nvSpPr>
         <p:spPr>
           <a:xfrm>
-            <a:off x="5158588" y="2240280"/>
-            <a:ext cx="1874519" cy="50800"/>
-          </a:xfrm>
-          <a:prstGeom prst="rect">
-            <a:avLst/>
-          </a:prstGeom>
-          <a:solidFill>
-            <a:srgbClr val="D97706"/>
-          </a:solidFill>
-          <a:ln>
-            <a:noFill/>
-          </a:ln>
-        </p:spPr>
-        <p:style>
-          <a:lnRef idx="1">
-            <a:schemeClr val="accent1"/>
-          </a:lnRef>
-          <a:fillRef idx="3">
-            <a:schemeClr val="accent1"/>
-          </a:fillRef>
-          <a:effectRef idx="2">
-            <a:schemeClr val="accent1"/>
-          </a:effectRef>
-          <a:fontRef idx="minor">
-            <a:schemeClr val="lt1"/>
-          </a:fontRef>
-        </p:style>
-        <p:txBody>
-          <a:bodyPr rtlCol="0" anchor="ctr"/>
-          <a:lstStyle/>
-          <a:p>
-            <a:pPr algn="ctr"/>
-          </a:p>
-        </p:txBody>
-      </p:sp>
-      <p:sp>
-        <p:nvSpPr>
-          <p:cNvPr id="15" name="TextBox 14"/>
-          <p:cNvSpPr txBox="1"/>
-          <p:nvPr/>
-        </p:nvSpPr>
-        <p:spPr>
-          <a:xfrm>
-            <a:off x="5158588" y="2331720"/>
-            <a:ext cx="1874519" cy="1280160"/>
-          </a:xfrm>
-          <a:prstGeom prst="rect">
-            <a:avLst/>
-          </a:prstGeom>
-          <a:noFill/>
-        </p:spPr>
-        <p:txBody>
-          <a:bodyPr wrap="square" anchor="ctr">
-            <a:spAutoFit/>
-          </a:bodyPr>
-          <a:lstStyle/>
-          <a:p>
-            <a:pPr algn="ctr"/>
-            <a:r>
-              <a:rPr sz="1300" b="1">
-                <a:solidFill>
-                  <a:srgbClr val="1E293B"/>
-                </a:solidFill>
-                <a:latin typeface="Calibri"/>
-              </a:rPr>
-              <a:t>CLIP Brand</a:t>
-            </a:r>
-          </a:p>
-          <a:p>
-            <a:pPr algn="ctr"/>
-            <a:r>
-              <a:rPr sz="1300" b="1">
-                <a:solidFill>
-                  <a:srgbClr val="1E293B"/>
-                </a:solidFill>
-                <a:latin typeface="Calibri"/>
-              </a:rPr>
-              <a:t>Probe</a:t>
-            </a:r>
-          </a:p>
-        </p:txBody>
-      </p:sp>
-      <p:sp>
-        <p:nvSpPr>
-          <p:cNvPr id="16" name="Right Arrow 15"/>
-          <p:cNvSpPr/>
-          <p:nvPr/>
-        </p:nvSpPr>
-        <p:spPr>
-          <a:xfrm>
-            <a:off x="7087971" y="2807208"/>
-            <a:ext cx="274320" cy="237744"/>
-          </a:xfrm>
-          <a:prstGeom prst="rightArrow">
+            <a:off x="6242151" y="2011680"/>
+            <a:ext cx="2468880" cy="63500"/>
+          </a:xfrm>
+          <a:prstGeom prst="rect">
             <a:avLst/>
           </a:prstGeom>
           <a:solidFill>
@@ -7329,14 +8113,96 @@
       </p:sp>
       <p:sp>
         <p:nvSpPr>
-          <p:cNvPr id="17" name="Rounded Rectangle 16"/>
+          <p:cNvPr id="14" name="TextBox 13"/>
+          <p:cNvSpPr txBox="1"/>
+          <p:nvPr/>
+        </p:nvSpPr>
+        <p:spPr>
+          <a:xfrm>
+            <a:off x="6242151" y="2240280"/>
+            <a:ext cx="2468880" cy="457200"/>
+          </a:xfrm>
+          <a:prstGeom prst="rect">
+            <a:avLst/>
+          </a:prstGeom>
+          <a:noFill/>
+        </p:spPr>
+        <p:txBody>
+          <a:bodyPr wrap="square">
+            <a:spAutoFit/>
+          </a:bodyPr>
+          <a:lstStyle/>
+          <a:p>
+            <a:pPr algn="ctr"/>
+            <a:r>
+              <a:rPr sz="1800" b="1">
+                <a:solidFill>
+                  <a:srgbClr val="0D9488"/>
+                </a:solidFill>
+                <a:latin typeface="Calibri"/>
+              </a:rPr>
+              <a:t>Segmentation</a:t>
+            </a:r>
+          </a:p>
+        </p:txBody>
+      </p:sp>
+      <p:sp>
+        <p:nvSpPr>
+          <p:cNvPr id="15" name="TextBox 14"/>
+          <p:cNvSpPr txBox="1"/>
+          <p:nvPr/>
+        </p:nvSpPr>
+        <p:spPr>
+          <a:xfrm>
+            <a:off x="6379311" y="2788920"/>
+            <a:ext cx="2194560" cy="1097280"/>
+          </a:xfrm>
+          <a:prstGeom prst="rect">
+            <a:avLst/>
+          </a:prstGeom>
+          <a:noFill/>
+        </p:spPr>
+        <p:txBody>
+          <a:bodyPr wrap="square">
+            <a:spAutoFit/>
+          </a:bodyPr>
+          <a:lstStyle/>
+          <a:p>
+            <a:pPr algn="ctr"/>
+            <a:r>
+              <a:rPr sz="1300" b="0">
+                <a:solidFill>
+                  <a:srgbClr val="475569"/>
+                </a:solidFill>
+                <a:latin typeface="Calibri"/>
+              </a:rPr>
+              <a:t>19 Cityscapes classes</a:t>
+            </a:r>
+          </a:p>
+          <a:p>
+            <a:pPr algn="ctr"/>
+            <a:r>
+              <a:rPr sz="1300" b="0">
+                <a:solidFill>
+                  <a:srgbClr val="475569"/>
+                </a:solidFill>
+                <a:latin typeface="Calibri"/>
+              </a:rPr>
+              <a:t>84 % mIoU (pretrained)</a:t>
+            </a:r>
+          </a:p>
+        </p:txBody>
+      </p:sp>
+      <p:sp>
+        <p:nvSpPr>
+          <p:cNvPr id="16" name="Rounded Rectangle 15"/>
           <p:cNvSpPr/>
           <p:nvPr/>
         </p:nvSpPr>
         <p:spPr>
           <a:xfrm>
-            <a:off x="7417155" y="2240280"/>
-            <a:ext cx="1874519" cy="1371600"/>
+            <a:off x="9003639" y="2011680"/>
+            <a:ext cx="2468880" cy="2103120"/>
           </a:xfrm>
           <a:prstGeom prst="roundRect">
             <a:avLst/>
@@ -7374,14 +8240,14 @@
       </p:sp>
       <p:sp>
         <p:nvSpPr>
-          <p:cNvPr id="18" name="Rectangle 17"/>
+          <p:cNvPr id="17" name="Rectangle 16"/>
           <p:cNvSpPr/>
           <p:nvPr/>
         </p:nvSpPr>
         <p:spPr>
           <a:xfrm>
-            <a:off x="7417155" y="2240280"/>
-            <a:ext cx="1874519" cy="50800"/>
+            <a:off x="9003639" y="2011680"/>
+            <a:ext cx="2468880" cy="63500"/>
           </a:xfrm>
           <a:prstGeom prst="rect">
             <a:avLst/>
@@ -7417,464 +8283,14 @@
       </p:sp>
       <p:sp>
         <p:nvSpPr>
-          <p:cNvPr id="19" name="TextBox 18"/>
+          <p:cNvPr id="18" name="TextBox 17"/>
           <p:cNvSpPr txBox="1"/>
           <p:nvPr/>
         </p:nvSpPr>
         <p:spPr>
           <a:xfrm>
-            <a:off x="7417155" y="2331720"/>
-            <a:ext cx="1874519" cy="1280160"/>
-          </a:xfrm>
-          <a:prstGeom prst="rect">
-            <a:avLst/>
-          </a:prstGeom>
-          <a:noFill/>
-        </p:spPr>
-        <p:txBody>
-          <a:bodyPr wrap="square" anchor="ctr">
-            <a:spAutoFit/>
-          </a:bodyPr>
-          <a:lstStyle/>
-          <a:p>
-            <a:pPr algn="ctr"/>
-            <a:r>
-              <a:rPr sz="1300" b="1">
-                <a:solidFill>
-                  <a:srgbClr val="1E293B"/>
-                </a:solidFill>
-                <a:latin typeface="Calibri"/>
-              </a:rPr>
-              <a:t>VLM Caption</a:t>
-            </a:r>
-          </a:p>
-          <a:p>
-            <a:pPr algn="ctr"/>
-            <a:r>
-              <a:rPr sz="1300" b="1">
-                <a:solidFill>
-                  <a:srgbClr val="1E293B"/>
-                </a:solidFill>
-                <a:latin typeface="Calibri"/>
-              </a:rPr>
-              <a:t>&amp; Q&amp;A</a:t>
-            </a:r>
-          </a:p>
-        </p:txBody>
-      </p:sp>
-      <p:sp>
-        <p:nvSpPr>
-          <p:cNvPr id="20" name="Right Arrow 19"/>
-          <p:cNvSpPr/>
-          <p:nvPr/>
-        </p:nvSpPr>
-        <p:spPr>
-          <a:xfrm>
-            <a:off x="9346538" y="2807208"/>
-            <a:ext cx="274320" cy="237744"/>
-          </a:xfrm>
-          <a:prstGeom prst="rightArrow">
-            <a:avLst/>
-          </a:prstGeom>
-          <a:solidFill>
-            <a:srgbClr val="0D9488"/>
-          </a:solidFill>
-          <a:ln>
-            <a:noFill/>
-          </a:ln>
-        </p:spPr>
-        <p:style>
-          <a:lnRef idx="1">
-            <a:schemeClr val="accent1"/>
-          </a:lnRef>
-          <a:fillRef idx="3">
-            <a:schemeClr val="accent1"/>
-          </a:fillRef>
-          <a:effectRef idx="2">
-            <a:schemeClr val="accent1"/>
-          </a:effectRef>
-          <a:fontRef idx="minor">
-            <a:schemeClr val="lt1"/>
-          </a:fontRef>
-        </p:style>
-        <p:txBody>
-          <a:bodyPr rtlCol="0" anchor="ctr"/>
-          <a:lstStyle/>
-          <a:p>
-            <a:pPr algn="ctr"/>
-          </a:p>
-        </p:txBody>
-      </p:sp>
-      <p:sp>
-        <p:nvSpPr>
-          <p:cNvPr id="21" name="Rounded Rectangle 20"/>
-          <p:cNvSpPr/>
-          <p:nvPr/>
-        </p:nvSpPr>
-        <p:spPr>
-          <a:xfrm>
-            <a:off x="9675722" y="2240280"/>
-            <a:ext cx="1874519" cy="1371600"/>
-          </a:xfrm>
-          <a:prstGeom prst="roundRect">
-            <a:avLst/>
-          </a:prstGeom>
-          <a:solidFill>
-            <a:srgbClr val="FFFFFF"/>
-          </a:solidFill>
-          <a:ln w="12700">
-            <a:solidFill>
-              <a:srgbClr val="E2E8F0"/>
-            </a:solidFill>
-          </a:ln>
-        </p:spPr>
-        <p:style>
-          <a:lnRef idx="1">
-            <a:schemeClr val="accent1"/>
-          </a:lnRef>
-          <a:fillRef idx="3">
-            <a:schemeClr val="accent1"/>
-          </a:fillRef>
-          <a:effectRef idx="2">
-            <a:schemeClr val="accent1"/>
-          </a:effectRef>
-          <a:fontRef idx="minor">
-            <a:schemeClr val="lt1"/>
-          </a:fontRef>
-        </p:style>
-        <p:txBody>
-          <a:bodyPr rtlCol="0" anchor="ctr"/>
-          <a:lstStyle/>
-          <a:p>
-            <a:pPr algn="ctr"/>
-          </a:p>
-        </p:txBody>
-      </p:sp>
-      <p:sp>
-        <p:nvSpPr>
-          <p:cNvPr id="22" name="Rectangle 21"/>
-          <p:cNvSpPr/>
-          <p:nvPr/>
-        </p:nvSpPr>
-        <p:spPr>
-          <a:xfrm>
-            <a:off x="9675722" y="2240280"/>
-            <a:ext cx="1874519" cy="50800"/>
-          </a:xfrm>
-          <a:prstGeom prst="rect">
-            <a:avLst/>
-          </a:prstGeom>
-          <a:solidFill>
-            <a:srgbClr val="1E293B"/>
-          </a:solidFill>
-          <a:ln>
-            <a:noFill/>
-          </a:ln>
-        </p:spPr>
-        <p:style>
-          <a:lnRef idx="1">
-            <a:schemeClr val="accent1"/>
-          </a:lnRef>
-          <a:fillRef idx="3">
-            <a:schemeClr val="accent1"/>
-          </a:fillRef>
-          <a:effectRef idx="2">
-            <a:schemeClr val="accent1"/>
-          </a:effectRef>
-          <a:fontRef idx="minor">
-            <a:schemeClr val="lt1"/>
-          </a:fontRef>
-        </p:style>
-        <p:txBody>
-          <a:bodyPr rtlCol="0" anchor="ctr"/>
-          <a:lstStyle/>
-          <a:p>
-            <a:pPr algn="ctr"/>
-          </a:p>
-        </p:txBody>
-      </p:sp>
-      <p:sp>
-        <p:nvSpPr>
-          <p:cNvPr id="23" name="TextBox 22"/>
-          <p:cNvSpPr txBox="1"/>
-          <p:nvPr/>
-        </p:nvSpPr>
-        <p:spPr>
-          <a:xfrm>
-            <a:off x="9675722" y="2331720"/>
-            <a:ext cx="1874519" cy="1280160"/>
-          </a:xfrm>
-          <a:prstGeom prst="rect">
-            <a:avLst/>
-          </a:prstGeom>
-          <a:noFill/>
-        </p:spPr>
-        <p:txBody>
-          <a:bodyPr wrap="square" anchor="ctr">
-            <a:spAutoFit/>
-          </a:bodyPr>
-          <a:lstStyle/>
-          <a:p>
-            <a:pPr algn="ctr"/>
-            <a:r>
-              <a:rPr sz="1300" b="1">
-                <a:solidFill>
-                  <a:srgbClr val="1E293B"/>
-                </a:solidFill>
-                <a:latin typeface="Calibri"/>
-              </a:rPr>
-              <a:t>Structured</a:t>
-            </a:r>
-          </a:p>
-          <a:p>
-            <a:pPr algn="ctr"/>
-            <a:r>
-              <a:rPr sz="1300" b="1">
-                <a:solidFill>
-                  <a:srgbClr val="1E293B"/>
-                </a:solidFill>
-                <a:latin typeface="Calibri"/>
-              </a:rPr>
-              <a:t>Understanding</a:t>
-            </a:r>
-          </a:p>
-        </p:txBody>
-      </p:sp>
-      <p:sp>
-        <p:nvSpPr>
-          <p:cNvPr id="24" name="Rounded Rectangle 23"/>
-          <p:cNvSpPr/>
-          <p:nvPr/>
-        </p:nvSpPr>
-        <p:spPr>
-          <a:xfrm>
-            <a:off x="641454" y="4343400"/>
-            <a:ext cx="1874519" cy="1371600"/>
-          </a:xfrm>
-          <a:prstGeom prst="roundRect">
-            <a:avLst/>
-          </a:prstGeom>
-          <a:solidFill>
-            <a:srgbClr val="FFFFFF"/>
-          </a:solidFill>
-          <a:ln w="12700">
-            <a:solidFill>
-              <a:srgbClr val="E2E8F0"/>
-            </a:solidFill>
-          </a:ln>
-        </p:spPr>
-        <p:style>
-          <a:lnRef idx="1">
-            <a:schemeClr val="accent1"/>
-          </a:lnRef>
-          <a:fillRef idx="3">
-            <a:schemeClr val="accent1"/>
-          </a:fillRef>
-          <a:effectRef idx="2">
-            <a:schemeClr val="accent1"/>
-          </a:effectRef>
-          <a:fontRef idx="minor">
-            <a:schemeClr val="lt1"/>
-          </a:fontRef>
-        </p:style>
-        <p:txBody>
-          <a:bodyPr rtlCol="0" anchor="ctr"/>
-          <a:lstStyle/>
-          <a:p>
-            <a:pPr algn="ctr"/>
-          </a:p>
-        </p:txBody>
-      </p:sp>
-      <p:sp>
-        <p:nvSpPr>
-          <p:cNvPr id="25" name="Rectangle 24"/>
-          <p:cNvSpPr/>
-          <p:nvPr/>
-        </p:nvSpPr>
-        <p:spPr>
-          <a:xfrm>
-            <a:off x="641454" y="4343400"/>
-            <a:ext cx="1874519" cy="50800"/>
-          </a:xfrm>
-          <a:prstGeom prst="rect">
-            <a:avLst/>
-          </a:prstGeom>
-          <a:solidFill>
-            <a:srgbClr val="0D9488"/>
-          </a:solidFill>
-          <a:ln>
-            <a:noFill/>
-          </a:ln>
-        </p:spPr>
-        <p:style>
-          <a:lnRef idx="1">
-            <a:schemeClr val="accent1"/>
-          </a:lnRef>
-          <a:fillRef idx="3">
-            <a:schemeClr val="accent1"/>
-          </a:fillRef>
-          <a:effectRef idx="2">
-            <a:schemeClr val="accent1"/>
-          </a:effectRef>
-          <a:fontRef idx="minor">
-            <a:schemeClr val="lt1"/>
-          </a:fontRef>
-        </p:style>
-        <p:txBody>
-          <a:bodyPr rtlCol="0" anchor="ctr"/>
-          <a:lstStyle/>
-          <a:p>
-            <a:pPr algn="ctr"/>
-          </a:p>
-        </p:txBody>
-      </p:sp>
-      <p:sp>
-        <p:nvSpPr>
-          <p:cNvPr id="26" name="TextBox 25"/>
-          <p:cNvSpPr txBox="1"/>
-          <p:nvPr/>
-        </p:nvSpPr>
-        <p:spPr>
-          <a:xfrm>
-            <a:off x="641454" y="4434840"/>
-            <a:ext cx="1874519" cy="1280160"/>
-          </a:xfrm>
-          <a:prstGeom prst="rect">
-            <a:avLst/>
-          </a:prstGeom>
-          <a:noFill/>
-        </p:spPr>
-        <p:txBody>
-          <a:bodyPr wrap="square" anchor="ctr">
-            <a:spAutoFit/>
-          </a:bodyPr>
-          <a:lstStyle/>
-          <a:p>
-            <a:pPr algn="ctr"/>
-            <a:r>
-              <a:rPr sz="1300" b="1">
-                <a:solidFill>
-                  <a:srgbClr val="1E293B"/>
-                </a:solidFill>
-                <a:latin typeface="Calibri"/>
-              </a:rPr>
-              <a:t>SegFormer</a:t>
-            </a:r>
-          </a:p>
-          <a:p>
-            <a:pPr algn="ctr"/>
-            <a:r>
-              <a:rPr sz="1300" b="1">
-                <a:solidFill>
-                  <a:srgbClr val="1E293B"/>
-                </a:solidFill>
-                <a:latin typeface="Calibri"/>
-              </a:rPr>
-              <a:t>Segmentation</a:t>
-            </a:r>
-          </a:p>
-        </p:txBody>
-      </p:sp>
-      <p:sp>
-        <p:nvSpPr>
-          <p:cNvPr id="27" name="Rectangle 26"/>
-          <p:cNvSpPr/>
-          <p:nvPr/>
-        </p:nvSpPr>
-        <p:spPr>
-          <a:xfrm>
-            <a:off x="1569569" y="3611880"/>
-            <a:ext cx="22860" cy="731520"/>
-          </a:xfrm>
-          <a:prstGeom prst="rect">
-            <a:avLst/>
-          </a:prstGeom>
-          <a:solidFill>
-            <a:srgbClr val="E2E8F0"/>
-          </a:solidFill>
-          <a:ln>
-            <a:noFill/>
-          </a:ln>
-        </p:spPr>
-        <p:style>
-          <a:lnRef idx="1">
-            <a:schemeClr val="accent1"/>
-          </a:lnRef>
-          <a:fillRef idx="3">
-            <a:schemeClr val="accent1"/>
-          </a:fillRef>
-          <a:effectRef idx="2">
-            <a:schemeClr val="accent1"/>
-          </a:effectRef>
-          <a:fontRef idx="minor">
-            <a:schemeClr val="lt1"/>
-          </a:fontRef>
-        </p:style>
-        <p:txBody>
-          <a:bodyPr rtlCol="0" anchor="ctr"/>
-          <a:lstStyle/>
-          <a:p>
-            <a:pPr algn="ctr"/>
-          </a:p>
-        </p:txBody>
-      </p:sp>
-      <p:sp>
-        <p:nvSpPr>
-          <p:cNvPr id="28" name="TextBox 27"/>
-          <p:cNvSpPr txBox="1"/>
-          <p:nvPr/>
-        </p:nvSpPr>
-        <p:spPr>
-          <a:xfrm>
-            <a:off x="2881733" y="4572000"/>
-            <a:ext cx="5943600" cy="914400"/>
-          </a:xfrm>
-          <a:prstGeom prst="rect">
-            <a:avLst/>
-          </a:prstGeom>
-          <a:noFill/>
-        </p:spPr>
-        <p:txBody>
-          <a:bodyPr wrap="square" anchor="ctr">
-            <a:spAutoFit/>
-          </a:bodyPr>
-          <a:lstStyle/>
-          <a:p>
-            <a:pPr algn="l"/>
-            <a:r>
-              <a:rPr sz="1600" b="0">
-                <a:solidFill>
-                  <a:srgbClr val="475569"/>
-                </a:solidFill>
-                <a:latin typeface="Calibri"/>
-              </a:rPr>
-              <a:t>Standalone quality demo — shares the input video,</a:t>
-            </a:r>
-          </a:p>
-          <a:p>
-            <a:pPr algn="l"/>
-            <a:r>
-              <a:rPr sz="1600" b="0">
-                <a:solidFill>
-                  <a:srgbClr val="475569"/>
-                </a:solidFill>
-                <a:latin typeface="Calibri"/>
-              </a:rPr>
-              <a:t>but feeds no downstream stage.</a:t>
-            </a:r>
-          </a:p>
-        </p:txBody>
-      </p:sp>
-      <p:sp>
-        <p:nvSpPr>
-          <p:cNvPr id="29" name="TextBox 28"/>
-          <p:cNvSpPr txBox="1"/>
-          <p:nvPr/>
-        </p:nvSpPr>
-        <p:spPr>
-          <a:xfrm>
-            <a:off x="822960" y="6080760"/>
-            <a:ext cx="10545775" cy="457200"/>
+            <a:off x="9003639" y="2240280"/>
+            <a:ext cx="2468880" cy="457200"/>
           </a:xfrm>
           <a:prstGeom prst="rect">
             <a:avLst/>
@@ -7887,15 +8303,97 @@
           </a:bodyPr>
           <a:lstStyle/>
           <a:p>
-            <a:pPr algn="l"/>
-            <a:r>
-              <a:rPr sz="1300" b="0">
-                <a:solidFill>
-                  <a:srgbClr val="94A3B8"/>
+            <a:pPr algn="ctr"/>
+            <a:r>
+              <a:rPr sz="1800" b="1">
+                <a:solidFill>
+                  <a:srgbClr val="6366F1"/>
                 </a:solidFill>
                 <a:latin typeface="Calibri"/>
               </a:rPr>
-              <a:t>Speed: YOLO is fast · CLIP is moderate (one crop at a time) · SegFormer &amp; VLM are slow, selective, or offline-only.</a:t>
+              <a:t>Narration</a:t>
+            </a:r>
+          </a:p>
+        </p:txBody>
+      </p:sp>
+      <p:sp>
+        <p:nvSpPr>
+          <p:cNvPr id="19" name="TextBox 18"/>
+          <p:cNvSpPr txBox="1"/>
+          <p:nvPr/>
+        </p:nvSpPr>
+        <p:spPr>
+          <a:xfrm>
+            <a:off x="9140799" y="2788920"/>
+            <a:ext cx="2194560" cy="1097280"/>
+          </a:xfrm>
+          <a:prstGeom prst="rect">
+            <a:avLst/>
+          </a:prstGeom>
+          <a:noFill/>
+        </p:spPr>
+        <p:txBody>
+          <a:bodyPr wrap="square">
+            <a:spAutoFit/>
+          </a:bodyPr>
+          <a:lstStyle/>
+          <a:p>
+            <a:pPr algn="ctr"/>
+            <a:r>
+              <a:rPr sz="1300" b="0">
+                <a:solidFill>
+                  <a:srgbClr val="475569"/>
+                </a:solidFill>
+                <a:latin typeface="Calibri"/>
+              </a:rPr>
+              <a:t>Adaptive captioning</a:t>
+            </a:r>
+          </a:p>
+          <a:p>
+            <a:pPr algn="ctr"/>
+            <a:r>
+              <a:rPr sz="1300" b="0">
+                <a:solidFill>
+                  <a:srgbClr val="475569"/>
+                </a:solidFill>
+                <a:latin typeface="Calibri"/>
+              </a:rPr>
+              <a:t>local inference</a:t>
+            </a:r>
+          </a:p>
+        </p:txBody>
+      </p:sp>
+      <p:sp>
+        <p:nvSpPr>
+          <p:cNvPr id="20" name="TextBox 19"/>
+          <p:cNvSpPr txBox="1"/>
+          <p:nvPr/>
+        </p:nvSpPr>
+        <p:spPr>
+          <a:xfrm>
+            <a:off x="822960" y="5029200"/>
+            <a:ext cx="10545775" cy="457200"/>
+          </a:xfrm>
+          <a:prstGeom prst="rect">
+            <a:avLst/>
+          </a:prstGeom>
+          <a:noFill/>
+        </p:spPr>
+        <p:txBody>
+          <a:bodyPr wrap="square">
+            <a:spAutoFit/>
+          </a:bodyPr>
+          <a:lstStyle/>
+          <a:p>
+            <a:pPr algn="l"/>
+            <a:r>
+              <a:rPr sz="1300" b="0">
+                <a:solidFill>
+                  <a:srgbClr val="94A3B8"/>
+                </a:solidFill>
+                <a:latin typeface="Calibri"/>
+              </a:rPr>
+              <a:t>All four capabilities run on a single local GPU — no cloud dependency.  YOLOv10n → YOLO26s:  +24.7% mAP@0.5,  +32.7% strict mAP,  +26.1% recall.  Hardest class: pedestrian (mAP 0.692).</a:t>
             </a:r>
           </a:p>
         </p:txBody>
@@ -7934,861 +8432,6 @@
         </p:nvSpPr>
         <p:spPr>
           <a:xfrm>
-            <a:off x="822960" y="502920"/>
-            <a:ext cx="10545775" cy="731520"/>
-          </a:xfrm>
-          <a:prstGeom prst="rect">
-            <a:avLst/>
-          </a:prstGeom>
-          <a:noFill/>
-        </p:spPr>
-        <p:txBody>
-          <a:bodyPr wrap="square">
-            <a:spAutoFit/>
-          </a:bodyPr>
-          <a:lstStyle/>
-          <a:p>
-            <a:pPr algn="l"/>
-            <a:r>
-              <a:rPr sz="3000" b="1">
-                <a:solidFill>
-                  <a:srgbClr val="1E293B"/>
-                </a:solidFill>
-                <a:latin typeface="Calibri"/>
-              </a:rPr>
-              <a:t>Results &amp; Key Metrics</a:t>
-            </a:r>
-          </a:p>
-        </p:txBody>
-      </p:sp>
-      <p:sp>
-        <p:nvSpPr>
-          <p:cNvPr id="3" name="Rectangle 2"/>
-          <p:cNvSpPr/>
-          <p:nvPr/>
-        </p:nvSpPr>
-        <p:spPr>
-          <a:xfrm>
-            <a:off x="822960" y="1234440"/>
-            <a:ext cx="1280160" cy="38100"/>
-          </a:xfrm>
-          <a:prstGeom prst="rect">
-            <a:avLst/>
-          </a:prstGeom>
-          <a:solidFill>
-            <a:srgbClr val="0D9488"/>
-          </a:solidFill>
-          <a:ln>
-            <a:noFill/>
-          </a:ln>
-        </p:spPr>
-        <p:style>
-          <a:lnRef idx="1">
-            <a:schemeClr val="accent1"/>
-          </a:lnRef>
-          <a:fillRef idx="3">
-            <a:schemeClr val="accent1"/>
-          </a:fillRef>
-          <a:effectRef idx="2">
-            <a:schemeClr val="accent1"/>
-          </a:effectRef>
-          <a:fontRef idx="minor">
-            <a:schemeClr val="lt1"/>
-          </a:fontRef>
-        </p:style>
-        <p:txBody>
-          <a:bodyPr rtlCol="0" anchor="ctr"/>
-          <a:lstStyle/>
-          <a:p>
-            <a:pPr algn="ctr"/>
-          </a:p>
-        </p:txBody>
-      </p:sp>
-      <p:sp>
-        <p:nvSpPr>
-          <p:cNvPr id="4" name="Rounded Rectangle 3"/>
-          <p:cNvSpPr/>
-          <p:nvPr/>
-        </p:nvSpPr>
-        <p:spPr>
-          <a:xfrm>
-            <a:off x="719175" y="2011680"/>
-            <a:ext cx="2468880" cy="2103120"/>
-          </a:xfrm>
-          <a:prstGeom prst="roundRect">
-            <a:avLst/>
-          </a:prstGeom>
-          <a:solidFill>
-            <a:srgbClr val="FFFFFF"/>
-          </a:solidFill>
-          <a:ln w="12700">
-            <a:solidFill>
-              <a:srgbClr val="E2E8F0"/>
-            </a:solidFill>
-          </a:ln>
-        </p:spPr>
-        <p:style>
-          <a:lnRef idx="1">
-            <a:schemeClr val="accent1"/>
-          </a:lnRef>
-          <a:fillRef idx="3">
-            <a:schemeClr val="accent1"/>
-          </a:fillRef>
-          <a:effectRef idx="2">
-            <a:schemeClr val="accent1"/>
-          </a:effectRef>
-          <a:fontRef idx="minor">
-            <a:schemeClr val="lt1"/>
-          </a:fontRef>
-        </p:style>
-        <p:txBody>
-          <a:bodyPr rtlCol="0" anchor="ctr"/>
-          <a:lstStyle/>
-          <a:p>
-            <a:pPr algn="ctr"/>
-          </a:p>
-        </p:txBody>
-      </p:sp>
-      <p:sp>
-        <p:nvSpPr>
-          <p:cNvPr id="5" name="Rectangle 4"/>
-          <p:cNvSpPr/>
-          <p:nvPr/>
-        </p:nvSpPr>
-        <p:spPr>
-          <a:xfrm>
-            <a:off x="719175" y="2011680"/>
-            <a:ext cx="2468880" cy="63500"/>
-          </a:xfrm>
-          <a:prstGeom prst="rect">
-            <a:avLst/>
-          </a:prstGeom>
-          <a:solidFill>
-            <a:srgbClr val="0D9488"/>
-          </a:solidFill>
-          <a:ln>
-            <a:noFill/>
-          </a:ln>
-        </p:spPr>
-        <p:style>
-          <a:lnRef idx="1">
-            <a:schemeClr val="accent1"/>
-          </a:lnRef>
-          <a:fillRef idx="3">
-            <a:schemeClr val="accent1"/>
-          </a:fillRef>
-          <a:effectRef idx="2">
-            <a:schemeClr val="accent1"/>
-          </a:effectRef>
-          <a:fontRef idx="minor">
-            <a:schemeClr val="lt1"/>
-          </a:fontRef>
-        </p:style>
-        <p:txBody>
-          <a:bodyPr rtlCol="0" anchor="ctr"/>
-          <a:lstStyle/>
-          <a:p>
-            <a:pPr algn="ctr"/>
-          </a:p>
-        </p:txBody>
-      </p:sp>
-      <p:sp>
-        <p:nvSpPr>
-          <p:cNvPr id="6" name="TextBox 5"/>
-          <p:cNvSpPr txBox="1"/>
-          <p:nvPr/>
-        </p:nvSpPr>
-        <p:spPr>
-          <a:xfrm>
-            <a:off x="719175" y="2240280"/>
-            <a:ext cx="2468880" cy="457200"/>
-          </a:xfrm>
-          <a:prstGeom prst="rect">
-            <a:avLst/>
-          </a:prstGeom>
-          <a:noFill/>
-        </p:spPr>
-        <p:txBody>
-          <a:bodyPr wrap="square">
-            <a:spAutoFit/>
-          </a:bodyPr>
-          <a:lstStyle/>
-          <a:p>
-            <a:pPr algn="ctr"/>
-            <a:r>
-              <a:rPr sz="1800" b="1">
-                <a:solidFill>
-                  <a:srgbClr val="0D9488"/>
-                </a:solidFill>
-                <a:latin typeface="Calibri"/>
-              </a:rPr>
-              <a:t>Detection</a:t>
-            </a:r>
-          </a:p>
-        </p:txBody>
-      </p:sp>
-      <p:sp>
-        <p:nvSpPr>
-          <p:cNvPr id="7" name="TextBox 6"/>
-          <p:cNvSpPr txBox="1"/>
-          <p:nvPr/>
-        </p:nvSpPr>
-        <p:spPr>
-          <a:xfrm>
-            <a:off x="856335" y="2788920"/>
-            <a:ext cx="2194560" cy="1097280"/>
-          </a:xfrm>
-          <a:prstGeom prst="rect">
-            <a:avLst/>
-          </a:prstGeom>
-          <a:noFill/>
-        </p:spPr>
-        <p:txBody>
-          <a:bodyPr wrap="square">
-            <a:spAutoFit/>
-          </a:bodyPr>
-          <a:lstStyle/>
-          <a:p>
-            <a:pPr algn="ctr"/>
-            <a:r>
-              <a:rPr sz="1300" b="0">
-                <a:solidFill>
-                  <a:srgbClr val="475569"/>
-                </a:solidFill>
-                <a:latin typeface="Calibri"/>
-              </a:rPr>
-              <a:t>P = 0.874</a:t>
-            </a:r>
-          </a:p>
-          <a:p>
-            <a:pPr algn="ctr"/>
-            <a:r>
-              <a:rPr sz="1300" b="0">
-                <a:solidFill>
-                  <a:srgbClr val="475569"/>
-                </a:solidFill>
-                <a:latin typeface="Calibri"/>
-              </a:rPr>
-              <a:t>R = 0.754</a:t>
-            </a:r>
-          </a:p>
-          <a:p>
-            <a:pPr algn="ctr"/>
-            <a:r>
-              <a:rPr sz="1300" b="0">
-                <a:solidFill>
-                  <a:srgbClr val="475569"/>
-                </a:solidFill>
-                <a:latin typeface="Calibri"/>
-              </a:rPr>
-              <a:t>mAP@0.5 = 0.842</a:t>
-            </a:r>
-          </a:p>
-          <a:p>
-            <a:pPr algn="ctr"/>
-            <a:r>
-              <a:rPr sz="1300" b="0">
-                <a:solidFill>
-                  <a:srgbClr val="475569"/>
-                </a:solidFill>
-                <a:latin typeface="Calibri"/>
-              </a:rPr>
-              <a:t>mAP@0.5:0.95 = 0.515</a:t>
-            </a:r>
-          </a:p>
-        </p:txBody>
-      </p:sp>
-      <p:sp>
-        <p:nvSpPr>
-          <p:cNvPr id="8" name="Rounded Rectangle 7"/>
-          <p:cNvSpPr/>
-          <p:nvPr/>
-        </p:nvSpPr>
-        <p:spPr>
-          <a:xfrm>
-            <a:off x="3480663" y="2011680"/>
-            <a:ext cx="2468880" cy="2103120"/>
-          </a:xfrm>
-          <a:prstGeom prst="roundRect">
-            <a:avLst/>
-          </a:prstGeom>
-          <a:solidFill>
-            <a:srgbClr val="FFFFFF"/>
-          </a:solidFill>
-          <a:ln w="12700">
-            <a:solidFill>
-              <a:srgbClr val="E2E8F0"/>
-            </a:solidFill>
-          </a:ln>
-        </p:spPr>
-        <p:style>
-          <a:lnRef idx="1">
-            <a:schemeClr val="accent1"/>
-          </a:lnRef>
-          <a:fillRef idx="3">
-            <a:schemeClr val="accent1"/>
-          </a:fillRef>
-          <a:effectRef idx="2">
-            <a:schemeClr val="accent1"/>
-          </a:effectRef>
-          <a:fontRef idx="minor">
-            <a:schemeClr val="lt1"/>
-          </a:fontRef>
-        </p:style>
-        <p:txBody>
-          <a:bodyPr rtlCol="0" anchor="ctr"/>
-          <a:lstStyle/>
-          <a:p>
-            <a:pPr algn="ctr"/>
-          </a:p>
-        </p:txBody>
-      </p:sp>
-      <p:sp>
-        <p:nvSpPr>
-          <p:cNvPr id="9" name="Rectangle 8"/>
-          <p:cNvSpPr/>
-          <p:nvPr/>
-        </p:nvSpPr>
-        <p:spPr>
-          <a:xfrm>
-            <a:off x="3480663" y="2011680"/>
-            <a:ext cx="2468880" cy="63500"/>
-          </a:xfrm>
-          <a:prstGeom prst="rect">
-            <a:avLst/>
-          </a:prstGeom>
-          <a:solidFill>
-            <a:srgbClr val="D97706"/>
-          </a:solidFill>
-          <a:ln>
-            <a:noFill/>
-          </a:ln>
-        </p:spPr>
-        <p:style>
-          <a:lnRef idx="1">
-            <a:schemeClr val="accent1"/>
-          </a:lnRef>
-          <a:fillRef idx="3">
-            <a:schemeClr val="accent1"/>
-          </a:fillRef>
-          <a:effectRef idx="2">
-            <a:schemeClr val="accent1"/>
-          </a:effectRef>
-          <a:fontRef idx="minor">
-            <a:schemeClr val="lt1"/>
-          </a:fontRef>
-        </p:style>
-        <p:txBody>
-          <a:bodyPr rtlCol="0" anchor="ctr"/>
-          <a:lstStyle/>
-          <a:p>
-            <a:pPr algn="ctr"/>
-          </a:p>
-        </p:txBody>
-      </p:sp>
-      <p:sp>
-        <p:nvSpPr>
-          <p:cNvPr id="10" name="TextBox 9"/>
-          <p:cNvSpPr txBox="1"/>
-          <p:nvPr/>
-        </p:nvSpPr>
-        <p:spPr>
-          <a:xfrm>
-            <a:off x="3480663" y="2240280"/>
-            <a:ext cx="2468880" cy="457200"/>
-          </a:xfrm>
-          <a:prstGeom prst="rect">
-            <a:avLst/>
-          </a:prstGeom>
-          <a:noFill/>
-        </p:spPr>
-        <p:txBody>
-          <a:bodyPr wrap="square">
-            <a:spAutoFit/>
-          </a:bodyPr>
-          <a:lstStyle/>
-          <a:p>
-            <a:pPr algn="ctr"/>
-            <a:r>
-              <a:rPr sz="1800" b="1">
-                <a:solidFill>
-                  <a:srgbClr val="D97706"/>
-                </a:solidFill>
-                <a:latin typeface="Calibri"/>
-              </a:rPr>
-              <a:t>Enrichment</a:t>
-            </a:r>
-          </a:p>
-        </p:txBody>
-      </p:sp>
-      <p:sp>
-        <p:nvSpPr>
-          <p:cNvPr id="11" name="TextBox 10"/>
-          <p:cNvSpPr txBox="1"/>
-          <p:nvPr/>
-        </p:nvSpPr>
-        <p:spPr>
-          <a:xfrm>
-            <a:off x="3617823" y="2788920"/>
-            <a:ext cx="2194560" cy="1097280"/>
-          </a:xfrm>
-          <a:prstGeom prst="rect">
-            <a:avLst/>
-          </a:prstGeom>
-          <a:noFill/>
-        </p:spPr>
-        <p:txBody>
-          <a:bodyPr wrap="square">
-            <a:spAutoFit/>
-          </a:bodyPr>
-          <a:lstStyle/>
-          <a:p>
-            <a:pPr algn="ctr"/>
-            <a:r>
-              <a:rPr sz="1300" b="0">
-                <a:solidFill>
-                  <a:srgbClr val="475569"/>
-                </a:solidFill>
-                <a:latin typeface="Calibri"/>
-              </a:rPr>
-              <a:t>Probe accuracy ≈ 80 %</a:t>
-            </a:r>
-          </a:p>
-          <a:p>
-            <a:pPr algn="ctr"/>
-            <a:r>
-              <a:rPr sz="1300" b="0">
-                <a:solidFill>
-                  <a:srgbClr val="475569"/>
-                </a:solidFill>
-                <a:latin typeface="Calibri"/>
-              </a:rPr>
-              <a:t>20 brands</a:t>
-            </a:r>
-          </a:p>
-          <a:p>
-            <a:pPr algn="ctr"/>
-            <a:r>
-              <a:rPr sz="1300" b="0">
-                <a:solidFill>
-                  <a:srgbClr val="475569"/>
-                </a:solidFill>
-                <a:latin typeface="Calibri"/>
-              </a:rPr>
-              <a:t>(79.8 % on test split)</a:t>
-            </a:r>
-          </a:p>
-        </p:txBody>
-      </p:sp>
-      <p:sp>
-        <p:nvSpPr>
-          <p:cNvPr id="12" name="Rounded Rectangle 11"/>
-          <p:cNvSpPr/>
-          <p:nvPr/>
-        </p:nvSpPr>
-        <p:spPr>
-          <a:xfrm>
-            <a:off x="6242151" y="2011680"/>
-            <a:ext cx="2468880" cy="2103120"/>
-          </a:xfrm>
-          <a:prstGeom prst="roundRect">
-            <a:avLst/>
-          </a:prstGeom>
-          <a:solidFill>
-            <a:srgbClr val="FFFFFF"/>
-          </a:solidFill>
-          <a:ln w="12700">
-            <a:solidFill>
-              <a:srgbClr val="E2E8F0"/>
-            </a:solidFill>
-          </a:ln>
-        </p:spPr>
-        <p:style>
-          <a:lnRef idx="1">
-            <a:schemeClr val="accent1"/>
-          </a:lnRef>
-          <a:fillRef idx="3">
-            <a:schemeClr val="accent1"/>
-          </a:fillRef>
-          <a:effectRef idx="2">
-            <a:schemeClr val="accent1"/>
-          </a:effectRef>
-          <a:fontRef idx="minor">
-            <a:schemeClr val="lt1"/>
-          </a:fontRef>
-        </p:style>
-        <p:txBody>
-          <a:bodyPr rtlCol="0" anchor="ctr"/>
-          <a:lstStyle/>
-          <a:p>
-            <a:pPr algn="ctr"/>
-          </a:p>
-        </p:txBody>
-      </p:sp>
-      <p:sp>
-        <p:nvSpPr>
-          <p:cNvPr id="13" name="Rectangle 12"/>
-          <p:cNvSpPr/>
-          <p:nvPr/>
-        </p:nvSpPr>
-        <p:spPr>
-          <a:xfrm>
-            <a:off x="6242151" y="2011680"/>
-            <a:ext cx="2468880" cy="63500"/>
-          </a:xfrm>
-          <a:prstGeom prst="rect">
-            <a:avLst/>
-          </a:prstGeom>
-          <a:solidFill>
-            <a:srgbClr val="0D9488"/>
-          </a:solidFill>
-          <a:ln>
-            <a:noFill/>
-          </a:ln>
-        </p:spPr>
-        <p:style>
-          <a:lnRef idx="1">
-            <a:schemeClr val="accent1"/>
-          </a:lnRef>
-          <a:fillRef idx="3">
-            <a:schemeClr val="accent1"/>
-          </a:fillRef>
-          <a:effectRef idx="2">
-            <a:schemeClr val="accent1"/>
-          </a:effectRef>
-          <a:fontRef idx="minor">
-            <a:schemeClr val="lt1"/>
-          </a:fontRef>
-        </p:style>
-        <p:txBody>
-          <a:bodyPr rtlCol="0" anchor="ctr"/>
-          <a:lstStyle/>
-          <a:p>
-            <a:pPr algn="ctr"/>
-          </a:p>
-        </p:txBody>
-      </p:sp>
-      <p:sp>
-        <p:nvSpPr>
-          <p:cNvPr id="14" name="TextBox 13"/>
-          <p:cNvSpPr txBox="1"/>
-          <p:nvPr/>
-        </p:nvSpPr>
-        <p:spPr>
-          <a:xfrm>
-            <a:off x="6242151" y="2240280"/>
-            <a:ext cx="2468880" cy="457200"/>
-          </a:xfrm>
-          <a:prstGeom prst="rect">
-            <a:avLst/>
-          </a:prstGeom>
-          <a:noFill/>
-        </p:spPr>
-        <p:txBody>
-          <a:bodyPr wrap="square">
-            <a:spAutoFit/>
-          </a:bodyPr>
-          <a:lstStyle/>
-          <a:p>
-            <a:pPr algn="ctr"/>
-            <a:r>
-              <a:rPr sz="1800" b="1">
-                <a:solidFill>
-                  <a:srgbClr val="0D9488"/>
-                </a:solidFill>
-                <a:latin typeface="Calibri"/>
-              </a:rPr>
-              <a:t>Segmentation</a:t>
-            </a:r>
-          </a:p>
-        </p:txBody>
-      </p:sp>
-      <p:sp>
-        <p:nvSpPr>
-          <p:cNvPr id="15" name="TextBox 14"/>
-          <p:cNvSpPr txBox="1"/>
-          <p:nvPr/>
-        </p:nvSpPr>
-        <p:spPr>
-          <a:xfrm>
-            <a:off x="6379311" y="2788920"/>
-            <a:ext cx="2194560" cy="1097280"/>
-          </a:xfrm>
-          <a:prstGeom prst="rect">
-            <a:avLst/>
-          </a:prstGeom>
-          <a:noFill/>
-        </p:spPr>
-        <p:txBody>
-          <a:bodyPr wrap="square">
-            <a:spAutoFit/>
-          </a:bodyPr>
-          <a:lstStyle/>
-          <a:p>
-            <a:pPr algn="ctr"/>
-            <a:r>
-              <a:rPr sz="1300" b="0">
-                <a:solidFill>
-                  <a:srgbClr val="475569"/>
-                </a:solidFill>
-                <a:latin typeface="Calibri"/>
-              </a:rPr>
-              <a:t>19 Cityscapes classes</a:t>
-            </a:r>
-          </a:p>
-          <a:p>
-            <a:pPr algn="ctr"/>
-            <a:r>
-              <a:rPr sz="1300" b="0">
-                <a:solidFill>
-                  <a:srgbClr val="475569"/>
-                </a:solidFill>
-                <a:latin typeface="Calibri"/>
-              </a:rPr>
-              <a:t>84 % mIoU (pretrained)</a:t>
-            </a:r>
-          </a:p>
-        </p:txBody>
-      </p:sp>
-      <p:sp>
-        <p:nvSpPr>
-          <p:cNvPr id="16" name="Rounded Rectangle 15"/>
-          <p:cNvSpPr/>
-          <p:nvPr/>
-        </p:nvSpPr>
-        <p:spPr>
-          <a:xfrm>
-            <a:off x="9003639" y="2011680"/>
-            <a:ext cx="2468880" cy="2103120"/>
-          </a:xfrm>
-          <a:prstGeom prst="roundRect">
-            <a:avLst/>
-          </a:prstGeom>
-          <a:solidFill>
-            <a:srgbClr val="FFFFFF"/>
-          </a:solidFill>
-          <a:ln w="12700">
-            <a:solidFill>
-              <a:srgbClr val="E2E8F0"/>
-            </a:solidFill>
-          </a:ln>
-        </p:spPr>
-        <p:style>
-          <a:lnRef idx="1">
-            <a:schemeClr val="accent1"/>
-          </a:lnRef>
-          <a:fillRef idx="3">
-            <a:schemeClr val="accent1"/>
-          </a:fillRef>
-          <a:effectRef idx="2">
-            <a:schemeClr val="accent1"/>
-          </a:effectRef>
-          <a:fontRef idx="minor">
-            <a:schemeClr val="lt1"/>
-          </a:fontRef>
-        </p:style>
-        <p:txBody>
-          <a:bodyPr rtlCol="0" anchor="ctr"/>
-          <a:lstStyle/>
-          <a:p>
-            <a:pPr algn="ctr"/>
-          </a:p>
-        </p:txBody>
-      </p:sp>
-      <p:sp>
-        <p:nvSpPr>
-          <p:cNvPr id="17" name="Rectangle 16"/>
-          <p:cNvSpPr/>
-          <p:nvPr/>
-        </p:nvSpPr>
-        <p:spPr>
-          <a:xfrm>
-            <a:off x="9003639" y="2011680"/>
-            <a:ext cx="2468880" cy="63500"/>
-          </a:xfrm>
-          <a:prstGeom prst="rect">
-            <a:avLst/>
-          </a:prstGeom>
-          <a:solidFill>
-            <a:srgbClr val="6366F1"/>
-          </a:solidFill>
-          <a:ln>
-            <a:noFill/>
-          </a:ln>
-        </p:spPr>
-        <p:style>
-          <a:lnRef idx="1">
-            <a:schemeClr val="accent1"/>
-          </a:lnRef>
-          <a:fillRef idx="3">
-            <a:schemeClr val="accent1"/>
-          </a:fillRef>
-          <a:effectRef idx="2">
-            <a:schemeClr val="accent1"/>
-          </a:effectRef>
-          <a:fontRef idx="minor">
-            <a:schemeClr val="lt1"/>
-          </a:fontRef>
-        </p:style>
-        <p:txBody>
-          <a:bodyPr rtlCol="0" anchor="ctr"/>
-          <a:lstStyle/>
-          <a:p>
-            <a:pPr algn="ctr"/>
-          </a:p>
-        </p:txBody>
-      </p:sp>
-      <p:sp>
-        <p:nvSpPr>
-          <p:cNvPr id="18" name="TextBox 17"/>
-          <p:cNvSpPr txBox="1"/>
-          <p:nvPr/>
-        </p:nvSpPr>
-        <p:spPr>
-          <a:xfrm>
-            <a:off x="9003639" y="2240280"/>
-            <a:ext cx="2468880" cy="457200"/>
-          </a:xfrm>
-          <a:prstGeom prst="rect">
-            <a:avLst/>
-          </a:prstGeom>
-          <a:noFill/>
-        </p:spPr>
-        <p:txBody>
-          <a:bodyPr wrap="square">
-            <a:spAutoFit/>
-          </a:bodyPr>
-          <a:lstStyle/>
-          <a:p>
-            <a:pPr algn="ctr"/>
-            <a:r>
-              <a:rPr sz="1800" b="1">
-                <a:solidFill>
-                  <a:srgbClr val="6366F1"/>
-                </a:solidFill>
-                <a:latin typeface="Calibri"/>
-              </a:rPr>
-              <a:t>Narration</a:t>
-            </a:r>
-          </a:p>
-        </p:txBody>
-      </p:sp>
-      <p:sp>
-        <p:nvSpPr>
-          <p:cNvPr id="19" name="TextBox 18"/>
-          <p:cNvSpPr txBox="1"/>
-          <p:nvPr/>
-        </p:nvSpPr>
-        <p:spPr>
-          <a:xfrm>
-            <a:off x="9140799" y="2788920"/>
-            <a:ext cx="2194560" cy="1097280"/>
-          </a:xfrm>
-          <a:prstGeom prst="rect">
-            <a:avLst/>
-          </a:prstGeom>
-          <a:noFill/>
-        </p:spPr>
-        <p:txBody>
-          <a:bodyPr wrap="square">
-            <a:spAutoFit/>
-          </a:bodyPr>
-          <a:lstStyle/>
-          <a:p>
-            <a:pPr algn="ctr"/>
-            <a:r>
-              <a:rPr sz="1300" b="0">
-                <a:solidFill>
-                  <a:srgbClr val="475569"/>
-                </a:solidFill>
-                <a:latin typeface="Calibri"/>
-              </a:rPr>
-              <a:t>Adaptive captioning</a:t>
-            </a:r>
-          </a:p>
-          <a:p>
-            <a:pPr algn="ctr"/>
-            <a:r>
-              <a:rPr sz="1300" b="0">
-                <a:solidFill>
-                  <a:srgbClr val="475569"/>
-                </a:solidFill>
-                <a:latin typeface="Calibri"/>
-              </a:rPr>
-              <a:t>local inference</a:t>
-            </a:r>
-          </a:p>
-        </p:txBody>
-      </p:sp>
-      <p:sp>
-        <p:nvSpPr>
-          <p:cNvPr id="20" name="TextBox 19"/>
-          <p:cNvSpPr txBox="1"/>
-          <p:nvPr/>
-        </p:nvSpPr>
-        <p:spPr>
-          <a:xfrm>
-            <a:off x="822960" y="5029200"/>
-            <a:ext cx="10545775" cy="457200"/>
-          </a:xfrm>
-          <a:prstGeom prst="rect">
-            <a:avLst/>
-          </a:prstGeom>
-          <a:noFill/>
-        </p:spPr>
-        <p:txBody>
-          <a:bodyPr wrap="square">
-            <a:spAutoFit/>
-          </a:bodyPr>
-          <a:lstStyle/>
-          <a:p>
-            <a:pPr algn="l"/>
-            <a:r>
-              <a:rPr sz="1300" b="0">
-                <a:solidFill>
-                  <a:srgbClr val="94A3B8"/>
-                </a:solidFill>
-                <a:latin typeface="Calibri"/>
-              </a:rPr>
-              <a:t>YOLOv10n baseline → YOLO26s:  +24.7% mAP@0.5,  +32.7% mAP@0.5:0.95,  +26.1% recall.  Hardest class: pedestrian (mAP 0.692).</a:t>
-            </a:r>
-          </a:p>
-        </p:txBody>
-      </p:sp>
-    </p:spTree>
-  </p:cSld>
-  <p:clrMapOvr>
-    <a:masterClrMapping/>
-  </p:clrMapOvr>
-</p:sld>
-</file>
-
-<file path=ppt/slides/slide17.xml><?xml version="1.0" encoding="utf-8"?>
-<p:sld xmlns:a="http://schemas.openxmlformats.org/drawingml/2006/main" xmlns:p="http://schemas.openxmlformats.org/presentationml/2006/main" xmlns:r="http://schemas.openxmlformats.org/officeDocument/2006/relationships">
-  <p:cSld>
-    <p:bg>
-      <p:bgPr>
-        <a:solidFill>
-          <a:srgbClr val="F8FAFC"/>
-        </a:solidFill>
-        <a:effectLst/>
-      </p:bgPr>
-    </p:bg>
-    <p:spTree>
-      <p:nvGrpSpPr>
-        <p:cNvPr id="1" name=""/>
-        <p:cNvGrpSpPr/>
-        <p:nvPr/>
-      </p:nvGrpSpPr>
-      <p:grpSpPr/>
-      <p:sp>
-        <p:nvSpPr>
-          <p:cNvPr id="2" name="TextBox 1"/>
-          <p:cNvSpPr txBox="1"/>
-          <p:nvPr/>
-        </p:nvSpPr>
-        <p:spPr>
-          <a:xfrm>
             <a:off x="822960" y="1554480"/>
             <a:ext cx="10545775" cy="914400"/>
           </a:xfrm>
@@ -9992,149 +9635,45 @@
           </a:p>
         </p:txBody>
       </p:sp>
-      <p:sp>
-        <p:nvSpPr>
-          <p:cNvPr id="5" name="Rounded Rectangle 4"/>
-          <p:cNvSpPr/>
-          <p:nvPr/>
-        </p:nvSpPr>
-        <p:spPr>
-          <a:xfrm>
-            <a:off x="822960" y="1691640"/>
-            <a:ext cx="4663440" cy="3931920"/>
-          </a:xfrm>
-          <a:prstGeom prst="roundRect">
-            <a:avLst/>
-          </a:prstGeom>
-          <a:solidFill>
-            <a:srgbClr val="EEF2F6"/>
-          </a:solidFill>
+      <p:pic>
+        <p:nvPicPr>
+          <p:cNvPr id="5" name="Picture 4" descr="dashcam_raw_frame.png"/>
+          <p:cNvPicPr>
+            <a:picLocks noChangeAspect="1"/>
+          </p:cNvPicPr>
+          <p:nvPr/>
+        </p:nvPicPr>
+        <p:blipFill>
+          <a:blip r:embed="rId2"/>
+          <a:stretch>
+            <a:fillRect/>
+          </a:stretch>
+        </p:blipFill>
+        <p:spPr>
+          <a:xfrm>
+            <a:off x="822960" y="2011680"/>
+            <a:ext cx="4572000" cy="2571750"/>
+          </a:xfrm>
+          <a:prstGeom prst="rect">
+            <a:avLst/>
+          </a:prstGeom>
           <a:ln w="12700">
             <a:solidFill>
               <a:srgbClr val="E2E8F0"/>
             </a:solidFill>
           </a:ln>
         </p:spPr>
-        <p:style>
-          <a:lnRef idx="1">
-            <a:schemeClr val="accent1"/>
-          </a:lnRef>
-          <a:fillRef idx="3">
-            <a:schemeClr val="accent1"/>
-          </a:fillRef>
-          <a:effectRef idx="2">
-            <a:schemeClr val="accent1"/>
-          </a:effectRef>
-          <a:fontRef idx="minor">
-            <a:schemeClr val="lt1"/>
-          </a:fontRef>
-        </p:style>
-        <p:txBody>
-          <a:bodyPr rtlCol="0" anchor="ctr"/>
-          <a:lstStyle/>
-          <a:p>
-            <a:pPr algn="ctr"/>
-          </a:p>
-        </p:txBody>
-      </p:sp>
-      <p:sp>
-        <p:nvSpPr>
-          <p:cNvPr id="6" name="Oval 5"/>
-          <p:cNvSpPr/>
-          <p:nvPr/>
-        </p:nvSpPr>
-        <p:spPr>
-          <a:xfrm>
-            <a:off x="2743200" y="3017520"/>
-            <a:ext cx="822960" cy="822960"/>
-          </a:xfrm>
-          <a:prstGeom prst="ellipse">
-            <a:avLst/>
-          </a:prstGeom>
-          <a:solidFill>
-            <a:srgbClr val="FFFFFF"/>
-          </a:solidFill>
-          <a:ln w="19050">
-            <a:solidFill>
-              <a:srgbClr val="E2E8F0"/>
-            </a:solidFill>
-          </a:ln>
-        </p:spPr>
-        <p:style>
-          <a:lnRef idx="1">
-            <a:schemeClr val="accent1"/>
-          </a:lnRef>
-          <a:fillRef idx="3">
-            <a:schemeClr val="accent1"/>
-          </a:fillRef>
-          <a:effectRef idx="2">
-            <a:schemeClr val="accent1"/>
-          </a:effectRef>
-          <a:fontRef idx="minor">
-            <a:schemeClr val="lt1"/>
-          </a:fontRef>
-        </p:style>
-        <p:txBody>
-          <a:bodyPr rtlCol="0" anchor="ctr"/>
-          <a:lstStyle/>
-          <a:p>
-            <a:pPr algn="ctr"/>
-          </a:p>
-        </p:txBody>
-      </p:sp>
-      <p:sp>
-        <p:nvSpPr>
-          <p:cNvPr id="7" name="Isosceles Triangle 6"/>
-          <p:cNvSpPr/>
-          <p:nvPr/>
-        </p:nvSpPr>
-        <p:spPr>
-          <a:xfrm rot="5400000">
-            <a:off x="3035808" y="3264408"/>
-            <a:ext cx="292608" cy="329184"/>
-          </a:xfrm>
-          <a:prstGeom prst="triangle">
-            <a:avLst/>
-          </a:prstGeom>
-          <a:solidFill>
-            <a:srgbClr val="0D9488"/>
-          </a:solidFill>
-          <a:ln>
-            <a:noFill/>
-          </a:ln>
-        </p:spPr>
-        <p:style>
-          <a:lnRef idx="1">
-            <a:schemeClr val="accent1"/>
-          </a:lnRef>
-          <a:fillRef idx="3">
-            <a:schemeClr val="accent1"/>
-          </a:fillRef>
-          <a:effectRef idx="2">
-            <a:schemeClr val="accent1"/>
-          </a:effectRef>
-          <a:fontRef idx="minor">
-            <a:schemeClr val="lt1"/>
-          </a:fontRef>
-        </p:style>
-        <p:txBody>
-          <a:bodyPr rtlCol="0" anchor="ctr"/>
-          <a:lstStyle/>
-          <a:p>
-            <a:pPr algn="ctr"/>
-          </a:p>
-        </p:txBody>
-      </p:sp>
-      <p:sp>
-        <p:nvSpPr>
-          <p:cNvPr id="8" name="TextBox 7"/>
+      </p:pic>
+      <p:sp>
+        <p:nvSpPr>
+          <p:cNvPr id="6" name="TextBox 5"/>
           <p:cNvSpPr txBox="1"/>
           <p:nvPr/>
         </p:nvSpPr>
         <p:spPr>
           <a:xfrm>
-            <a:off x="822960" y="3931920"/>
-            <a:ext cx="4663440" cy="731520"/>
+            <a:off x="822960" y="4663440"/>
+            <a:ext cx="4572000" cy="365760"/>
           </a:xfrm>
           <a:prstGeom prst="rect">
             <a:avLst/>
@@ -10149,160 +9688,56 @@
           <a:p>
             <a:pPr algn="ctr"/>
             <a:r>
-              <a:rPr sz="1300" b="0">
-                <a:solidFill>
-                  <a:srgbClr val="475569"/>
+              <a:rPr sz="1200" b="1">
+                <a:solidFill>
+                  <a:srgbClr val="0D9488"/>
                 </a:solidFill>
                 <a:latin typeface="Calibri"/>
               </a:rPr>
-              <a:t>Raw dashcam frame</a:t>
-            </a:r>
-          </a:p>
-        </p:txBody>
-      </p:sp>
-      <p:sp>
-        <p:nvSpPr>
-          <p:cNvPr id="9" name="Rounded Rectangle 8"/>
-          <p:cNvSpPr/>
-          <p:nvPr/>
-        </p:nvSpPr>
-        <p:spPr>
-          <a:xfrm>
-            <a:off x="6656832" y="1691640"/>
-            <a:ext cx="4663440" cy="3931920"/>
-          </a:xfrm>
-          <a:prstGeom prst="roundRect">
-            <a:avLst/>
-          </a:prstGeom>
-          <a:solidFill>
-            <a:srgbClr val="EEF2F6"/>
-          </a:solidFill>
+              <a:t>Original dashcam frame (source video)</a:t>
+            </a:r>
+          </a:p>
+        </p:txBody>
+      </p:sp>
+      <p:pic>
+        <p:nvPicPr>
+          <p:cNvPr id="7" name="Picture 6" descr="dashcam_yolo_frame.png"/>
+          <p:cNvPicPr>
+            <a:picLocks noChangeAspect="1"/>
+          </p:cNvPicPr>
+          <p:nvPr/>
+        </p:nvPicPr>
+        <p:blipFill>
+          <a:blip r:embed="rId3"/>
+          <a:stretch>
+            <a:fillRect/>
+          </a:stretch>
+        </p:blipFill>
+        <p:spPr>
+          <a:xfrm>
+            <a:off x="6656832" y="2011680"/>
+            <a:ext cx="4572000" cy="2571750"/>
+          </a:xfrm>
+          <a:prstGeom prst="rect">
+            <a:avLst/>
+          </a:prstGeom>
           <a:ln w="12700">
             <a:solidFill>
               <a:srgbClr val="E2E8F0"/>
             </a:solidFill>
           </a:ln>
         </p:spPr>
-        <p:style>
-          <a:lnRef idx="1">
-            <a:schemeClr val="accent1"/>
-          </a:lnRef>
-          <a:fillRef idx="3">
-            <a:schemeClr val="accent1"/>
-          </a:fillRef>
-          <a:effectRef idx="2">
-            <a:schemeClr val="accent1"/>
-          </a:effectRef>
-          <a:fontRef idx="minor">
-            <a:schemeClr val="lt1"/>
-          </a:fontRef>
-        </p:style>
-        <p:txBody>
-          <a:bodyPr rtlCol="0" anchor="ctr"/>
-          <a:lstStyle/>
-          <a:p>
-            <a:pPr algn="ctr"/>
-          </a:p>
-        </p:txBody>
-      </p:sp>
-      <p:sp>
-        <p:nvSpPr>
-          <p:cNvPr id="10" name="Oval 9"/>
-          <p:cNvSpPr/>
-          <p:nvPr/>
-        </p:nvSpPr>
-        <p:spPr>
-          <a:xfrm>
-            <a:off x="8577072" y="3017520"/>
-            <a:ext cx="822960" cy="822960"/>
-          </a:xfrm>
-          <a:prstGeom prst="ellipse">
-            <a:avLst/>
-          </a:prstGeom>
-          <a:solidFill>
-            <a:srgbClr val="FFFFFF"/>
-          </a:solidFill>
-          <a:ln w="19050">
-            <a:solidFill>
-              <a:srgbClr val="E2E8F0"/>
-            </a:solidFill>
-          </a:ln>
-        </p:spPr>
-        <p:style>
-          <a:lnRef idx="1">
-            <a:schemeClr val="accent1"/>
-          </a:lnRef>
-          <a:fillRef idx="3">
-            <a:schemeClr val="accent1"/>
-          </a:fillRef>
-          <a:effectRef idx="2">
-            <a:schemeClr val="accent1"/>
-          </a:effectRef>
-          <a:fontRef idx="minor">
-            <a:schemeClr val="lt1"/>
-          </a:fontRef>
-        </p:style>
-        <p:txBody>
-          <a:bodyPr rtlCol="0" anchor="ctr"/>
-          <a:lstStyle/>
-          <a:p>
-            <a:pPr algn="ctr"/>
-          </a:p>
-        </p:txBody>
-      </p:sp>
-      <p:sp>
-        <p:nvSpPr>
-          <p:cNvPr id="11" name="Isosceles Triangle 10"/>
-          <p:cNvSpPr/>
-          <p:nvPr/>
-        </p:nvSpPr>
-        <p:spPr>
-          <a:xfrm rot="5400000">
-            <a:off x="8869680" y="3264408"/>
-            <a:ext cx="292608" cy="329184"/>
-          </a:xfrm>
-          <a:prstGeom prst="triangle">
-            <a:avLst/>
-          </a:prstGeom>
-          <a:solidFill>
-            <a:srgbClr val="0D9488"/>
-          </a:solidFill>
-          <a:ln>
-            <a:noFill/>
-          </a:ln>
-        </p:spPr>
-        <p:style>
-          <a:lnRef idx="1">
-            <a:schemeClr val="accent1"/>
-          </a:lnRef>
-          <a:fillRef idx="3">
-            <a:schemeClr val="accent1"/>
-          </a:fillRef>
-          <a:effectRef idx="2">
-            <a:schemeClr val="accent1"/>
-          </a:effectRef>
-          <a:fontRef idx="minor">
-            <a:schemeClr val="lt1"/>
-          </a:fontRef>
-        </p:style>
-        <p:txBody>
-          <a:bodyPr rtlCol="0" anchor="ctr"/>
-          <a:lstStyle/>
-          <a:p>
-            <a:pPr algn="ctr"/>
-          </a:p>
-        </p:txBody>
-      </p:sp>
-      <p:sp>
-        <p:nvSpPr>
-          <p:cNvPr id="12" name="TextBox 11"/>
+      </p:pic>
+      <p:sp>
+        <p:nvSpPr>
+          <p:cNvPr id="8" name="TextBox 7"/>
           <p:cNvSpPr txBox="1"/>
           <p:nvPr/>
         </p:nvSpPr>
         <p:spPr>
           <a:xfrm>
-            <a:off x="6656832" y="3931920"/>
-            <a:ext cx="4663440" cy="731520"/>
+            <a:off x="6656832" y="4663440"/>
+            <a:ext cx="4572000" cy="365760"/>
           </a:xfrm>
           <a:prstGeom prst="rect">
             <a:avLst/>
@@ -10317,20 +9752,20 @@
           <a:p>
             <a:pPr algn="ctr"/>
             <a:r>
-              <a:rPr sz="1300" b="0">
-                <a:solidFill>
-                  <a:srgbClr val="475569"/>
+              <a:rPr sz="1200" b="1">
+                <a:solidFill>
+                  <a:srgbClr val="0D9488"/>
                 </a:solidFill>
                 <a:latin typeface="Calibri"/>
               </a:rPr>
-              <a:t>YOLO bounding boxes</a:t>
-            </a:r>
-          </a:p>
-        </p:txBody>
-      </p:sp>
-      <p:sp>
-        <p:nvSpPr>
-          <p:cNvPr id="13" name="Right Arrow 12"/>
+              <a:t>YOLO26s detection overlay (annotated video)</a:t>
+            </a:r>
+          </a:p>
+        </p:txBody>
+      </p:sp>
+      <p:sp>
+        <p:nvSpPr>
+          <p:cNvPr id="9" name="Right Arrow 8"/>
           <p:cNvSpPr/>
           <p:nvPr/>
         </p:nvSpPr>
@@ -10553,177 +9988,38 @@
           </a:p>
         </p:txBody>
       </p:sp>
-      <p:sp>
-        <p:nvSpPr>
-          <p:cNvPr id="6" name="Rounded Rectangle 5"/>
-          <p:cNvSpPr/>
-          <p:nvPr/>
-        </p:nvSpPr>
+      <p:pic>
+        <p:nvPicPr>
+          <p:cNvPr id="6" name="Picture 5" descr="yolo_val_predictions.jpg"/>
+          <p:cNvPicPr>
+            <a:picLocks noChangeAspect="1"/>
+          </p:cNvPicPr>
+          <p:nvPr/>
+        </p:nvPicPr>
+        <p:blipFill>
+          <a:blip r:embed="rId2"/>
+          <a:stretch>
+            <a:fillRect/>
+          </a:stretch>
+        </p:blipFill>
         <p:spPr>
           <a:xfrm>
             <a:off x="822960" y="2011680"/>
-            <a:ext cx="7132320" cy="3657600"/>
-          </a:xfrm>
-          <a:prstGeom prst="roundRect">
-            <a:avLst/>
-          </a:prstGeom>
-          <a:solidFill>
-            <a:srgbClr val="EEF2F6"/>
-          </a:solidFill>
+            <a:ext cx="3657600" cy="3657600"/>
+          </a:xfrm>
+          <a:prstGeom prst="rect">
+            <a:avLst/>
+          </a:prstGeom>
           <a:ln w="12700">
             <a:solidFill>
               <a:srgbClr val="E2E8F0"/>
             </a:solidFill>
           </a:ln>
         </p:spPr>
-        <p:style>
-          <a:lnRef idx="1">
-            <a:schemeClr val="accent1"/>
-          </a:lnRef>
-          <a:fillRef idx="3">
-            <a:schemeClr val="accent1"/>
-          </a:fillRef>
-          <a:effectRef idx="2">
-            <a:schemeClr val="accent1"/>
-          </a:effectRef>
-          <a:fontRef idx="minor">
-            <a:schemeClr val="lt1"/>
-          </a:fontRef>
-        </p:style>
-        <p:txBody>
-          <a:bodyPr rtlCol="0" anchor="ctr"/>
-          <a:lstStyle/>
-          <a:p>
-            <a:pPr algn="ctr"/>
-          </a:p>
-        </p:txBody>
-      </p:sp>
-      <p:sp>
-        <p:nvSpPr>
-          <p:cNvPr id="7" name="Oval 6"/>
-          <p:cNvSpPr/>
-          <p:nvPr/>
-        </p:nvSpPr>
-        <p:spPr>
-          <a:xfrm>
-            <a:off x="3977640" y="3200400"/>
-            <a:ext cx="822960" cy="822960"/>
-          </a:xfrm>
-          <a:prstGeom prst="ellipse">
-            <a:avLst/>
-          </a:prstGeom>
-          <a:solidFill>
-            <a:srgbClr val="FFFFFF"/>
-          </a:solidFill>
-          <a:ln w="19050">
-            <a:solidFill>
-              <a:srgbClr val="E2E8F0"/>
-            </a:solidFill>
-          </a:ln>
-        </p:spPr>
-        <p:style>
-          <a:lnRef idx="1">
-            <a:schemeClr val="accent1"/>
-          </a:lnRef>
-          <a:fillRef idx="3">
-            <a:schemeClr val="accent1"/>
-          </a:fillRef>
-          <a:effectRef idx="2">
-            <a:schemeClr val="accent1"/>
-          </a:effectRef>
-          <a:fontRef idx="minor">
-            <a:schemeClr val="lt1"/>
-          </a:fontRef>
-        </p:style>
-        <p:txBody>
-          <a:bodyPr rtlCol="0" anchor="ctr"/>
-          <a:lstStyle/>
-          <a:p>
-            <a:pPr algn="ctr"/>
-          </a:p>
-        </p:txBody>
-      </p:sp>
-      <p:sp>
-        <p:nvSpPr>
-          <p:cNvPr id="8" name="Isosceles Triangle 7"/>
-          <p:cNvSpPr/>
-          <p:nvPr/>
-        </p:nvSpPr>
-        <p:spPr>
-          <a:xfrm rot="5400000">
-            <a:off x="4270248" y="3447288"/>
-            <a:ext cx="292608" cy="329184"/>
-          </a:xfrm>
-          <a:prstGeom prst="triangle">
-            <a:avLst/>
-          </a:prstGeom>
-          <a:solidFill>
-            <a:srgbClr val="0D9488"/>
-          </a:solidFill>
-          <a:ln>
-            <a:noFill/>
-          </a:ln>
-        </p:spPr>
-        <p:style>
-          <a:lnRef idx="1">
-            <a:schemeClr val="accent1"/>
-          </a:lnRef>
-          <a:fillRef idx="3">
-            <a:schemeClr val="accent1"/>
-          </a:fillRef>
-          <a:effectRef idx="2">
-            <a:schemeClr val="accent1"/>
-          </a:effectRef>
-          <a:fontRef idx="minor">
-            <a:schemeClr val="lt1"/>
-          </a:fontRef>
-        </p:style>
-        <p:txBody>
-          <a:bodyPr rtlCol="0" anchor="ctr"/>
-          <a:lstStyle/>
-          <a:p>
-            <a:pPr algn="ctr"/>
-          </a:p>
-        </p:txBody>
-      </p:sp>
-      <p:sp>
-        <p:nvSpPr>
-          <p:cNvPr id="9" name="TextBox 8"/>
-          <p:cNvSpPr txBox="1"/>
-          <p:nvPr/>
-        </p:nvSpPr>
-        <p:spPr>
-          <a:xfrm>
-            <a:off x="822960" y="4114800"/>
-            <a:ext cx="7132320" cy="731520"/>
-          </a:xfrm>
-          <a:prstGeom prst="rect">
-            <a:avLst/>
-          </a:prstGeom>
-          <a:noFill/>
-        </p:spPr>
-        <p:txBody>
-          <a:bodyPr wrap="square">
-            <a:spAutoFit/>
-          </a:bodyPr>
-          <a:lstStyle/>
-          <a:p>
-            <a:pPr algn="ctr"/>
-            <a:r>
-              <a:rPr sz="1300" b="0">
-                <a:solidFill>
-                  <a:srgbClr val="475569"/>
-                </a:solidFill>
-                <a:latin typeface="Calibri"/>
-              </a:rPr>
-              <a:t>Stage 1 — YOLO-only output (5-sec clip, no brand chips yet)</a:t>
-            </a:r>
-          </a:p>
-        </p:txBody>
-      </p:sp>
-      <p:sp>
-        <p:nvSpPr>
-          <p:cNvPr id="10" name="Rounded Rectangle 9"/>
+      </p:pic>
+      <p:sp>
+        <p:nvSpPr>
+          <p:cNvPr id="7" name="Rounded Rectangle 6"/>
           <p:cNvSpPr/>
           <p:nvPr/>
         </p:nvSpPr>
@@ -10768,7 +10064,7 @@
       </p:sp>
       <p:sp>
         <p:nvSpPr>
-          <p:cNvPr id="11" name="Rectangle 10"/>
+          <p:cNvPr id="8" name="Rectangle 7"/>
           <p:cNvSpPr/>
           <p:nvPr/>
         </p:nvSpPr>
@@ -10811,7 +10107,7 @@
       </p:sp>
       <p:sp>
         <p:nvSpPr>
-          <p:cNvPr id="12" name="TextBox 11"/>
+          <p:cNvPr id="9" name="TextBox 8"/>
           <p:cNvSpPr txBox="1"/>
           <p:nvPr/>
         </p:nvSpPr>
@@ -10846,7 +10142,7 @@
       </p:sp>
       <p:sp>
         <p:nvSpPr>
-          <p:cNvPr id="13" name="TextBox 12"/>
+          <p:cNvPr id="10" name="TextBox 9"/>
           <p:cNvSpPr txBox="1"/>
           <p:nvPr/>
         </p:nvSpPr>
@@ -10881,7 +10177,7 @@
       </p:sp>
       <p:sp>
         <p:nvSpPr>
-          <p:cNvPr id="14" name="Rounded Rectangle 13"/>
+          <p:cNvPr id="11" name="Rounded Rectangle 10"/>
           <p:cNvSpPr/>
           <p:nvPr/>
         </p:nvSpPr>
@@ -10926,7 +10222,7 @@
       </p:sp>
       <p:sp>
         <p:nvSpPr>
-          <p:cNvPr id="15" name="Rectangle 14"/>
+          <p:cNvPr id="12" name="Rectangle 11"/>
           <p:cNvSpPr/>
           <p:nvPr/>
         </p:nvSpPr>
@@ -10969,7 +10265,7 @@
       </p:sp>
       <p:sp>
         <p:nvSpPr>
-          <p:cNvPr id="16" name="TextBox 15"/>
+          <p:cNvPr id="13" name="TextBox 12"/>
           <p:cNvSpPr txBox="1"/>
           <p:nvPr/>
         </p:nvSpPr>
@@ -11004,7 +10300,7 @@
       </p:sp>
       <p:sp>
         <p:nvSpPr>
-          <p:cNvPr id="17" name="TextBox 16"/>
+          <p:cNvPr id="14" name="TextBox 13"/>
           <p:cNvSpPr txBox="1"/>
           <p:nvPr/>
         </p:nvSpPr>
@@ -11039,7 +10335,7 @@
       </p:sp>
       <p:sp>
         <p:nvSpPr>
-          <p:cNvPr id="18" name="Rounded Rectangle 17"/>
+          <p:cNvPr id="15" name="Rounded Rectangle 14"/>
           <p:cNvSpPr/>
           <p:nvPr/>
         </p:nvSpPr>
@@ -11084,7 +10380,7 @@
       </p:sp>
       <p:sp>
         <p:nvSpPr>
-          <p:cNvPr id="19" name="Rectangle 18"/>
+          <p:cNvPr id="16" name="Rectangle 15"/>
           <p:cNvSpPr/>
           <p:nvPr/>
         </p:nvSpPr>
@@ -11127,7 +10423,7 @@
       </p:sp>
       <p:sp>
         <p:nvSpPr>
-          <p:cNvPr id="20" name="TextBox 19"/>
+          <p:cNvPr id="17" name="TextBox 16"/>
           <p:cNvSpPr txBox="1"/>
           <p:nvPr/>
         </p:nvSpPr>
@@ -11162,7 +10458,7 @@
       </p:sp>
       <p:sp>
         <p:nvSpPr>
-          <p:cNvPr id="21" name="TextBox 20"/>
+          <p:cNvPr id="18" name="TextBox 17"/>
           <p:cNvSpPr txBox="1"/>
           <p:nvPr/>
         </p:nvSpPr>
@@ -11197,7 +10493,7 @@
       </p:sp>
       <p:sp>
         <p:nvSpPr>
-          <p:cNvPr id="22" name="TextBox 21"/>
+          <p:cNvPr id="19" name="TextBox 18"/>
           <p:cNvSpPr txBox="1"/>
           <p:nvPr/>
         </p:nvSpPr>
